--- a/presentations/materi-kelas-x-gen-ai-dan-penggunaan-bijak.pptx
+++ b/presentations/materi-kelas-x-gen-ai-dan-penggunaan-bijak.pptx
@@ -2,18 +2,19 @@
 <file path=ppt/presentation.xml><?xml version="1.0" encoding="utf-8"?>
 <p:presentation xmlns:p="http://schemas.openxmlformats.org/presentationml/2006/main">
   <p:sldMasterIdLst>
-    <p:sldMasterId xmlns:r="http://schemas.openxmlformats.org/officeDocument/2006/relationships" id="2147483648" r:id="R0c77f4102b064cf7"/>
+    <p:sldMasterId xmlns:r="http://schemas.openxmlformats.org/officeDocument/2006/relationships" id="2147483648" r:id="Rfcb88d825bc74d2b"/>
   </p:sldMasterIdLst>
   <p:notesMasterIdLst>
-    <p:notesMasterId xmlns:r="http://schemas.openxmlformats.org/officeDocument/2006/relationships" r:id="R3228ac6305234d44"/>
+    <p:notesMasterId xmlns:r="http://schemas.openxmlformats.org/officeDocument/2006/relationships" r:id="R2a0f765245934d12"/>
   </p:notesMasterIdLst>
   <p:sldIdLst>
-    <p:sldId xmlns:r="http://schemas.openxmlformats.org/officeDocument/2006/relationships" id="256" r:id="R46f539013abd4309"/>
-    <p:sldId xmlns:r="http://schemas.openxmlformats.org/officeDocument/2006/relationships" id="257" r:id="R8c0c3a1f04c0437f"/>
-    <p:sldId xmlns:r="http://schemas.openxmlformats.org/officeDocument/2006/relationships" id="258" r:id="R23aad10344f342c4"/>
-    <p:sldId xmlns:r="http://schemas.openxmlformats.org/officeDocument/2006/relationships" id="259" r:id="R1a879acbfd5c4c20"/>
-    <p:sldId xmlns:r="http://schemas.openxmlformats.org/officeDocument/2006/relationships" id="260" r:id="R4f6ddcb5911f47d9"/>
-    <p:sldId xmlns:r="http://schemas.openxmlformats.org/officeDocument/2006/relationships" id="261" r:id="Rfb9a9b993c8741da"/>
+    <p:sldId xmlns:r="http://schemas.openxmlformats.org/officeDocument/2006/relationships" id="256" r:id="R3bdc803cebe44caf"/>
+    <p:sldId xmlns:r="http://schemas.openxmlformats.org/officeDocument/2006/relationships" id="257" r:id="Rf6b8ac09811c4968"/>
+    <p:sldId xmlns:r="http://schemas.openxmlformats.org/officeDocument/2006/relationships" id="258" r:id="R06f99e16d5cd476f"/>
+    <p:sldId xmlns:r="http://schemas.openxmlformats.org/officeDocument/2006/relationships" id="259" r:id="R1af4e1fe49ff41dd"/>
+    <p:sldId xmlns:r="http://schemas.openxmlformats.org/officeDocument/2006/relationships" id="260" r:id="Rc45aae16597f4e54"/>
+    <p:sldId xmlns:r="http://schemas.openxmlformats.org/officeDocument/2006/relationships" id="261" r:id="Rcae76619daf948b8"/>
+    <p:sldId xmlns:r="http://schemas.openxmlformats.org/officeDocument/2006/relationships" id="262" r:id="R4b46c99696da4316"/>
   </p:sldIdLst>
   <p:sldSz cx="12192000" cy="6858000"/>
   <p:notesSz cx="6858000" cy="9144000"/>
@@ -165,7 +166,7 @@
 <file path=ppt/notesMasters/theme/theme3.xml><?xml version="1.0" encoding="utf-8"?>
 <a:theme xmlns:a="http://schemas.openxmlformats.org/drawingml/2006/main" name="ChatGPT">
   <a:themeElements>
-    <a:clrScheme name="Teladan Gen AI">
+    <a:clrScheme name="ChatGPT">
       <a:dk1>
         <a:srgbClr val="000000"/>
       </a:dk1>
@@ -173,34 +174,34 @@
         <a:srgbClr val="FFFFFF"/>
       </a:lt1>
       <a:dk2>
-        <a:srgbClr val="16324F"/>
+        <a:srgbClr val="0E2841"/>
       </a:dk2>
       <a:lt2>
-        <a:srgbClr val="E5EEF5"/>
+        <a:srgbClr val="E8E8E8"/>
       </a:lt2>
       <a:accent1>
-        <a:srgbClr val="24577A"/>
+        <a:srgbClr val="156082"/>
       </a:accent1>
       <a:accent2>
-        <a:srgbClr val="D8A93A"/>
+        <a:srgbClr val="E97132"/>
       </a:accent2>
       <a:accent3>
-        <a:srgbClr val="5F87A2"/>
+        <a:srgbClr val="196B24"/>
       </a:accent3>
       <a:accent4>
-        <a:srgbClr val="A6C4D8"/>
+        <a:srgbClr val="0F9ED5"/>
       </a:accent4>
       <a:accent5>
-        <a:srgbClr val="345D7A"/>
+        <a:srgbClr val="A02B93"/>
       </a:accent5>
       <a:accent6>
-        <a:srgbClr val="6F8CA0"/>
+        <a:srgbClr val="4EA72E"/>
       </a:accent6>
       <a:hlink>
-        <a:srgbClr val="2563EB"/>
+        <a:srgbClr val="467886"/>
       </a:hlink>
       <a:folHlink>
-        <a:srgbClr val="7C3AED"/>
+        <a:srgbClr val="96607D"/>
       </a:folHlink>
     </a:clrScheme>
     <a:fontScheme name="Office">
@@ -215,7 +216,7 @@
         <a:cs typeface="Calibri"/>
       </a:minorFont>
     </a:fontScheme>
-    <a:fmtScheme name="Teladan Gen AI">
+    <a:fmtScheme name="ChatGPT">
       <a:fillStyleLst>
         <a:solidFill>
           <a:schemeClr val="phClr"/>
@@ -522,7 +523,12 @@
           </a:p>
           <a:p xmlns:a="http://schemas.openxmlformats.org/drawingml/2006/main">
             <a:r>
-              <a:t>Google Gemini Help Center (id): https://support.google.com/gemini/answer/13954172?hl=id</a:t>
+              <a:t>OpenAI Help Center: https://help.openai.com/en/articles/12677804-what-is-chatgpt-faq</a:t>
+            </a:r>
+          </a:p>
+          <a:p xmlns:a="http://schemas.openxmlformats.org/drawingml/2006/main">
+            <a:r>
+              <a:t>Google Gemini Help: https://support.google.com/gemini/answer/13954172?hl=id</a:t>
             </a:r>
           </a:p>
           <a:p xmlns:a="http://schemas.openxmlformats.org/drawingml/2006/main">
@@ -602,7 +608,17 @@
           </a:p>
           <a:p xmlns:a="http://schemas.openxmlformats.org/drawingml/2006/main">
             <a:r>
-              <a:t>Google Gemini Help Center (id): https://support.google.com/gemini/answer/13954172?hl=id</a:t>
+              <a:t>ChatGPT product: https://chatgpt.com/</a:t>
+            </a:r>
+          </a:p>
+          <a:p xmlns:a="http://schemas.openxmlformats.org/drawingml/2006/main">
+            <a:r>
+              <a:t>Gemini app: https://gemini.google.com/app?hl=id</a:t>
+            </a:r>
+          </a:p>
+          <a:p xmlns:a="http://schemas.openxmlformats.org/drawingml/2006/main">
+            <a:r>
+              <a:t>Microsoft 365 Copilot overview: https://learn.microsoft.com/en-us/microsoft-365/copilot/microsoft-365-copilot-overview</a:t>
             </a:r>
           </a:p>
         </p:txBody>
@@ -675,16 +691,6 @@
               <a:t>[Sources]</a:t>
             </a:r>
           </a:p>
-          <a:p xmlns:a="http://schemas.openxmlformats.org/drawingml/2006/main">
-            <a:r>
-              <a:t>Microsoft AI: https://www.microsoft.com/id-id/ai/ai-101/what-is-generative-ai</a:t>
-            </a:r>
-          </a:p>
-          <a:p xmlns:a="http://schemas.openxmlformats.org/drawingml/2006/main">
-            <a:r>
-              <a:t>Google Gemini Help Center (id): https://support.google.com/gemini/answer/13954172?hl=id</a:t>
-            </a:r>
-          </a:p>
         </p:txBody>
       </p:sp>
       <p:sp>
@@ -755,11 +761,6 @@
               <a:t>[Sources]</a:t>
             </a:r>
           </a:p>
-          <a:p xmlns:a="http://schemas.openxmlformats.org/drawingml/2006/main">
-            <a:r>
-              <a:t>Google Gemini Help Center (id): https://support.google.com/gemini/answer/13954172?hl=id</a:t>
-            </a:r>
-          </a:p>
         </p:txBody>
       </p:sp>
       <p:sp>
@@ -788,6 +789,86 @@
 </file>
 
 <file path=ppt/notesSlides/notesSlide6.xml><?xml version="1.0" encoding="utf-8"?>
+<p:notes xmlns:p="http://schemas.openxmlformats.org/presentationml/2006/main">
+  <p:cSld>
+    <p:spTree>
+      <p:nvGrpSpPr>
+        <p:cNvPr id="1" name=""/>
+        <p:cNvGrpSpPr/>
+        <p:nvPr/>
+      </p:nvGrpSpPr>
+      <p:grpSpPr>
+        <a:xfrm xmlns:a="http://schemas.openxmlformats.org/drawingml/2006/main"/>
+      </p:grpSpPr>
+      <p:sp>
+        <p:nvSpPr>
+          <p:cNvPr id="2" name="Slide Image Placeholder 1"/>
+          <p:cNvSpPr>
+            <a:spLocks xmlns:a="http://schemas.openxmlformats.org/drawingml/2006/main" noGrp="1"/>
+          </p:cNvSpPr>
+          <p:nvPr>
+            <p:ph type="sldImg" idx="0"/>
+          </p:nvPr>
+        </p:nvSpPr>
+        <p:spPr/>
+      </p:sp>
+      <p:sp>
+        <p:nvSpPr>
+          <p:cNvPr id="3" name="Notes Placeholder 2"/>
+          <p:cNvSpPr>
+            <a:spLocks xmlns:a="http://schemas.openxmlformats.org/drawingml/2006/main" noGrp="1"/>
+          </p:cNvSpPr>
+          <p:nvPr>
+            <p:ph type="body" idx="1"/>
+          </p:nvPr>
+        </p:nvSpPr>
+        <p:spPr/>
+        <p:txBody>
+          <a:bodyPr xmlns:a="http://schemas.openxmlformats.org/drawingml/2006/main"/>
+          <a:lstStyle xmlns:a="http://schemas.openxmlformats.org/drawingml/2006/main"/>
+          <a:p xmlns:a="http://schemas.openxmlformats.org/drawingml/2006/main">
+            <a:r>
+              <a:t>[Sources]</a:t>
+            </a:r>
+          </a:p>
+          <a:p xmlns:a="http://schemas.openxmlformats.org/drawingml/2006/main">
+            <a:r>
+              <a:t>Google Gemini app notice: https://gemini.google.com/app?hl=id</a:t>
+            </a:r>
+          </a:p>
+          <a:p xmlns:a="http://schemas.openxmlformats.org/drawingml/2006/main">
+            <a:r>
+              <a:t>Google Gemini Help image generation policy: https://support.google.com/gemini/answer/14286560?p=b_gen_img</a:t>
+            </a:r>
+          </a:p>
+        </p:txBody>
+      </p:sp>
+      <p:sp>
+        <p:nvSpPr>
+          <p:cNvPr id="4" name="Slide Number Placeholder 3"/>
+          <p:cNvSpPr>
+            <a:spLocks xmlns:a="http://schemas.openxmlformats.org/drawingml/2006/main" noGrp="1"/>
+          </p:cNvSpPr>
+          <p:nvPr>
+            <p:ph type="sldNum" idx="5"/>
+          </p:nvPr>
+        </p:nvSpPr>
+        <p:spPr/>
+        <p:txBody>
+          <a:bodyPr xmlns:a="http://schemas.openxmlformats.org/drawingml/2006/main"/>
+          <a:lstStyle xmlns:a="http://schemas.openxmlformats.org/drawingml/2006/main"/>
+          <a:p xmlns:a="http://schemas.openxmlformats.org/drawingml/2006/main"/>
+        </p:txBody>
+      </p:sp>
+    </p:spTree>
+  </p:cSld>
+  <p:clrMapOvr>
+    <a:masterClrMapping xmlns:a="http://schemas.openxmlformats.org/drawingml/2006/main"/>
+  </p:clrMapOvr>
+</p:notes>
+</file>
+
+<file path=ppt/notesSlides/notesSlide7.xml><?xml version="1.0" encoding="utf-8"?>
 <p:notes xmlns:p="http://schemas.openxmlformats.org/presentationml/2006/main">
   <p:cSld>
     <p:spTree>
@@ -895,7 +976,7 @@
   </p:cSld>
   <p:clrMap bg1="lt1" tx1="dk1" bg2="lt2" tx2="dk2" accent1="accent1" accent2="accent2" accent3="accent3" accent4="accent4" accent5="accent5" accent6="accent6" hlink="hlink" folHlink="folHlink"/>
   <p:sldLayoutIdLst>
-    <p:sldLayoutId xmlns:r="http://schemas.openxmlformats.org/officeDocument/2006/relationships" id="2147483649" r:id="Racea5552b80744a6"/>
+    <p:sldLayoutId xmlns:r="http://schemas.openxmlformats.org/officeDocument/2006/relationships" id="2147483649" r:id="Rb70ccf6b1285483f"/>
   </p:sldLayoutIdLst>
   <p:txStyles>
     <p:titleStyle>
@@ -1180,7 +1261,7 @@
 <file path=ppt/slideMasters/theme/theme2.xml><?xml version="1.0" encoding="utf-8"?>
 <a:theme xmlns:a="http://schemas.openxmlformats.org/drawingml/2006/main" name="ChatGPT">
   <a:themeElements>
-    <a:clrScheme name="Teladan Gen AI">
+    <a:clrScheme name="ChatGPT">
       <a:dk1>
         <a:srgbClr val="000000"/>
       </a:dk1>
@@ -1188,34 +1269,34 @@
         <a:srgbClr val="FFFFFF"/>
       </a:lt1>
       <a:dk2>
-        <a:srgbClr val="16324F"/>
+        <a:srgbClr val="0E2841"/>
       </a:dk2>
       <a:lt2>
-        <a:srgbClr val="E5EEF5"/>
+        <a:srgbClr val="E8E8E8"/>
       </a:lt2>
       <a:accent1>
-        <a:srgbClr val="24577A"/>
+        <a:srgbClr val="156082"/>
       </a:accent1>
       <a:accent2>
-        <a:srgbClr val="D8A93A"/>
+        <a:srgbClr val="E97132"/>
       </a:accent2>
       <a:accent3>
-        <a:srgbClr val="5F87A2"/>
+        <a:srgbClr val="196B24"/>
       </a:accent3>
       <a:accent4>
-        <a:srgbClr val="A6C4D8"/>
+        <a:srgbClr val="0F9ED5"/>
       </a:accent4>
       <a:accent5>
-        <a:srgbClr val="345D7A"/>
+        <a:srgbClr val="A02B93"/>
       </a:accent5>
       <a:accent6>
-        <a:srgbClr val="6F8CA0"/>
+        <a:srgbClr val="4EA72E"/>
       </a:accent6>
       <a:hlink>
-        <a:srgbClr val="2563EB"/>
+        <a:srgbClr val="467886"/>
       </a:hlink>
       <a:folHlink>
-        <a:srgbClr val="7C3AED"/>
+        <a:srgbClr val="96607D"/>
       </a:folHlink>
     </a:clrScheme>
     <a:fontScheme name="Office">
@@ -1230,7 +1311,7 @@
         <a:cs typeface="Calibri"/>
       </a:minorFont>
     </a:fontScheme>
-    <a:fmtScheme name="Teladan Gen AI">
+    <a:fmtScheme name="ChatGPT">
       <a:fillStyleLst>
         <a:solidFill>
           <a:schemeClr val="phClr"/>
@@ -1450,7 +1531,7 @@
           <p:nvPr/>
         </p:nvPicPr>
         <p:blipFill>
-          <a:blip xmlns:r="http://schemas.openxmlformats.org/officeDocument/2006/relationships" xmlns:a="http://schemas.openxmlformats.org/drawingml/2006/main" r:embed="Rc5e4b68dfe9b4bfb"/>
+          <a:blip xmlns:r="http://schemas.openxmlformats.org/officeDocument/2006/relationships" xmlns:a="http://schemas.openxmlformats.org/drawingml/2006/main" r:embed="Refb2556ae73045a8"/>
           <a:stretch xmlns:a="http://schemas.openxmlformats.org/drawingml/2006/main"/>
         </p:blipFill>
         <p:spPr>
@@ -1468,7 +1549,7 @@
           <p:cNvPr id="2" name="">
             <a:extLst xmlns:a="http://schemas.openxmlformats.org/drawingml/2006/main">
               <a:ext uri="{FF2B5EF4-FFF2-40B4-BE49-F238E27FC236}">
-                <a16:creationId xmlns:a16="http://schemas.microsoft.com/office/drawing/2014/main" id="{F638BB2F-055A-4DD0-9137-1EDB73F9C963}"/>
+                <a16:creationId xmlns:a16="http://schemas.microsoft.com/office/drawing/2014/main" id="{320CD8B0-77C5-48F7-BE25-76247836A9A7}"/>
               </a:ext>
             </a:extLst>
           </p:cNvPr>
@@ -1480,7 +1561,7 @@
         <p:spPr>
           <a:xfrm xmlns:a="http://schemas.openxmlformats.org/drawingml/2006/main">
             <a:off x="723900" y="1085850"/>
-            <a:ext cx="4667250" cy="3848100"/>
+            <a:ext cx="4762500" cy="3905250"/>
           </a:xfrm>
           <a:prstGeom xmlns:a="http://schemas.openxmlformats.org/drawingml/2006/main" prst="rect">
             <a:avLst/>
@@ -1499,19 +1580,19 @@
           <p:cNvPr id="3" name="">
             <a:extLst xmlns:a="http://schemas.openxmlformats.org/drawingml/2006/main">
               <a:ext uri="{FF2B5EF4-FFF2-40B4-BE49-F238E27FC236}">
-                <a16:creationId xmlns:a16="http://schemas.microsoft.com/office/drawing/2014/main" id="{79EC7A23-32C7-4431-A50C-5CC74D157486}"/>
-              </a:ext>
-            </a:extLst>
-          </p:cNvPr>
-          <p:cNvSpPr>
-            <a:spLocks xmlns:a="http://schemas.openxmlformats.org/drawingml/2006/main" noGrp="1"/>
-          </p:cNvSpPr>
-          <p:nvPr/>
-        </p:nvSpPr>
-        <p:spPr>
-          <a:xfrm xmlns:a="http://schemas.openxmlformats.org/drawingml/2006/main">
-            <a:off x="5676900" y="1085850"/>
-            <a:ext cx="5791200" cy="3848100"/>
+                <a16:creationId xmlns:a16="http://schemas.microsoft.com/office/drawing/2014/main" id="{406DD3F4-E6E2-475D-BC87-8A433094BFF8}"/>
+              </a:ext>
+            </a:extLst>
+          </p:cNvPr>
+          <p:cNvSpPr>
+            <a:spLocks xmlns:a="http://schemas.openxmlformats.org/drawingml/2006/main" noGrp="1"/>
+          </p:cNvSpPr>
+          <p:nvPr/>
+        </p:nvSpPr>
+        <p:spPr>
+          <a:xfrm xmlns:a="http://schemas.openxmlformats.org/drawingml/2006/main">
+            <a:off x="5734050" y="1085850"/>
+            <a:ext cx="5734050" cy="3905250"/>
           </a:xfrm>
           <a:prstGeom xmlns:a="http://schemas.openxmlformats.org/drawingml/2006/main" prst="rect">
             <a:avLst/>
@@ -1530,19 +1611,19 @@
           <p:cNvPr id="4" name="">
             <a:extLst xmlns:a="http://schemas.openxmlformats.org/drawingml/2006/main">
               <a:ext uri="{FF2B5EF4-FFF2-40B4-BE49-F238E27FC236}">
-                <a16:creationId xmlns:a16="http://schemas.microsoft.com/office/drawing/2014/main" id="{07A00FEC-8FCE-41CF-B346-CD5923481815}"/>
-              </a:ext>
-            </a:extLst>
-          </p:cNvPr>
-          <p:cNvSpPr>
-            <a:spLocks xmlns:a="http://schemas.openxmlformats.org/drawingml/2006/main" noGrp="1"/>
-          </p:cNvSpPr>
-          <p:nvPr/>
-        </p:nvSpPr>
-        <p:spPr>
-          <a:xfrm xmlns:a="http://schemas.openxmlformats.org/drawingml/2006/main">
-            <a:off x="1104900" y="1657350"/>
-            <a:ext cx="3429000" cy="514350"/>
+                <a16:creationId xmlns:a16="http://schemas.microsoft.com/office/drawing/2014/main" id="{E4090AB7-50AB-4C8F-8EE8-284290B8C098}"/>
+              </a:ext>
+            </a:extLst>
+          </p:cNvPr>
+          <p:cNvSpPr>
+            <a:spLocks xmlns:a="http://schemas.openxmlformats.org/drawingml/2006/main" noGrp="1"/>
+          </p:cNvSpPr>
+          <p:nvPr/>
+        </p:nvSpPr>
+        <p:spPr>
+          <a:xfrm xmlns:a="http://schemas.openxmlformats.org/drawingml/2006/main">
+            <a:off x="1123950" y="1676400"/>
+            <a:ext cx="3429000" cy="381000"/>
           </a:xfrm>
           <a:prstGeom xmlns:a="http://schemas.openxmlformats.org/drawingml/2006/main" prst="rect">
             <a:avLst/>
@@ -1580,7 +1661,7 @@
           <p:cNvPr id="5" name="">
             <a:extLst xmlns:a="http://schemas.openxmlformats.org/drawingml/2006/main">
               <a:ext uri="{FF2B5EF4-FFF2-40B4-BE49-F238E27FC236}">
-                <a16:creationId xmlns:a16="http://schemas.microsoft.com/office/drawing/2014/main" id="{CF291473-88DD-4E26-BCD7-56137F39A646}"/>
+                <a16:creationId xmlns:a16="http://schemas.microsoft.com/office/drawing/2014/main" id="{085ABAEE-58F5-4858-AB54-41896CF873B4}"/>
               </a:ext>
             </a:extLst>
           </p:cNvPr>
@@ -1592,7 +1673,7 @@
         <p:spPr>
           <a:xfrm xmlns:a="http://schemas.openxmlformats.org/drawingml/2006/main">
             <a:off x="1066800" y="2190750"/>
-            <a:ext cx="3810000" cy="1143000"/>
+            <a:ext cx="4000500" cy="1143000"/>
           </a:xfrm>
           <a:prstGeom xmlns:a="http://schemas.openxmlformats.org/drawingml/2006/main" prst="rect">
             <a:avLst/>
@@ -1608,14 +1689,14 @@
           <a:lstStyle xmlns:a="http://schemas.openxmlformats.org/drawingml/2006/main"/>
           <a:p xmlns:a="http://schemas.openxmlformats.org/drawingml/2006/main">
             <a:pPr algn="l">
-              <a:defRPr sz="3750" b="1">
+              <a:defRPr sz="3600" b="1">
                 <a:solidFill>
                   <a:srgbClr val="16324F"/>
                 </a:solidFill>
               </a:defRPr>
             </a:pPr>
             <a:r>
-              <a:rPr sz="3750" b="1">
+              <a:rPr sz="3600" b="1">
                 <a:solidFill>
                   <a:srgbClr val="16324F"/>
                 </a:solidFill>
@@ -1630,19 +1711,69 @@
           <p:cNvPr id="6" name="">
             <a:extLst xmlns:a="http://schemas.openxmlformats.org/drawingml/2006/main">
               <a:ext uri="{FF2B5EF4-FFF2-40B4-BE49-F238E27FC236}">
-                <a16:creationId xmlns:a16="http://schemas.microsoft.com/office/drawing/2014/main" id="{73CE419F-D1ED-47AF-AC2B-9E3368D94F26}"/>
-              </a:ext>
-            </a:extLst>
-          </p:cNvPr>
-          <p:cNvSpPr>
-            <a:spLocks xmlns:a="http://schemas.openxmlformats.org/drawingml/2006/main" noGrp="1"/>
-          </p:cNvSpPr>
-          <p:nvPr/>
-        </p:nvSpPr>
-        <p:spPr>
-          <a:xfrm xmlns:a="http://schemas.openxmlformats.org/drawingml/2006/main">
-            <a:off x="1085850" y="3543300"/>
-            <a:ext cx="3714750" cy="990600"/>
+                <a16:creationId xmlns:a16="http://schemas.microsoft.com/office/drawing/2014/main" id="{540AFEDF-5461-4AD5-ADF8-16E4197356BE}"/>
+              </a:ext>
+            </a:extLst>
+          </p:cNvPr>
+          <p:cNvSpPr>
+            <a:spLocks xmlns:a="http://schemas.openxmlformats.org/drawingml/2006/main" noGrp="1"/>
+          </p:cNvSpPr>
+          <p:nvPr/>
+        </p:nvSpPr>
+        <p:spPr>
+          <a:xfrm xmlns:a="http://schemas.openxmlformats.org/drawingml/2006/main">
+            <a:off x="1085850" y="3562350"/>
+            <a:ext cx="3905250" cy="1009650"/>
+          </a:xfrm>
+          <a:prstGeom xmlns:a="http://schemas.openxmlformats.org/drawingml/2006/main" prst="rect">
+            <a:avLst/>
+          </a:prstGeom>
+          <a:noFill xmlns:a="http://schemas.openxmlformats.org/drawingml/2006/main"/>
+          <a:ln xmlns:a="http://schemas.openxmlformats.org/drawingml/2006/main" w="0">
+            <a:noFill/>
+            <a:prstDash val="solid"/>
+          </a:ln>
+        </p:spPr>
+        <p:txBody>
+          <a:bodyPr xmlns:a="http://schemas.openxmlformats.org/drawingml/2006/main"/>
+          <a:lstStyle xmlns:a="http://schemas.openxmlformats.org/drawingml/2006/main"/>
+          <a:p xmlns:a="http://schemas.openxmlformats.org/drawingml/2006/main">
+            <a:pPr algn="l">
+              <a:defRPr sz="1575" b="0">
+                <a:solidFill>
+                  <a:srgbClr val="1F2933"/>
+                </a:solidFill>
+              </a:defRPr>
+            </a:pPr>
+            <a:r>
+              <a:rPr sz="1575" b="0">
+                <a:solidFill>
+                  <a:srgbClr val="1F2933"/>
+                </a:solidFill>
+              </a:rPr>
+              <a:t>Contoh tools, use case akademik yang baik, strategi prompting, contoh penggunaan buruk, dan etika pemakaiannya.</a:t>
+            </a:r>
+          </a:p>
+        </p:txBody>
+      </p:sp>
+      <p:sp>
+        <p:nvSpPr>
+          <p:cNvPr id="7" name="">
+            <a:extLst xmlns:a="http://schemas.openxmlformats.org/drawingml/2006/main">
+              <a:ext uri="{FF2B5EF4-FFF2-40B4-BE49-F238E27FC236}">
+                <a16:creationId xmlns:a16="http://schemas.microsoft.com/office/drawing/2014/main" id="{C4FE7B91-8B12-4630-B589-CD6478E5FD29}"/>
+              </a:ext>
+            </a:extLst>
+          </p:cNvPr>
+          <p:cNvSpPr>
+            <a:spLocks xmlns:a="http://schemas.openxmlformats.org/drawingml/2006/main" noGrp="1"/>
+          </p:cNvSpPr>
+          <p:nvPr/>
+        </p:nvSpPr>
+        <p:spPr>
+          <a:xfrm xmlns:a="http://schemas.openxmlformats.org/drawingml/2006/main">
+            <a:off x="6096000" y="1657350"/>
+            <a:ext cx="4762500" cy="1562100"/>
           </a:xfrm>
           <a:prstGeom xmlns:a="http://schemas.openxmlformats.org/drawingml/2006/main" prst="rect">
             <a:avLst/>
@@ -1660,39 +1791,39 @@
             <a:pPr algn="l">
               <a:defRPr sz="1650" b="0">
                 <a:solidFill>
-                  <a:srgbClr val="1F2933"/>
+                  <a:srgbClr val="FFFFFF"/>
                 </a:solidFill>
               </a:defRPr>
             </a:pPr>
             <a:r>
               <a:rPr sz="1650" b="0">
                 <a:solidFill>
-                  <a:srgbClr val="1F2933"/>
-                </a:solidFill>
-              </a:rPr>
-              <a:t>Pengantar tentang AI generatif, contoh dekat dengan siswa, dan cara menggunakannya dengan bijak.</a:t>
-            </a:r>
-          </a:p>
-        </p:txBody>
-      </p:sp>
-      <p:sp>
-        <p:nvSpPr>
-          <p:cNvPr id="7" name="">
-            <a:extLst xmlns:a="http://schemas.openxmlformats.org/drawingml/2006/main">
-              <a:ext uri="{FF2B5EF4-FFF2-40B4-BE49-F238E27FC236}">
-                <a16:creationId xmlns:a16="http://schemas.microsoft.com/office/drawing/2014/main" id="{5EF3ABF1-7423-4D7F-9CE6-B2468B6A3B4D}"/>
-              </a:ext>
-            </a:extLst>
-          </p:cNvPr>
-          <p:cNvSpPr>
-            <a:spLocks xmlns:a="http://schemas.openxmlformats.org/drawingml/2006/main" noGrp="1"/>
-          </p:cNvSpPr>
-          <p:nvPr/>
-        </p:nvSpPr>
-        <p:spPr>
-          <a:xfrm xmlns:a="http://schemas.openxmlformats.org/drawingml/2006/main">
-            <a:off x="6057900" y="1828800"/>
-            <a:ext cx="4953000" cy="1676400"/>
+                  <a:srgbClr val="FFFFFF"/>
+                </a:solidFill>
+              </a:rPr>
+              <a:t>Di materi ini, AI tidak dibahas sebagai sulap atau pengganti belajar. Fokusnya adalah bagaimana siswa memakai Gen-AI dengan cerdas, jujur, dan bertanggung jawab.</a:t>
+            </a:r>
+          </a:p>
+        </p:txBody>
+      </p:sp>
+      <p:sp>
+        <p:nvSpPr>
+          <p:cNvPr id="8" name="">
+            <a:extLst xmlns:a="http://schemas.openxmlformats.org/drawingml/2006/main">
+              <a:ext uri="{FF2B5EF4-FFF2-40B4-BE49-F238E27FC236}">
+                <a16:creationId xmlns:a16="http://schemas.microsoft.com/office/drawing/2014/main" id="{CF87C683-F324-4962-8F29-451795054D52}"/>
+              </a:ext>
+            </a:extLst>
+          </p:cNvPr>
+          <p:cNvSpPr>
+            <a:spLocks xmlns:a="http://schemas.openxmlformats.org/drawingml/2006/main" noGrp="1"/>
+          </p:cNvSpPr>
+          <p:nvPr/>
+        </p:nvSpPr>
+        <p:spPr>
+          <a:xfrm xmlns:a="http://schemas.openxmlformats.org/drawingml/2006/main">
+            <a:off x="6096000" y="3581400"/>
+            <a:ext cx="4000500" cy="1485900"/>
           </a:xfrm>
           <a:prstGeom xmlns:a="http://schemas.openxmlformats.org/drawingml/2006/main" prst="rect">
             <a:avLst/>
@@ -1708,137 +1839,104 @@
           <a:lstStyle xmlns:a="http://schemas.openxmlformats.org/drawingml/2006/main"/>
           <a:p xmlns:a="http://schemas.openxmlformats.org/drawingml/2006/main">
             <a:pPr algn="l">
-              <a:defRPr sz="1800" b="0">
+              <a:defRPr sz="1350" b="0">
                 <a:solidFill>
                   <a:srgbClr val="FFFFFF"/>
                 </a:solidFill>
               </a:defRPr>
             </a:pPr>
             <a:r>
-              <a:rPr sz="1800" b="0">
+              <a:rPr sz="1350" b="0">
                 <a:solidFill>
                   <a:srgbClr val="FFFFFF"/>
                 </a:solidFill>
               </a:rPr>
-              <a:t>Setelah Revolusi Industri 4.0, kita masuk ke teknologi yang sedang sangat dekat dengan kehidupan belajar siswa: AI yang bisa membantu membuat teks, gambar, ide, dan penjelasan.</a:t>
-            </a:r>
-          </a:p>
-        </p:txBody>
-      </p:sp>
-      <p:sp>
-        <p:nvSpPr>
-          <p:cNvPr id="8" name="">
-            <a:extLst xmlns:a="http://schemas.openxmlformats.org/drawingml/2006/main">
-              <a:ext uri="{FF2B5EF4-FFF2-40B4-BE49-F238E27FC236}">
-                <a16:creationId xmlns:a16="http://schemas.microsoft.com/office/drawing/2014/main" id="{A34F4869-4446-4F22-A6A5-C689C8660D6B}"/>
-              </a:ext>
-            </a:extLst>
-          </p:cNvPr>
-          <p:cNvSpPr>
-            <a:spLocks xmlns:a="http://schemas.openxmlformats.org/drawingml/2006/main" noGrp="1"/>
-          </p:cNvSpPr>
-          <p:nvPr/>
-        </p:nvSpPr>
-        <p:spPr>
-          <a:xfrm xmlns:a="http://schemas.openxmlformats.org/drawingml/2006/main">
-            <a:off x="6057900" y="3752850"/>
-            <a:ext cx="4762500" cy="1219200"/>
-          </a:xfrm>
-          <a:prstGeom xmlns:a="http://schemas.openxmlformats.org/drawingml/2006/main" prst="rect">
-            <a:avLst/>
-          </a:prstGeom>
-          <a:noFill xmlns:a="http://schemas.openxmlformats.org/drawingml/2006/main"/>
-          <a:ln xmlns:a="http://schemas.openxmlformats.org/drawingml/2006/main" w="0">
-            <a:noFill/>
-            <a:prstDash val="solid"/>
-          </a:ln>
-        </p:spPr>
-        <p:txBody>
-          <a:bodyPr xmlns:a="http://schemas.openxmlformats.org/drawingml/2006/main"/>
-          <a:lstStyle xmlns:a="http://schemas.openxmlformats.org/drawingml/2006/main"/>
+              <a:t>Fokus deck:</a:t>
+            </a:r>
+          </a:p>
           <a:p xmlns:a="http://schemas.openxmlformats.org/drawingml/2006/main">
             <a:pPr algn="l">
-              <a:defRPr sz="1500" b="0">
+              <a:defRPr sz="1350" b="0">
                 <a:solidFill>
                   <a:srgbClr val="FFFFFF"/>
                 </a:solidFill>
               </a:defRPr>
             </a:pPr>
             <a:r>
-              <a:rPr sz="1500" b="0">
+              <a:rPr sz="1350" b="0">
                 <a:solidFill>
                   <a:srgbClr val="FFFFFF"/>
                 </a:solidFill>
               </a:rPr>
-              <a:t>Fokus deck ini:</a:t>
+              <a:t>• Tool Gen-AI</a:t>
             </a:r>
           </a:p>
           <a:p xmlns:a="http://schemas.openxmlformats.org/drawingml/2006/main">
             <a:pPr algn="l">
-              <a:defRPr sz="1500" b="0">
+              <a:defRPr sz="1350" b="0">
                 <a:solidFill>
                   <a:srgbClr val="FFFFFF"/>
                 </a:solidFill>
               </a:defRPr>
             </a:pPr>
             <a:r>
-              <a:rPr sz="1500" b="0">
+              <a:rPr sz="1350" b="0">
                 <a:solidFill>
                   <a:srgbClr val="FFFFFF"/>
                 </a:solidFill>
               </a:rPr>
-              <a:t>• Apa itu Gen-AI</a:t>
+              <a:t>• Use case akademik</a:t>
             </a:r>
           </a:p>
           <a:p xmlns:a="http://schemas.openxmlformats.org/drawingml/2006/main">
             <a:pPr algn="l">
-              <a:defRPr sz="1500" b="0">
+              <a:defRPr sz="1350" b="0">
                 <a:solidFill>
                   <a:srgbClr val="FFFFFF"/>
                 </a:solidFill>
               </a:defRPr>
             </a:pPr>
             <a:r>
-              <a:rPr sz="1500" b="0">
+              <a:rPr sz="1350" b="0">
                 <a:solidFill>
                   <a:srgbClr val="FFFFFF"/>
                 </a:solidFill>
               </a:rPr>
-              <a:t>• Contoh dekat dengan siswa</a:t>
+              <a:t>• Prompting</a:t>
             </a:r>
           </a:p>
           <a:p xmlns:a="http://schemas.openxmlformats.org/drawingml/2006/main">
             <a:pPr algn="l">
-              <a:defRPr sz="1500" b="0">
+              <a:defRPr sz="1350" b="0">
                 <a:solidFill>
                   <a:srgbClr val="FFFFFF"/>
                 </a:solidFill>
               </a:defRPr>
             </a:pPr>
             <a:r>
-              <a:rPr sz="1500" b="0">
+              <a:rPr sz="1350" b="0">
                 <a:solidFill>
                   <a:srgbClr val="FFFFFF"/>
                 </a:solidFill>
               </a:rPr>
-              <a:t>• Manfaat dan risiko</a:t>
+              <a:t>• Contoh buruk</a:t>
             </a:r>
           </a:p>
           <a:p xmlns:a="http://schemas.openxmlformats.org/drawingml/2006/main">
             <a:pPr algn="l">
-              <a:defRPr sz="1500" b="0">
+              <a:defRPr sz="1350" b="0">
                 <a:solidFill>
                   <a:srgbClr val="FFFFFF"/>
                 </a:solidFill>
               </a:defRPr>
             </a:pPr>
             <a:r>
-              <a:rPr sz="1500" b="0">
+              <a:rPr sz="1350" b="0">
                 <a:solidFill>
                   <a:srgbClr val="FFFFFF"/>
                 </a:solidFill>
               </a:rPr>
-              <a:t>• Penggunaan yang jujur dan bertanggung jawab</a:t>
+              <a:t>• Etika penggunaan</a:t>
             </a:r>
           </a:p>
         </p:txBody>
@@ -1848,7 +1946,7 @@
           <p:cNvPr id="9" name="">
             <a:extLst xmlns:a="http://schemas.openxmlformats.org/drawingml/2006/main">
               <a:ext uri="{FF2B5EF4-FFF2-40B4-BE49-F238E27FC236}">
-                <a16:creationId xmlns:a16="http://schemas.microsoft.com/office/drawing/2014/main" id="{9E9FBACE-855E-4B86-93E7-A016FC4386FF}"/>
+                <a16:creationId xmlns:a16="http://schemas.microsoft.com/office/drawing/2014/main" id="{309E037A-9160-4299-BFAD-33AABF31174C}"/>
               </a:ext>
             </a:extLst>
           </p:cNvPr>
@@ -1879,7 +1977,7 @@
           <p:cNvPr id="10" name="">
             <a:extLst xmlns:a="http://schemas.openxmlformats.org/drawingml/2006/main">
               <a:ext uri="{FF2B5EF4-FFF2-40B4-BE49-F238E27FC236}">
-                <a16:creationId xmlns:a16="http://schemas.microsoft.com/office/drawing/2014/main" id="{E854BCEA-D804-4035-8528-4064A1E4CAA5}"/>
+                <a16:creationId xmlns:a16="http://schemas.microsoft.com/office/drawing/2014/main" id="{7686DB9F-4A9A-4921-91B4-E438A517EC1D}"/>
               </a:ext>
             </a:extLst>
           </p:cNvPr>
@@ -1929,7 +2027,7 @@
           <p:cNvPr id="11" name="">
             <a:extLst xmlns:a="http://schemas.openxmlformats.org/drawingml/2006/main">
               <a:ext uri="{FF2B5EF4-FFF2-40B4-BE49-F238E27FC236}">
-                <a16:creationId xmlns:a16="http://schemas.microsoft.com/office/drawing/2014/main" id="{2BA0FFDD-7E49-4BA5-A65B-FC3E9E90450E}"/>
+                <a16:creationId xmlns:a16="http://schemas.microsoft.com/office/drawing/2014/main" id="{A30AE966-AC1D-4713-81C0-BBBB23CEE0E3}"/>
               </a:ext>
             </a:extLst>
           </p:cNvPr>
@@ -1977,7 +2075,7 @@
     </p:spTree>
     <p:extLst>
       <p:ext uri="{BB962C8B-B14F-4D97-AF65-F5344CB8AC3E}">
-        <p14:creationId xmlns:p14="http://schemas.microsoft.com/office/powerpoint/2010/main" val="112118210"/>
+        <p14:creationId xmlns:p14="http://schemas.microsoft.com/office/powerpoint/2010/main" val="1860803317"/>
       </p:ext>
     </p:extLst>
   </p:cSld>
@@ -2012,7 +2110,7 @@
           <p:nvPr/>
         </p:nvPicPr>
         <p:blipFill>
-          <a:blip xmlns:r="http://schemas.openxmlformats.org/officeDocument/2006/relationships" xmlns:a="http://schemas.openxmlformats.org/drawingml/2006/main" r:embed="R05b21b6848824926"/>
+          <a:blip xmlns:r="http://schemas.openxmlformats.org/officeDocument/2006/relationships" xmlns:a="http://schemas.openxmlformats.org/drawingml/2006/main" r:embed="R316b0246d180466a"/>
           <a:stretch xmlns:a="http://schemas.openxmlformats.org/drawingml/2006/main"/>
         </p:blipFill>
         <p:spPr>
@@ -2030,7 +2128,7 @@
           <p:cNvPr id="2" name="">
             <a:extLst xmlns:a="http://schemas.openxmlformats.org/drawingml/2006/main">
               <a:ext uri="{FF2B5EF4-FFF2-40B4-BE49-F238E27FC236}">
-                <a16:creationId xmlns:a16="http://schemas.microsoft.com/office/drawing/2014/main" id="{88080A15-0452-4F50-AA21-770696504A5C}"/>
+                <a16:creationId xmlns:a16="http://schemas.microsoft.com/office/drawing/2014/main" id="{A662A701-8B42-49AB-9654-F30F13587FBF}"/>
               </a:ext>
             </a:extLst>
           </p:cNvPr>
@@ -2042,7 +2140,7 @@
         <p:spPr>
           <a:xfrm xmlns:a="http://schemas.openxmlformats.org/drawingml/2006/main">
             <a:off x="723900" y="666750"/>
-            <a:ext cx="10744200" cy="533400"/>
+            <a:ext cx="9334500" cy="533400"/>
           </a:xfrm>
           <a:prstGeom xmlns:a="http://schemas.openxmlformats.org/drawingml/2006/main" prst="rect">
             <a:avLst/>
@@ -2061,7 +2159,7 @@
           <p:cNvPr id="3" name="">
             <a:extLst xmlns:a="http://schemas.openxmlformats.org/drawingml/2006/main">
               <a:ext uri="{FF2B5EF4-FFF2-40B4-BE49-F238E27FC236}">
-                <a16:creationId xmlns:a16="http://schemas.microsoft.com/office/drawing/2014/main" id="{0B7065A2-97F8-42CF-B885-7A56D4C0C033}"/>
+                <a16:creationId xmlns:a16="http://schemas.microsoft.com/office/drawing/2014/main" id="{11B673BD-C8CA-4390-811F-3F1F562E3C27}"/>
               </a:ext>
             </a:extLst>
           </p:cNvPr>
@@ -2073,7 +2171,7 @@
         <p:spPr>
           <a:xfrm xmlns:a="http://schemas.openxmlformats.org/drawingml/2006/main">
             <a:off x="895350" y="762000"/>
-            <a:ext cx="7239000" cy="323850"/>
+            <a:ext cx="8191500" cy="323850"/>
           </a:xfrm>
           <a:prstGeom xmlns:a="http://schemas.openxmlformats.org/drawingml/2006/main" prst="rect">
             <a:avLst/>
@@ -2111,7 +2209,7 @@
           <p:cNvPr id="4" name="">
             <a:extLst xmlns:a="http://schemas.openxmlformats.org/drawingml/2006/main">
               <a:ext uri="{FF2B5EF4-FFF2-40B4-BE49-F238E27FC236}">
-                <a16:creationId xmlns:a16="http://schemas.microsoft.com/office/drawing/2014/main" id="{61B4F998-4B53-4478-BB30-6A4477266359}"/>
+                <a16:creationId xmlns:a16="http://schemas.microsoft.com/office/drawing/2014/main" id="{34B796D9-1EBC-4A27-8C37-7191755A8577}"/>
               </a:ext>
             </a:extLst>
           </p:cNvPr>
@@ -2123,7 +2221,7 @@
         <p:spPr>
           <a:xfrm xmlns:a="http://schemas.openxmlformats.org/drawingml/2006/main">
             <a:off x="914400" y="1543050"/>
-            <a:ext cx="10287000" cy="685800"/>
+            <a:ext cx="10287000" cy="666750"/>
           </a:xfrm>
           <a:prstGeom xmlns:a="http://schemas.openxmlformats.org/drawingml/2006/main" prst="rect">
             <a:avLst/>
@@ -2151,7 +2249,7 @@
                   <a:srgbClr val="16324F"/>
                 </a:solidFill>
               </a:rPr>
-              <a:t>Gen-AI adalah jenis AI yang dapat menghasilkan konten baru berdasarkan pola dari data yang pernah dipelajarinya.</a:t>
+              <a:t>Gen-AI adalah AI yang dapat menghasilkan konten baru seperti teks, gambar, suara, video, atau kode.</a:t>
             </a:r>
           </a:p>
         </p:txBody>
@@ -2161,18 +2259,18 @@
           <p:cNvPr id="5" name="">
             <a:extLst xmlns:a="http://schemas.openxmlformats.org/drawingml/2006/main">
               <a:ext uri="{FF2B5EF4-FFF2-40B4-BE49-F238E27FC236}">
-                <a16:creationId xmlns:a16="http://schemas.microsoft.com/office/drawing/2014/main" id="{2ED77FD7-9E65-4DE2-BD00-C0BEA6EA976A}"/>
-              </a:ext>
-            </a:extLst>
-          </p:cNvPr>
-          <p:cNvSpPr>
-            <a:spLocks xmlns:a="http://schemas.openxmlformats.org/drawingml/2006/main" noGrp="1"/>
-          </p:cNvSpPr>
-          <p:nvPr/>
-        </p:nvSpPr>
-        <p:spPr>
-          <a:xfrm xmlns:a="http://schemas.openxmlformats.org/drawingml/2006/main">
-            <a:off x="971550" y="2657475"/>
+                <a16:creationId xmlns:a16="http://schemas.microsoft.com/office/drawing/2014/main" id="{6ECCB659-93CB-41C0-9FB5-E561467E567C}"/>
+              </a:ext>
+            </a:extLst>
+          </p:cNvPr>
+          <p:cNvSpPr>
+            <a:spLocks xmlns:a="http://schemas.openxmlformats.org/drawingml/2006/main" noGrp="1"/>
+          </p:cNvSpPr>
+          <p:nvPr/>
+        </p:nvSpPr>
+        <p:spPr>
+          <a:xfrm xmlns:a="http://schemas.openxmlformats.org/drawingml/2006/main">
+            <a:off x="971550" y="2609850"/>
             <a:ext cx="95250" cy="95250"/>
           </a:xfrm>
           <a:prstGeom xmlns:a="http://schemas.openxmlformats.org/drawingml/2006/main" prst="ellipse">
@@ -2192,19 +2290,19 @@
           <p:cNvPr id="6" name="">
             <a:extLst xmlns:a="http://schemas.openxmlformats.org/drawingml/2006/main">
               <a:ext uri="{FF2B5EF4-FFF2-40B4-BE49-F238E27FC236}">
-                <a16:creationId xmlns:a16="http://schemas.microsoft.com/office/drawing/2014/main" id="{36E0CB26-79FB-40D8-99E2-B523AE43FB37}"/>
-              </a:ext>
-            </a:extLst>
-          </p:cNvPr>
-          <p:cNvSpPr>
-            <a:spLocks xmlns:a="http://schemas.openxmlformats.org/drawingml/2006/main" noGrp="1"/>
-          </p:cNvSpPr>
-          <p:nvPr/>
-        </p:nvSpPr>
-        <p:spPr>
-          <a:xfrm xmlns:a="http://schemas.openxmlformats.org/drawingml/2006/main">
-            <a:off x="1181100" y="2571750"/>
-            <a:ext cx="9505950" cy="398145"/>
+                <a16:creationId xmlns:a16="http://schemas.microsoft.com/office/drawing/2014/main" id="{1DD7800C-8A3B-40E1-9A90-3224671B50E1}"/>
+              </a:ext>
+            </a:extLst>
+          </p:cNvPr>
+          <p:cNvSpPr>
+            <a:spLocks xmlns:a="http://schemas.openxmlformats.org/drawingml/2006/main" noGrp="1"/>
+          </p:cNvSpPr>
+          <p:nvPr/>
+        </p:nvSpPr>
+        <p:spPr>
+          <a:xfrm xmlns:a="http://schemas.openxmlformats.org/drawingml/2006/main">
+            <a:off x="1181100" y="2533650"/>
+            <a:ext cx="9505950" cy="419100"/>
           </a:xfrm>
           <a:prstGeom xmlns:a="http://schemas.openxmlformats.org/drawingml/2006/main" prst="rect">
             <a:avLst/>
@@ -2232,7 +2330,7 @@
                   <a:srgbClr val="1F2933"/>
                 </a:solidFill>
               </a:rPr>
-              <a:t>Konten itu bisa berupa teks, gambar, suara, video, atau kode.</a:t>
+              <a:t>Ia bekerja dengan pola dan prediksi dari data yang pernah dipelajarinya.</a:t>
             </a:r>
           </a:p>
         </p:txBody>
@@ -2242,18 +2340,18 @@
           <p:cNvPr id="7" name="">
             <a:extLst xmlns:a="http://schemas.openxmlformats.org/drawingml/2006/main">
               <a:ext uri="{FF2B5EF4-FFF2-40B4-BE49-F238E27FC236}">
-                <a16:creationId xmlns:a16="http://schemas.microsoft.com/office/drawing/2014/main" id="{1CB33A16-ABCA-43B1-9610-90B465CED81C}"/>
-              </a:ext>
-            </a:extLst>
-          </p:cNvPr>
-          <p:cNvSpPr>
-            <a:spLocks xmlns:a="http://schemas.openxmlformats.org/drawingml/2006/main" noGrp="1"/>
-          </p:cNvSpPr>
-          <p:nvPr/>
-        </p:nvSpPr>
-        <p:spPr>
-          <a:xfrm xmlns:a="http://schemas.openxmlformats.org/drawingml/2006/main">
-            <a:off x="971550" y="3150870"/>
+                <a16:creationId xmlns:a16="http://schemas.microsoft.com/office/drawing/2014/main" id="{1D2D63E8-3960-4A89-A295-426913BF7B22}"/>
+              </a:ext>
+            </a:extLst>
+          </p:cNvPr>
+          <p:cNvSpPr>
+            <a:spLocks xmlns:a="http://schemas.openxmlformats.org/drawingml/2006/main" noGrp="1"/>
+          </p:cNvSpPr>
+          <p:nvPr/>
+        </p:nvSpPr>
+        <p:spPr>
+          <a:xfrm xmlns:a="http://schemas.openxmlformats.org/drawingml/2006/main">
+            <a:off x="971550" y="3124200"/>
             <a:ext cx="95250" cy="95250"/>
           </a:xfrm>
           <a:prstGeom xmlns:a="http://schemas.openxmlformats.org/drawingml/2006/main" prst="ellipse">
@@ -2273,19 +2371,19 @@
           <p:cNvPr id="8" name="">
             <a:extLst xmlns:a="http://schemas.openxmlformats.org/drawingml/2006/main">
               <a:ext uri="{FF2B5EF4-FFF2-40B4-BE49-F238E27FC236}">
-                <a16:creationId xmlns:a16="http://schemas.microsoft.com/office/drawing/2014/main" id="{59AC2E67-43D7-46CE-8D20-7BEDCD950050}"/>
-              </a:ext>
-            </a:extLst>
-          </p:cNvPr>
-          <p:cNvSpPr>
-            <a:spLocks xmlns:a="http://schemas.openxmlformats.org/drawingml/2006/main" noGrp="1"/>
-          </p:cNvSpPr>
-          <p:nvPr/>
-        </p:nvSpPr>
-        <p:spPr>
-          <a:xfrm xmlns:a="http://schemas.openxmlformats.org/drawingml/2006/main">
-            <a:off x="1181100" y="3065145"/>
-            <a:ext cx="9505950" cy="398145"/>
+                <a16:creationId xmlns:a16="http://schemas.microsoft.com/office/drawing/2014/main" id="{E42F0448-3DE9-48C3-80EA-366EBEF472AB}"/>
+              </a:ext>
+            </a:extLst>
+          </p:cNvPr>
+          <p:cNvSpPr>
+            <a:spLocks xmlns:a="http://schemas.openxmlformats.org/drawingml/2006/main" noGrp="1"/>
+          </p:cNvSpPr>
+          <p:nvPr/>
+        </p:nvSpPr>
+        <p:spPr>
+          <a:xfrm xmlns:a="http://schemas.openxmlformats.org/drawingml/2006/main">
+            <a:off x="1181100" y="3048000"/>
+            <a:ext cx="9505950" cy="419100"/>
           </a:xfrm>
           <a:prstGeom xmlns:a="http://schemas.openxmlformats.org/drawingml/2006/main" prst="rect">
             <a:avLst/>
@@ -2313,7 +2411,7 @@
                   <a:srgbClr val="1F2933"/>
                 </a:solidFill>
               </a:rPr>
-              <a:t>Kalau AI biasa sering dipakai untuk mengenali atau mengelompokkan, Gen-AI dipakai untuk membuat sesuatu yang baru.</a:t>
+              <a:t>Karena itu, hasilnya bisa sangat membantu, tetapi tetap bisa salah atau bias.</a:t>
             </a:r>
           </a:p>
         </p:txBody>
@@ -2323,18 +2421,18 @@
           <p:cNvPr id="9" name="">
             <a:extLst xmlns:a="http://schemas.openxmlformats.org/drawingml/2006/main">
               <a:ext uri="{FF2B5EF4-FFF2-40B4-BE49-F238E27FC236}">
-                <a16:creationId xmlns:a16="http://schemas.microsoft.com/office/drawing/2014/main" id="{6C08DB8C-AB22-418E-B990-0F9572763231}"/>
-              </a:ext>
-            </a:extLst>
-          </p:cNvPr>
-          <p:cNvSpPr>
-            <a:spLocks xmlns:a="http://schemas.openxmlformats.org/drawingml/2006/main" noGrp="1"/>
-          </p:cNvSpPr>
-          <p:nvPr/>
-        </p:nvSpPr>
-        <p:spPr>
-          <a:xfrm xmlns:a="http://schemas.openxmlformats.org/drawingml/2006/main">
-            <a:off x="971550" y="3644265"/>
+                <a16:creationId xmlns:a16="http://schemas.microsoft.com/office/drawing/2014/main" id="{0787311F-69D0-47B1-8E17-212FF2E106AE}"/>
+              </a:ext>
+            </a:extLst>
+          </p:cNvPr>
+          <p:cNvSpPr>
+            <a:spLocks xmlns:a="http://schemas.openxmlformats.org/drawingml/2006/main" noGrp="1"/>
+          </p:cNvSpPr>
+          <p:nvPr/>
+        </p:nvSpPr>
+        <p:spPr>
+          <a:xfrm xmlns:a="http://schemas.openxmlformats.org/drawingml/2006/main">
+            <a:off x="971550" y="3638550"/>
             <a:ext cx="95250" cy="95250"/>
           </a:xfrm>
           <a:prstGeom xmlns:a="http://schemas.openxmlformats.org/drawingml/2006/main" prst="ellipse">
@@ -2354,19 +2452,19 @@
           <p:cNvPr id="10" name="">
             <a:extLst xmlns:a="http://schemas.openxmlformats.org/drawingml/2006/main">
               <a:ext uri="{FF2B5EF4-FFF2-40B4-BE49-F238E27FC236}">
-                <a16:creationId xmlns:a16="http://schemas.microsoft.com/office/drawing/2014/main" id="{88B17C05-9827-4F27-9D51-70663FA6EDFE}"/>
-              </a:ext>
-            </a:extLst>
-          </p:cNvPr>
-          <p:cNvSpPr>
-            <a:spLocks xmlns:a="http://schemas.openxmlformats.org/drawingml/2006/main" noGrp="1"/>
-          </p:cNvSpPr>
-          <p:nvPr/>
-        </p:nvSpPr>
-        <p:spPr>
-          <a:xfrm xmlns:a="http://schemas.openxmlformats.org/drawingml/2006/main">
-            <a:off x="1181100" y="3558540"/>
-            <a:ext cx="9505950" cy="398145"/>
+                <a16:creationId xmlns:a16="http://schemas.microsoft.com/office/drawing/2014/main" id="{FEAB18E3-E433-4C70-9263-B8D1A69AE7B1}"/>
+              </a:ext>
+            </a:extLst>
+          </p:cNvPr>
+          <p:cNvSpPr>
+            <a:spLocks xmlns:a="http://schemas.openxmlformats.org/drawingml/2006/main" noGrp="1"/>
+          </p:cNvSpPr>
+          <p:nvPr/>
+        </p:nvSpPr>
+        <p:spPr>
+          <a:xfrm xmlns:a="http://schemas.openxmlformats.org/drawingml/2006/main">
+            <a:off x="1181100" y="3562350"/>
+            <a:ext cx="9505950" cy="419100"/>
           </a:xfrm>
           <a:prstGeom xmlns:a="http://schemas.openxmlformats.org/drawingml/2006/main" prst="rect">
             <a:avLst/>
@@ -2394,7 +2492,7 @@
                   <a:srgbClr val="1F2933"/>
                 </a:solidFill>
               </a:rPr>
-              <a:t>Gen-AI membantu manusia, tetapi tidak benar-benar berpikir seperti manusia.</a:t>
+              <a:t>Gen-AI paling tepat dipakai sebagai alat bantu berpikir dan belajar.</a:t>
             </a:r>
           </a:p>
         </p:txBody>
@@ -2404,18 +2502,18 @@
           <p:cNvPr id="11" name="">
             <a:extLst xmlns:a="http://schemas.openxmlformats.org/drawingml/2006/main">
               <a:ext uri="{FF2B5EF4-FFF2-40B4-BE49-F238E27FC236}">
-                <a16:creationId xmlns:a16="http://schemas.microsoft.com/office/drawing/2014/main" id="{701FED38-9C90-4EB3-AD51-A26450643679}"/>
-              </a:ext>
-            </a:extLst>
-          </p:cNvPr>
-          <p:cNvSpPr>
-            <a:spLocks xmlns:a="http://schemas.openxmlformats.org/drawingml/2006/main" noGrp="1"/>
-          </p:cNvSpPr>
-          <p:nvPr/>
-        </p:nvSpPr>
-        <p:spPr>
-          <a:xfrm xmlns:a="http://schemas.openxmlformats.org/drawingml/2006/main">
-            <a:off x="971550" y="4137660"/>
+                <a16:creationId xmlns:a16="http://schemas.microsoft.com/office/drawing/2014/main" id="{708A6CC2-0379-4F4E-93AD-518850680BAC}"/>
+              </a:ext>
+            </a:extLst>
+          </p:cNvPr>
+          <p:cNvSpPr>
+            <a:spLocks xmlns:a="http://schemas.openxmlformats.org/drawingml/2006/main" noGrp="1"/>
+          </p:cNvSpPr>
+          <p:nvPr/>
+        </p:nvSpPr>
+        <p:spPr>
+          <a:xfrm xmlns:a="http://schemas.openxmlformats.org/drawingml/2006/main">
+            <a:off x="971550" y="4152900"/>
             <a:ext cx="95250" cy="95250"/>
           </a:xfrm>
           <a:prstGeom xmlns:a="http://schemas.openxmlformats.org/drawingml/2006/main" prst="ellipse">
@@ -2435,19 +2533,19 @@
           <p:cNvPr id="12" name="">
             <a:extLst xmlns:a="http://schemas.openxmlformats.org/drawingml/2006/main">
               <a:ext uri="{FF2B5EF4-FFF2-40B4-BE49-F238E27FC236}">
-                <a16:creationId xmlns:a16="http://schemas.microsoft.com/office/drawing/2014/main" id="{CCB1FDDA-D835-44EA-AC8B-B979880BBB2E}"/>
-              </a:ext>
-            </a:extLst>
-          </p:cNvPr>
-          <p:cNvSpPr>
-            <a:spLocks xmlns:a="http://schemas.openxmlformats.org/drawingml/2006/main" noGrp="1"/>
-          </p:cNvSpPr>
-          <p:nvPr/>
-        </p:nvSpPr>
-        <p:spPr>
-          <a:xfrm xmlns:a="http://schemas.openxmlformats.org/drawingml/2006/main">
-            <a:off x="1181100" y="4051935"/>
-            <a:ext cx="9505950" cy="398145"/>
+                <a16:creationId xmlns:a16="http://schemas.microsoft.com/office/drawing/2014/main" id="{23CF656A-F765-4D16-91EC-CDA787167761}"/>
+              </a:ext>
+            </a:extLst>
+          </p:cNvPr>
+          <p:cNvSpPr>
+            <a:spLocks xmlns:a="http://schemas.openxmlformats.org/drawingml/2006/main" noGrp="1"/>
+          </p:cNvSpPr>
+          <p:nvPr/>
+        </p:nvSpPr>
+        <p:spPr>
+          <a:xfrm xmlns:a="http://schemas.openxmlformats.org/drawingml/2006/main">
+            <a:off x="1181100" y="4076700"/>
+            <a:ext cx="9505950" cy="419100"/>
           </a:xfrm>
           <a:prstGeom xmlns:a="http://schemas.openxmlformats.org/drawingml/2006/main" prst="rect">
             <a:avLst/>
@@ -2475,7 +2573,7 @@
                   <a:srgbClr val="1F2933"/>
                 </a:solidFill>
               </a:rPr>
-              <a:t>Karena bekerja dengan pola dan prediksi, hasilnya bisa berguna tetapi tidak selalu benar.</a:t>
+              <a:t>Gen-AI bukan pengganti guru, buku, atau usaha belajar siswa.</a:t>
             </a:r>
           </a:p>
         </p:txBody>
@@ -2485,19 +2583,19 @@
           <p:cNvPr id="13" name="">
             <a:extLst xmlns:a="http://schemas.openxmlformats.org/drawingml/2006/main">
               <a:ext uri="{FF2B5EF4-FFF2-40B4-BE49-F238E27FC236}">
-                <a16:creationId xmlns:a16="http://schemas.microsoft.com/office/drawing/2014/main" id="{85E277CE-9582-4872-9B43-1796F313F297}"/>
-              </a:ext>
-            </a:extLst>
-          </p:cNvPr>
-          <p:cNvSpPr>
-            <a:spLocks xmlns:a="http://schemas.openxmlformats.org/drawingml/2006/main" noGrp="1"/>
-          </p:cNvSpPr>
-          <p:nvPr/>
-        </p:nvSpPr>
-        <p:spPr>
-          <a:xfrm xmlns:a="http://schemas.openxmlformats.org/drawingml/2006/main">
-            <a:off x="857250" y="5334000"/>
-            <a:ext cx="10363200" cy="685800"/>
+                <a16:creationId xmlns:a16="http://schemas.microsoft.com/office/drawing/2014/main" id="{3A35D29D-480C-48B1-A5E0-72E203AA096A}"/>
+              </a:ext>
+            </a:extLst>
+          </p:cNvPr>
+          <p:cNvSpPr>
+            <a:spLocks xmlns:a="http://schemas.openxmlformats.org/drawingml/2006/main" noGrp="1"/>
+          </p:cNvSpPr>
+          <p:nvPr/>
+        </p:nvSpPr>
+        <p:spPr>
+          <a:xfrm xmlns:a="http://schemas.openxmlformats.org/drawingml/2006/main">
+            <a:off x="857250" y="5219700"/>
+            <a:ext cx="10363200" cy="781050"/>
           </a:xfrm>
           <a:prstGeom xmlns:a="http://schemas.openxmlformats.org/drawingml/2006/main" prst="rect">
             <a:avLst/>
@@ -2516,19 +2614,19 @@
           <p:cNvPr id="14" name="">
             <a:extLst xmlns:a="http://schemas.openxmlformats.org/drawingml/2006/main">
               <a:ext uri="{FF2B5EF4-FFF2-40B4-BE49-F238E27FC236}">
-                <a16:creationId xmlns:a16="http://schemas.microsoft.com/office/drawing/2014/main" id="{5ABE0D61-6855-4C14-9ACA-5EA13F9398BB}"/>
-              </a:ext>
-            </a:extLst>
-          </p:cNvPr>
-          <p:cNvSpPr>
-            <a:spLocks xmlns:a="http://schemas.openxmlformats.org/drawingml/2006/main" noGrp="1"/>
-          </p:cNvSpPr>
-          <p:nvPr/>
-        </p:nvSpPr>
-        <p:spPr>
-          <a:xfrm xmlns:a="http://schemas.openxmlformats.org/drawingml/2006/main">
-            <a:off x="1047750" y="5543550"/>
-            <a:ext cx="9906000" cy="342900"/>
+                <a16:creationId xmlns:a16="http://schemas.microsoft.com/office/drawing/2014/main" id="{3D8C94AC-393E-4FF6-847F-A6F1B7C4E015}"/>
+              </a:ext>
+            </a:extLst>
+          </p:cNvPr>
+          <p:cNvSpPr>
+            <a:spLocks xmlns:a="http://schemas.openxmlformats.org/drawingml/2006/main" noGrp="1"/>
+          </p:cNvSpPr>
+          <p:nvPr/>
+        </p:nvSpPr>
+        <p:spPr>
+          <a:xfrm xmlns:a="http://schemas.openxmlformats.org/drawingml/2006/main">
+            <a:off x="1028700" y="5467350"/>
+            <a:ext cx="9925050" cy="323850"/>
           </a:xfrm>
           <a:prstGeom xmlns:a="http://schemas.openxmlformats.org/drawingml/2006/main" prst="rect">
             <a:avLst/>
@@ -2556,7 +2654,7 @@
                   <a:srgbClr val="16324F"/>
                 </a:solidFill>
               </a:rPr>
-              <a:t>Gagasan penting: Gen-AI paling tepat dilihat sebagai alat bantu berpikir dan berkarya, bukan sumber kebenaran terakhir.</a:t>
+              <a:t>Kalimat kunci: AI bisa cepat, tetapi manusia tetap harus berpikir, memilih, dan memeriksa hasilnya.</a:t>
             </a:r>
           </a:p>
         </p:txBody>
@@ -2566,7 +2664,7 @@
           <p:cNvPr id="15" name="">
             <a:extLst xmlns:a="http://schemas.openxmlformats.org/drawingml/2006/main">
               <a:ext uri="{FF2B5EF4-FFF2-40B4-BE49-F238E27FC236}">
-                <a16:creationId xmlns:a16="http://schemas.microsoft.com/office/drawing/2014/main" id="{97AB7BA3-46C2-4F13-ADDF-DA5C8DD67835}"/>
+                <a16:creationId xmlns:a16="http://schemas.microsoft.com/office/drawing/2014/main" id="{2022D88E-81E3-4FC0-B25A-5226C7624947}"/>
               </a:ext>
             </a:extLst>
           </p:cNvPr>
@@ -2597,7 +2695,7 @@
           <p:cNvPr id="16" name="">
             <a:extLst xmlns:a="http://schemas.openxmlformats.org/drawingml/2006/main">
               <a:ext uri="{FF2B5EF4-FFF2-40B4-BE49-F238E27FC236}">
-                <a16:creationId xmlns:a16="http://schemas.microsoft.com/office/drawing/2014/main" id="{9DBEF897-0EF2-4394-AB5F-4ECD830420DE}"/>
+                <a16:creationId xmlns:a16="http://schemas.microsoft.com/office/drawing/2014/main" id="{1DADA53D-E551-4911-9019-9535D8581E4E}"/>
               </a:ext>
             </a:extLst>
           </p:cNvPr>
@@ -2647,7 +2745,7 @@
           <p:cNvPr id="17" name="">
             <a:extLst xmlns:a="http://schemas.openxmlformats.org/drawingml/2006/main">
               <a:ext uri="{FF2B5EF4-FFF2-40B4-BE49-F238E27FC236}">
-                <a16:creationId xmlns:a16="http://schemas.microsoft.com/office/drawing/2014/main" id="{707F9628-EE88-4251-9611-7A8B92A2EE4C}"/>
+                <a16:creationId xmlns:a16="http://schemas.microsoft.com/office/drawing/2014/main" id="{035F2BE3-8795-4ABE-BE26-E1CD835D0136}"/>
               </a:ext>
             </a:extLst>
           </p:cNvPr>
@@ -2695,7 +2793,7 @@
     </p:spTree>
     <p:extLst>
       <p:ext uri="{BB962C8B-B14F-4D97-AF65-F5344CB8AC3E}">
-        <p14:creationId xmlns:p14="http://schemas.microsoft.com/office/powerpoint/2010/main" val="402434683"/>
+        <p14:creationId xmlns:p14="http://schemas.microsoft.com/office/powerpoint/2010/main" val="1254053618"/>
       </p:ext>
     </p:extLst>
   </p:cSld>
@@ -2723,14 +2821,14 @@
       </p:grpSpPr>
       <p:pic>
         <p:nvPicPr>
-          <p:cNvPr id="28" name=""/>
+          <p:cNvPr id="17" name=""/>
           <p:cNvPicPr>
             <a:picLocks xmlns:a="http://schemas.openxmlformats.org/drawingml/2006/main" noChangeAspect="1"/>
           </p:cNvPicPr>
           <p:nvPr/>
         </p:nvPicPr>
         <p:blipFill>
-          <a:blip xmlns:r="http://schemas.openxmlformats.org/officeDocument/2006/relationships" xmlns:a="http://schemas.openxmlformats.org/drawingml/2006/main" r:embed="R3f7693060e16498e"/>
+          <a:blip xmlns:r="http://schemas.openxmlformats.org/officeDocument/2006/relationships" xmlns:a="http://schemas.openxmlformats.org/drawingml/2006/main" r:embed="R1f107f2c64084d91"/>
           <a:stretch xmlns:a="http://schemas.openxmlformats.org/drawingml/2006/main"/>
         </p:blipFill>
         <p:spPr>
@@ -2748,7 +2846,7 @@
           <p:cNvPr id="2" name="">
             <a:extLst xmlns:a="http://schemas.openxmlformats.org/drawingml/2006/main">
               <a:ext uri="{FF2B5EF4-FFF2-40B4-BE49-F238E27FC236}">
-                <a16:creationId xmlns:a16="http://schemas.microsoft.com/office/drawing/2014/main" id="{B48BE60C-7505-477F-B2D6-72386F3A4767}"/>
+                <a16:creationId xmlns:a16="http://schemas.microsoft.com/office/drawing/2014/main" id="{63C8B44F-9D2E-44E3-9CA6-0F7AAE23B072}"/>
               </a:ext>
             </a:extLst>
           </p:cNvPr>
@@ -2760,7 +2858,7 @@
         <p:spPr>
           <a:xfrm xmlns:a="http://schemas.openxmlformats.org/drawingml/2006/main">
             <a:off x="723900" y="666750"/>
-            <a:ext cx="10744200" cy="533400"/>
+            <a:ext cx="9334500" cy="533400"/>
           </a:xfrm>
           <a:prstGeom xmlns:a="http://schemas.openxmlformats.org/drawingml/2006/main" prst="rect">
             <a:avLst/>
@@ -2779,7 +2877,7 @@
           <p:cNvPr id="3" name="">
             <a:extLst xmlns:a="http://schemas.openxmlformats.org/drawingml/2006/main">
               <a:ext uri="{FF2B5EF4-FFF2-40B4-BE49-F238E27FC236}">
-                <a16:creationId xmlns:a16="http://schemas.microsoft.com/office/drawing/2014/main" id="{33A19C95-7783-4E6F-AAD2-0CD7BB4E37CA}"/>
+                <a16:creationId xmlns:a16="http://schemas.microsoft.com/office/drawing/2014/main" id="{EC6C1805-6427-4689-A990-5B10ED635A19}"/>
               </a:ext>
             </a:extLst>
           </p:cNvPr>
@@ -2791,7 +2889,7 @@
         <p:spPr>
           <a:xfrm xmlns:a="http://schemas.openxmlformats.org/drawingml/2006/main">
             <a:off x="895350" y="762000"/>
-            <a:ext cx="7239000" cy="323850"/>
+            <a:ext cx="8191500" cy="323850"/>
           </a:xfrm>
           <a:prstGeom xmlns:a="http://schemas.openxmlformats.org/drawingml/2006/main" prst="rect">
             <a:avLst/>
@@ -2819,7 +2917,7 @@
                   <a:srgbClr val="FFFFFF"/>
                 </a:solidFill>
               </a:rPr>
-              <a:t>Contoh Gen-AI yang Dekat dengan Siswa</a:t>
+              <a:t>Contoh Tools Gen-AI</a:t>
             </a:r>
           </a:p>
         </p:txBody>
@@ -2829,19 +2927,19 @@
           <p:cNvPr id="4" name="">
             <a:extLst xmlns:a="http://schemas.openxmlformats.org/drawingml/2006/main">
               <a:ext uri="{FF2B5EF4-FFF2-40B4-BE49-F238E27FC236}">
-                <a16:creationId xmlns:a16="http://schemas.microsoft.com/office/drawing/2014/main" id="{C9CC4CB9-F221-4AFD-8C37-9719DD8F88FF}"/>
-              </a:ext>
-            </a:extLst>
-          </p:cNvPr>
-          <p:cNvSpPr>
-            <a:spLocks xmlns:a="http://schemas.openxmlformats.org/drawingml/2006/main" noGrp="1"/>
-          </p:cNvSpPr>
-          <p:nvPr/>
-        </p:nvSpPr>
-        <p:spPr>
-          <a:xfrm xmlns:a="http://schemas.openxmlformats.org/drawingml/2006/main">
-            <a:off x="857250" y="1485900"/>
-            <a:ext cx="4953000" cy="4095750"/>
+                <a16:creationId xmlns:a16="http://schemas.microsoft.com/office/drawing/2014/main" id="{7651F05F-385D-4575-851C-E8A391D915D6}"/>
+              </a:ext>
+            </a:extLst>
+          </p:cNvPr>
+          <p:cNvSpPr>
+            <a:spLocks xmlns:a="http://schemas.openxmlformats.org/drawingml/2006/main" noGrp="1"/>
+          </p:cNvSpPr>
+          <p:nvPr/>
+        </p:nvSpPr>
+        <p:spPr>
+          <a:xfrm xmlns:a="http://schemas.openxmlformats.org/drawingml/2006/main">
+            <a:off x="914400" y="1619250"/>
+            <a:ext cx="10287000" cy="1104900"/>
           </a:xfrm>
           <a:prstGeom xmlns:a="http://schemas.openxmlformats.org/drawingml/2006/main" prst="rect">
             <a:avLst/>
@@ -2862,19 +2960,119 @@
           <p:cNvPr id="5" name="">
             <a:extLst xmlns:a="http://schemas.openxmlformats.org/drawingml/2006/main">
               <a:ext uri="{FF2B5EF4-FFF2-40B4-BE49-F238E27FC236}">
-                <a16:creationId xmlns:a16="http://schemas.microsoft.com/office/drawing/2014/main" id="{EC9EB994-B87F-47FE-AB4A-41D7DDC3C1BE}"/>
-              </a:ext>
-            </a:extLst>
-          </p:cNvPr>
-          <p:cNvSpPr>
-            <a:spLocks xmlns:a="http://schemas.openxmlformats.org/drawingml/2006/main" noGrp="1"/>
-          </p:cNvSpPr>
-          <p:nvPr/>
-        </p:nvSpPr>
-        <p:spPr>
-          <a:xfrm xmlns:a="http://schemas.openxmlformats.org/drawingml/2006/main">
-            <a:off x="6172200" y="1485900"/>
-            <a:ext cx="5048250" cy="4095750"/>
+                <a16:creationId xmlns:a16="http://schemas.microsoft.com/office/drawing/2014/main" id="{58F9A8C3-46F6-4BBA-B04B-D87F625C70DA}"/>
+              </a:ext>
+            </a:extLst>
+          </p:cNvPr>
+          <p:cNvSpPr>
+            <a:spLocks xmlns:a="http://schemas.openxmlformats.org/drawingml/2006/main" noGrp="1"/>
+          </p:cNvSpPr>
+          <p:nvPr/>
+        </p:nvSpPr>
+        <p:spPr>
+          <a:xfrm xmlns:a="http://schemas.openxmlformats.org/drawingml/2006/main">
+            <a:off x="1162050" y="1809750"/>
+            <a:ext cx="2095500" cy="285750"/>
+          </a:xfrm>
+          <a:prstGeom xmlns:a="http://schemas.openxmlformats.org/drawingml/2006/main" prst="rect">
+            <a:avLst/>
+          </a:prstGeom>
+          <a:noFill xmlns:a="http://schemas.openxmlformats.org/drawingml/2006/main"/>
+          <a:ln xmlns:a="http://schemas.openxmlformats.org/drawingml/2006/main" w="0">
+            <a:noFill/>
+            <a:prstDash val="solid"/>
+          </a:ln>
+        </p:spPr>
+        <p:txBody>
+          <a:bodyPr xmlns:a="http://schemas.openxmlformats.org/drawingml/2006/main"/>
+          <a:lstStyle xmlns:a="http://schemas.openxmlformats.org/drawingml/2006/main"/>
+          <a:p xmlns:a="http://schemas.openxmlformats.org/drawingml/2006/main">
+            <a:pPr algn="l">
+              <a:defRPr sz="1950" b="1">
+                <a:solidFill>
+                  <a:srgbClr val="16324F"/>
+                </a:solidFill>
+              </a:defRPr>
+            </a:pPr>
+            <a:r>
+              <a:rPr sz="1950" b="1">
+                <a:solidFill>
+                  <a:srgbClr val="16324F"/>
+                </a:solidFill>
+              </a:rPr>
+              <a:t>ChatGPT</a:t>
+            </a:r>
+          </a:p>
+        </p:txBody>
+      </p:sp>
+      <p:sp>
+        <p:nvSpPr>
+          <p:cNvPr id="6" name="">
+            <a:extLst xmlns:a="http://schemas.openxmlformats.org/drawingml/2006/main">
+              <a:ext uri="{FF2B5EF4-FFF2-40B4-BE49-F238E27FC236}">
+                <a16:creationId xmlns:a16="http://schemas.microsoft.com/office/drawing/2014/main" id="{AD52D49B-DE41-4DF7-A134-DEE1C5871C5A}"/>
+              </a:ext>
+            </a:extLst>
+          </p:cNvPr>
+          <p:cNvSpPr>
+            <a:spLocks xmlns:a="http://schemas.openxmlformats.org/drawingml/2006/main" noGrp="1"/>
+          </p:cNvSpPr>
+          <p:nvPr/>
+        </p:nvSpPr>
+        <p:spPr>
+          <a:xfrm xmlns:a="http://schemas.openxmlformats.org/drawingml/2006/main">
+            <a:off x="3048000" y="1790700"/>
+            <a:ext cx="7810500" cy="609600"/>
+          </a:xfrm>
+          <a:prstGeom xmlns:a="http://schemas.openxmlformats.org/drawingml/2006/main" prst="rect">
+            <a:avLst/>
+          </a:prstGeom>
+          <a:noFill xmlns:a="http://schemas.openxmlformats.org/drawingml/2006/main"/>
+          <a:ln xmlns:a="http://schemas.openxmlformats.org/drawingml/2006/main" w="0">
+            <a:noFill/>
+            <a:prstDash val="solid"/>
+          </a:ln>
+        </p:spPr>
+        <p:txBody>
+          <a:bodyPr xmlns:a="http://schemas.openxmlformats.org/drawingml/2006/main"/>
+          <a:lstStyle xmlns:a="http://schemas.openxmlformats.org/drawingml/2006/main"/>
+          <a:p xmlns:a="http://schemas.openxmlformats.org/drawingml/2006/main">
+            <a:pPr algn="l">
+              <a:defRPr sz="1575" b="0">
+                <a:solidFill>
+                  <a:srgbClr val="1F2933"/>
+                </a:solidFill>
+              </a:defRPr>
+            </a:pPr>
+            <a:r>
+              <a:rPr sz="1575" b="0">
+                <a:solidFill>
+                  <a:srgbClr val="1F2933"/>
+                </a:solidFill>
+              </a:rPr>
+              <a:t>Cocok untuk brainstorming, menjelaskan konsep, merangkum, dan menyusun draft awal.</a:t>
+            </a:r>
+          </a:p>
+        </p:txBody>
+      </p:sp>
+      <p:sp>
+        <p:nvSpPr>
+          <p:cNvPr id="7" name="">
+            <a:extLst xmlns:a="http://schemas.openxmlformats.org/drawingml/2006/main">
+              <a:ext uri="{FF2B5EF4-FFF2-40B4-BE49-F238E27FC236}">
+                <a16:creationId xmlns:a16="http://schemas.microsoft.com/office/drawing/2014/main" id="{671D1734-9077-4DC3-AD48-C8644B4BEA21}"/>
+              </a:ext>
+            </a:extLst>
+          </p:cNvPr>
+          <p:cNvSpPr>
+            <a:spLocks xmlns:a="http://schemas.openxmlformats.org/drawingml/2006/main" noGrp="1"/>
+          </p:cNvSpPr>
+          <p:nvPr/>
+        </p:nvSpPr>
+        <p:spPr>
+          <a:xfrm xmlns:a="http://schemas.openxmlformats.org/drawingml/2006/main">
+            <a:off x="914400" y="2819400"/>
+            <a:ext cx="10287000" cy="1104900"/>
           </a:xfrm>
           <a:prstGeom xmlns:a="http://schemas.openxmlformats.org/drawingml/2006/main" prst="rect">
             <a:avLst/>
@@ -2892,21 +3090,21 @@
       </p:sp>
       <p:sp>
         <p:nvSpPr>
-          <p:cNvPr id="6" name="">
-            <a:extLst xmlns:a="http://schemas.openxmlformats.org/drawingml/2006/main">
-              <a:ext uri="{FF2B5EF4-FFF2-40B4-BE49-F238E27FC236}">
-                <a16:creationId xmlns:a16="http://schemas.microsoft.com/office/drawing/2014/main" id="{06E8A4BC-A84A-4320-B5F3-C5260A521B1D}"/>
-              </a:ext>
-            </a:extLst>
-          </p:cNvPr>
-          <p:cNvSpPr>
-            <a:spLocks xmlns:a="http://schemas.openxmlformats.org/drawingml/2006/main" noGrp="1"/>
-          </p:cNvSpPr>
-          <p:nvPr/>
-        </p:nvSpPr>
-        <p:spPr>
-          <a:xfrm xmlns:a="http://schemas.openxmlformats.org/drawingml/2006/main">
-            <a:off x="1085850" y="1771650"/>
+          <p:cNvPr id="8" name="">
+            <a:extLst xmlns:a="http://schemas.openxmlformats.org/drawingml/2006/main">
+              <a:ext uri="{FF2B5EF4-FFF2-40B4-BE49-F238E27FC236}">
+                <a16:creationId xmlns:a16="http://schemas.microsoft.com/office/drawing/2014/main" id="{8567432C-91E9-4DEA-B286-F614D1DF0B46}"/>
+              </a:ext>
+            </a:extLst>
+          </p:cNvPr>
+          <p:cNvSpPr>
+            <a:spLocks xmlns:a="http://schemas.openxmlformats.org/drawingml/2006/main" noGrp="1"/>
+          </p:cNvSpPr>
+          <p:nvPr/>
+        </p:nvSpPr>
+        <p:spPr>
+          <a:xfrm xmlns:a="http://schemas.openxmlformats.org/drawingml/2006/main">
+            <a:off x="1162050" y="3009900"/>
             <a:ext cx="2095500" cy="285750"/>
           </a:xfrm>
           <a:prstGeom xmlns:a="http://schemas.openxmlformats.org/drawingml/2006/main" prst="rect">
@@ -2923,72 +3121,124 @@
           <a:lstStyle xmlns:a="http://schemas.openxmlformats.org/drawingml/2006/main"/>
           <a:p xmlns:a="http://schemas.openxmlformats.org/drawingml/2006/main">
             <a:pPr algn="l">
-              <a:defRPr sz="2100" b="1">
+              <a:defRPr sz="1950" b="1">
                 <a:solidFill>
                   <a:srgbClr val="16324F"/>
                 </a:solidFill>
               </a:defRPr>
             </a:pPr>
             <a:r>
-              <a:rPr sz="2100" b="1">
+              <a:rPr sz="1950" b="1">
                 <a:solidFill>
                   <a:srgbClr val="16324F"/>
                 </a:solidFill>
               </a:rPr>
-              <a:t>Untuk belajar</a:t>
-            </a:r>
-          </a:p>
-        </p:txBody>
-      </p:sp>
-      <p:sp>
-        <p:nvSpPr>
-          <p:cNvPr id="7" name="">
-            <a:extLst xmlns:a="http://schemas.openxmlformats.org/drawingml/2006/main">
-              <a:ext uri="{FF2B5EF4-FFF2-40B4-BE49-F238E27FC236}">
-                <a16:creationId xmlns:a16="http://schemas.microsoft.com/office/drawing/2014/main" id="{3ED6538B-3631-479C-AE3B-B1EF90322A87}"/>
-              </a:ext>
-            </a:extLst>
-          </p:cNvPr>
-          <p:cNvSpPr>
-            <a:spLocks xmlns:a="http://schemas.openxmlformats.org/drawingml/2006/main" noGrp="1"/>
-          </p:cNvSpPr>
-          <p:nvPr/>
-        </p:nvSpPr>
-        <p:spPr>
-          <a:xfrm xmlns:a="http://schemas.openxmlformats.org/drawingml/2006/main">
-            <a:off x="1085850" y="2390775"/>
-            <a:ext cx="95250" cy="95250"/>
-          </a:xfrm>
-          <a:prstGeom xmlns:a="http://schemas.openxmlformats.org/drawingml/2006/main" prst="ellipse">
+              <a:t>Gemini</a:t>
+            </a:r>
+          </a:p>
+        </p:txBody>
+      </p:sp>
+      <p:sp>
+        <p:nvSpPr>
+          <p:cNvPr id="9" name="">
+            <a:extLst xmlns:a="http://schemas.openxmlformats.org/drawingml/2006/main">
+              <a:ext uri="{FF2B5EF4-FFF2-40B4-BE49-F238E27FC236}">
+                <a16:creationId xmlns:a16="http://schemas.microsoft.com/office/drawing/2014/main" id="{F0FDDB56-0054-46F9-99EC-6403F5655C41}"/>
+              </a:ext>
+            </a:extLst>
+          </p:cNvPr>
+          <p:cNvSpPr>
+            <a:spLocks xmlns:a="http://schemas.openxmlformats.org/drawingml/2006/main" noGrp="1"/>
+          </p:cNvSpPr>
+          <p:nvPr/>
+        </p:nvSpPr>
+        <p:spPr>
+          <a:xfrm xmlns:a="http://schemas.openxmlformats.org/drawingml/2006/main">
+            <a:off x="3048000" y="2990850"/>
+            <a:ext cx="7810500" cy="609600"/>
+          </a:xfrm>
+          <a:prstGeom xmlns:a="http://schemas.openxmlformats.org/drawingml/2006/main" prst="rect">
+            <a:avLst/>
+          </a:prstGeom>
+          <a:noFill xmlns:a="http://schemas.openxmlformats.org/drawingml/2006/main"/>
+          <a:ln xmlns:a="http://schemas.openxmlformats.org/drawingml/2006/main" w="0">
+            <a:noFill/>
+            <a:prstDash val="solid"/>
+          </a:ln>
+        </p:spPr>
+        <p:txBody>
+          <a:bodyPr xmlns:a="http://schemas.openxmlformats.org/drawingml/2006/main"/>
+          <a:lstStyle xmlns:a="http://schemas.openxmlformats.org/drawingml/2006/main"/>
+          <a:p xmlns:a="http://schemas.openxmlformats.org/drawingml/2006/main">
+            <a:pPr algn="l">
+              <a:defRPr sz="1575" b="0">
+                <a:solidFill>
+                  <a:srgbClr val="1F2933"/>
+                </a:solidFill>
+              </a:defRPr>
+            </a:pPr>
+            <a:r>
+              <a:rPr sz="1575" b="0">
+                <a:solidFill>
+                  <a:srgbClr val="1F2933"/>
+                </a:solidFill>
+              </a:rPr>
+              <a:t>Cocok untuk ide, tanya jawab, ringkasan, dan beberapa alur yang dekat dengan ekosistem Google.</a:t>
+            </a:r>
+          </a:p>
+        </p:txBody>
+      </p:sp>
+      <p:sp>
+        <p:nvSpPr>
+          <p:cNvPr id="10" name="">
+            <a:extLst xmlns:a="http://schemas.openxmlformats.org/drawingml/2006/main">
+              <a:ext uri="{FF2B5EF4-FFF2-40B4-BE49-F238E27FC236}">
+                <a16:creationId xmlns:a16="http://schemas.microsoft.com/office/drawing/2014/main" id="{DF35E7F7-8478-4E9C-BF2F-59D09328A53F}"/>
+              </a:ext>
+            </a:extLst>
+          </p:cNvPr>
+          <p:cNvSpPr>
+            <a:spLocks xmlns:a="http://schemas.openxmlformats.org/drawingml/2006/main" noGrp="1"/>
+          </p:cNvSpPr>
+          <p:nvPr/>
+        </p:nvSpPr>
+        <p:spPr>
+          <a:xfrm xmlns:a="http://schemas.openxmlformats.org/drawingml/2006/main">
+            <a:off x="914400" y="4019550"/>
+            <a:ext cx="10287000" cy="1104900"/>
+          </a:xfrm>
+          <a:prstGeom xmlns:a="http://schemas.openxmlformats.org/drawingml/2006/main" prst="rect">
             <a:avLst/>
           </a:prstGeom>
           <a:solidFill xmlns:a="http://schemas.openxmlformats.org/drawingml/2006/main">
-            <a:srgbClr val="16324F"/>
-          </a:solidFill>
-          <a:ln xmlns:a="http://schemas.openxmlformats.org/drawingml/2006/main" w="0">
-            <a:noFill/>
-            <a:prstDash val="solid"/>
-          </a:ln>
-        </p:spPr>
-      </p:sp>
-      <p:sp>
-        <p:nvSpPr>
-          <p:cNvPr id="8" name="">
-            <a:extLst xmlns:a="http://schemas.openxmlformats.org/drawingml/2006/main">
-              <a:ext uri="{FF2B5EF4-FFF2-40B4-BE49-F238E27FC236}">
-                <a16:creationId xmlns:a16="http://schemas.microsoft.com/office/drawing/2014/main" id="{0FB75508-54A1-4B6A-8796-9893972C3CEE}"/>
-              </a:ext>
-            </a:extLst>
-          </p:cNvPr>
-          <p:cNvSpPr>
-            <a:spLocks xmlns:a="http://schemas.openxmlformats.org/drawingml/2006/main" noGrp="1"/>
-          </p:cNvSpPr>
-          <p:nvPr/>
-        </p:nvSpPr>
-        <p:spPr>
-          <a:xfrm xmlns:a="http://schemas.openxmlformats.org/drawingml/2006/main">
-            <a:off x="1295400" y="2305050"/>
-            <a:ext cx="4076700" cy="361950"/>
+            <a:srgbClr val="FFFFFF"/>
+          </a:solidFill>
+          <a:ln xmlns:a="http://schemas.openxmlformats.org/drawingml/2006/main" w="9525">
+            <a:solidFill>
+              <a:srgbClr val="C8D6E2"/>
+            </a:solidFill>
+            <a:prstDash val="solid"/>
+          </a:ln>
+        </p:spPr>
+      </p:sp>
+      <p:sp>
+        <p:nvSpPr>
+          <p:cNvPr id="11" name="">
+            <a:extLst xmlns:a="http://schemas.openxmlformats.org/drawingml/2006/main">
+              <a:ext uri="{FF2B5EF4-FFF2-40B4-BE49-F238E27FC236}">
+                <a16:creationId xmlns:a16="http://schemas.microsoft.com/office/drawing/2014/main" id="{0EE2071D-17B5-44EC-B647-3CC02803F15B}"/>
+              </a:ext>
+            </a:extLst>
+          </p:cNvPr>
+          <p:cNvSpPr>
+            <a:spLocks xmlns:a="http://schemas.openxmlformats.org/drawingml/2006/main" noGrp="1"/>
+          </p:cNvSpPr>
+          <p:nvPr/>
+        </p:nvSpPr>
+        <p:spPr>
+          <a:xfrm xmlns:a="http://schemas.openxmlformats.org/drawingml/2006/main">
+            <a:off x="1162050" y="4210050"/>
+            <a:ext cx="2095500" cy="285750"/>
           </a:xfrm>
           <a:prstGeom xmlns:a="http://schemas.openxmlformats.org/drawingml/2006/main" prst="rect">
             <a:avLst/>
@@ -3004,181 +3254,69 @@
           <a:lstStyle xmlns:a="http://schemas.openxmlformats.org/drawingml/2006/main"/>
           <a:p xmlns:a="http://schemas.openxmlformats.org/drawingml/2006/main">
             <a:pPr algn="l">
-              <a:defRPr sz="1500" b="0">
+              <a:defRPr sz="1950" b="1">
+                <a:solidFill>
+                  <a:srgbClr val="16324F"/>
+                </a:solidFill>
+              </a:defRPr>
+            </a:pPr>
+            <a:r>
+              <a:rPr sz="1950" b="1">
+                <a:solidFill>
+                  <a:srgbClr val="16324F"/>
+                </a:solidFill>
+              </a:rPr>
+              <a:t>Microsoft Copilot</a:t>
+            </a:r>
+          </a:p>
+        </p:txBody>
+      </p:sp>
+      <p:sp>
+        <p:nvSpPr>
+          <p:cNvPr id="12" name="">
+            <a:extLst xmlns:a="http://schemas.openxmlformats.org/drawingml/2006/main">
+              <a:ext uri="{FF2B5EF4-FFF2-40B4-BE49-F238E27FC236}">
+                <a16:creationId xmlns:a16="http://schemas.microsoft.com/office/drawing/2014/main" id="{C58C76D4-E413-4285-9F22-1C7482066B64}"/>
+              </a:ext>
+            </a:extLst>
+          </p:cNvPr>
+          <p:cNvSpPr>
+            <a:spLocks xmlns:a="http://schemas.openxmlformats.org/drawingml/2006/main" noGrp="1"/>
+          </p:cNvSpPr>
+          <p:nvPr/>
+        </p:nvSpPr>
+        <p:spPr>
+          <a:xfrm xmlns:a="http://schemas.openxmlformats.org/drawingml/2006/main">
+            <a:off x="3048000" y="4191000"/>
+            <a:ext cx="7810500" cy="609600"/>
+          </a:xfrm>
+          <a:prstGeom xmlns:a="http://schemas.openxmlformats.org/drawingml/2006/main" prst="rect">
+            <a:avLst/>
+          </a:prstGeom>
+          <a:noFill xmlns:a="http://schemas.openxmlformats.org/drawingml/2006/main"/>
+          <a:ln xmlns:a="http://schemas.openxmlformats.org/drawingml/2006/main" w="0">
+            <a:noFill/>
+            <a:prstDash val="solid"/>
+          </a:ln>
+        </p:spPr>
+        <p:txBody>
+          <a:bodyPr xmlns:a="http://schemas.openxmlformats.org/drawingml/2006/main"/>
+          <a:lstStyle xmlns:a="http://schemas.openxmlformats.org/drawingml/2006/main"/>
+          <a:p xmlns:a="http://schemas.openxmlformats.org/drawingml/2006/main">
+            <a:pPr algn="l">
+              <a:defRPr sz="1575" b="0">
                 <a:solidFill>
                   <a:srgbClr val="1F2933"/>
                 </a:solidFill>
               </a:defRPr>
             </a:pPr>
             <a:r>
-              <a:rPr sz="1500" b="0">
+              <a:rPr sz="1575" b="0">
                 <a:solidFill>
                   <a:srgbClr val="1F2933"/>
                 </a:solidFill>
               </a:rPr>
-              <a:t>Menjelaskan materi dengan bahasa yang lebih sederhana.</a:t>
-            </a:r>
-          </a:p>
-        </p:txBody>
-      </p:sp>
-      <p:sp>
-        <p:nvSpPr>
-          <p:cNvPr id="9" name="">
-            <a:extLst xmlns:a="http://schemas.openxmlformats.org/drawingml/2006/main">
-              <a:ext uri="{FF2B5EF4-FFF2-40B4-BE49-F238E27FC236}">
-                <a16:creationId xmlns:a16="http://schemas.microsoft.com/office/drawing/2014/main" id="{7E4EFE58-595B-48A8-8A3A-ACFE522BAB0A}"/>
-              </a:ext>
-            </a:extLst>
-          </p:cNvPr>
-          <p:cNvSpPr>
-            <a:spLocks xmlns:a="http://schemas.openxmlformats.org/drawingml/2006/main" noGrp="1"/>
-          </p:cNvSpPr>
-          <p:nvPr/>
-        </p:nvSpPr>
-        <p:spPr>
-          <a:xfrm xmlns:a="http://schemas.openxmlformats.org/drawingml/2006/main">
-            <a:off x="1085850" y="2828925"/>
-            <a:ext cx="95250" cy="95250"/>
-          </a:xfrm>
-          <a:prstGeom xmlns:a="http://schemas.openxmlformats.org/drawingml/2006/main" prst="ellipse">
-            <a:avLst/>
-          </a:prstGeom>
-          <a:solidFill xmlns:a="http://schemas.openxmlformats.org/drawingml/2006/main">
-            <a:srgbClr val="16324F"/>
-          </a:solidFill>
-          <a:ln xmlns:a="http://schemas.openxmlformats.org/drawingml/2006/main" w="0">
-            <a:noFill/>
-            <a:prstDash val="solid"/>
-          </a:ln>
-        </p:spPr>
-      </p:sp>
-      <p:sp>
-        <p:nvSpPr>
-          <p:cNvPr id="10" name="">
-            <a:extLst xmlns:a="http://schemas.openxmlformats.org/drawingml/2006/main">
-              <a:ext uri="{FF2B5EF4-FFF2-40B4-BE49-F238E27FC236}">
-                <a16:creationId xmlns:a16="http://schemas.microsoft.com/office/drawing/2014/main" id="{7C52D469-27B4-4D26-9E90-6E89026D712D}"/>
-              </a:ext>
-            </a:extLst>
-          </p:cNvPr>
-          <p:cNvSpPr>
-            <a:spLocks xmlns:a="http://schemas.openxmlformats.org/drawingml/2006/main" noGrp="1"/>
-          </p:cNvSpPr>
-          <p:nvPr/>
-        </p:nvSpPr>
-        <p:spPr>
-          <a:xfrm xmlns:a="http://schemas.openxmlformats.org/drawingml/2006/main">
-            <a:off x="1295400" y="2743200"/>
-            <a:ext cx="4076700" cy="361950"/>
-          </a:xfrm>
-          <a:prstGeom xmlns:a="http://schemas.openxmlformats.org/drawingml/2006/main" prst="rect">
-            <a:avLst/>
-          </a:prstGeom>
-          <a:noFill xmlns:a="http://schemas.openxmlformats.org/drawingml/2006/main"/>
-          <a:ln xmlns:a="http://schemas.openxmlformats.org/drawingml/2006/main" w="0">
-            <a:noFill/>
-            <a:prstDash val="solid"/>
-          </a:ln>
-        </p:spPr>
-        <p:txBody>
-          <a:bodyPr xmlns:a="http://schemas.openxmlformats.org/drawingml/2006/main"/>
-          <a:lstStyle xmlns:a="http://schemas.openxmlformats.org/drawingml/2006/main"/>
-          <a:p xmlns:a="http://schemas.openxmlformats.org/drawingml/2006/main">
-            <a:pPr algn="l">
-              <a:defRPr sz="1500" b="0">
-                <a:solidFill>
-                  <a:srgbClr val="1F2933"/>
-                </a:solidFill>
-              </a:defRPr>
-            </a:pPr>
-            <a:r>
-              <a:rPr sz="1500" b="0">
-                <a:solidFill>
-                  <a:srgbClr val="1F2933"/>
-                </a:solidFill>
-              </a:rPr>
-              <a:t>Merangkum artikel atau catatan menjadi poin-poin penting.</a:t>
-            </a:r>
-          </a:p>
-        </p:txBody>
-      </p:sp>
-      <p:sp>
-        <p:nvSpPr>
-          <p:cNvPr id="11" name="">
-            <a:extLst xmlns:a="http://schemas.openxmlformats.org/drawingml/2006/main">
-              <a:ext uri="{FF2B5EF4-FFF2-40B4-BE49-F238E27FC236}">
-                <a16:creationId xmlns:a16="http://schemas.microsoft.com/office/drawing/2014/main" id="{A495C783-BB75-425E-A990-1A8058B6E3A9}"/>
-              </a:ext>
-            </a:extLst>
-          </p:cNvPr>
-          <p:cNvSpPr>
-            <a:spLocks xmlns:a="http://schemas.openxmlformats.org/drawingml/2006/main" noGrp="1"/>
-          </p:cNvSpPr>
-          <p:nvPr/>
-        </p:nvSpPr>
-        <p:spPr>
-          <a:xfrm xmlns:a="http://schemas.openxmlformats.org/drawingml/2006/main">
-            <a:off x="1085850" y="3267075"/>
-            <a:ext cx="95250" cy="95250"/>
-          </a:xfrm>
-          <a:prstGeom xmlns:a="http://schemas.openxmlformats.org/drawingml/2006/main" prst="ellipse">
-            <a:avLst/>
-          </a:prstGeom>
-          <a:solidFill xmlns:a="http://schemas.openxmlformats.org/drawingml/2006/main">
-            <a:srgbClr val="16324F"/>
-          </a:solidFill>
-          <a:ln xmlns:a="http://schemas.openxmlformats.org/drawingml/2006/main" w="0">
-            <a:noFill/>
-            <a:prstDash val="solid"/>
-          </a:ln>
-        </p:spPr>
-      </p:sp>
-      <p:sp>
-        <p:nvSpPr>
-          <p:cNvPr id="12" name="">
-            <a:extLst xmlns:a="http://schemas.openxmlformats.org/drawingml/2006/main">
-              <a:ext uri="{FF2B5EF4-FFF2-40B4-BE49-F238E27FC236}">
-                <a16:creationId xmlns:a16="http://schemas.microsoft.com/office/drawing/2014/main" id="{46F12D1B-C8CF-4C80-8620-D84E62CF369B}"/>
-              </a:ext>
-            </a:extLst>
-          </p:cNvPr>
-          <p:cNvSpPr>
-            <a:spLocks xmlns:a="http://schemas.openxmlformats.org/drawingml/2006/main" noGrp="1"/>
-          </p:cNvSpPr>
-          <p:nvPr/>
-        </p:nvSpPr>
-        <p:spPr>
-          <a:xfrm xmlns:a="http://schemas.openxmlformats.org/drawingml/2006/main">
-            <a:off x="1295400" y="3181350"/>
-            <a:ext cx="4076700" cy="361950"/>
-          </a:xfrm>
-          <a:prstGeom xmlns:a="http://schemas.openxmlformats.org/drawingml/2006/main" prst="rect">
-            <a:avLst/>
-          </a:prstGeom>
-          <a:noFill xmlns:a="http://schemas.openxmlformats.org/drawingml/2006/main"/>
-          <a:ln xmlns:a="http://schemas.openxmlformats.org/drawingml/2006/main" w="0">
-            <a:noFill/>
-            <a:prstDash val="solid"/>
-          </a:ln>
-        </p:spPr>
-        <p:txBody>
-          <a:bodyPr xmlns:a="http://schemas.openxmlformats.org/drawingml/2006/main"/>
-          <a:lstStyle xmlns:a="http://schemas.openxmlformats.org/drawingml/2006/main"/>
-          <a:p xmlns:a="http://schemas.openxmlformats.org/drawingml/2006/main">
-            <a:pPr algn="l">
-              <a:defRPr sz="1500" b="0">
-                <a:solidFill>
-                  <a:srgbClr val="1F2933"/>
-                </a:solidFill>
-              </a:defRPr>
-            </a:pPr>
-            <a:r>
-              <a:rPr sz="1500" b="0">
-                <a:solidFill>
-                  <a:srgbClr val="1F2933"/>
-                </a:solidFill>
-              </a:rPr>
-              <a:t>Membantu mencari ide presentasi atau poster.</a:t>
+              <a:t>Cocok untuk membantu kerja berbasis dokumen, ringkasan, dan tugas yang dekat dengan layanan Microsoft.</a:t>
             </a:r>
           </a:p>
         </p:txBody>
@@ -3188,474 +3326,19 @@
           <p:cNvPr id="13" name="">
             <a:extLst xmlns:a="http://schemas.openxmlformats.org/drawingml/2006/main">
               <a:ext uri="{FF2B5EF4-FFF2-40B4-BE49-F238E27FC236}">
-                <a16:creationId xmlns:a16="http://schemas.microsoft.com/office/drawing/2014/main" id="{13597CDE-6A41-4833-A535-EF3D806201C7}"/>
-              </a:ext>
-            </a:extLst>
-          </p:cNvPr>
-          <p:cNvSpPr>
-            <a:spLocks xmlns:a="http://schemas.openxmlformats.org/drawingml/2006/main" noGrp="1"/>
-          </p:cNvSpPr>
-          <p:nvPr/>
-        </p:nvSpPr>
-        <p:spPr>
-          <a:xfrm xmlns:a="http://schemas.openxmlformats.org/drawingml/2006/main">
-            <a:off x="1085850" y="3705225"/>
-            <a:ext cx="95250" cy="95250"/>
-          </a:xfrm>
-          <a:prstGeom xmlns:a="http://schemas.openxmlformats.org/drawingml/2006/main" prst="ellipse">
-            <a:avLst/>
-          </a:prstGeom>
-          <a:solidFill xmlns:a="http://schemas.openxmlformats.org/drawingml/2006/main">
-            <a:srgbClr val="16324F"/>
-          </a:solidFill>
-          <a:ln xmlns:a="http://schemas.openxmlformats.org/drawingml/2006/main" w="0">
-            <a:noFill/>
-            <a:prstDash val="solid"/>
-          </a:ln>
-        </p:spPr>
-      </p:sp>
-      <p:sp>
-        <p:nvSpPr>
-          <p:cNvPr id="14" name="">
-            <a:extLst xmlns:a="http://schemas.openxmlformats.org/drawingml/2006/main">
-              <a:ext uri="{FF2B5EF4-FFF2-40B4-BE49-F238E27FC236}">
-                <a16:creationId xmlns:a16="http://schemas.microsoft.com/office/drawing/2014/main" id="{76D5D7A4-CA1C-496D-8B10-5A5B44244D2D}"/>
-              </a:ext>
-            </a:extLst>
-          </p:cNvPr>
-          <p:cNvSpPr>
-            <a:spLocks xmlns:a="http://schemas.openxmlformats.org/drawingml/2006/main" noGrp="1"/>
-          </p:cNvSpPr>
-          <p:nvPr/>
-        </p:nvSpPr>
-        <p:spPr>
-          <a:xfrm xmlns:a="http://schemas.openxmlformats.org/drawingml/2006/main">
-            <a:off x="1295400" y="3619500"/>
-            <a:ext cx="4076700" cy="361950"/>
-          </a:xfrm>
-          <a:prstGeom xmlns:a="http://schemas.openxmlformats.org/drawingml/2006/main" prst="rect">
-            <a:avLst/>
-          </a:prstGeom>
-          <a:noFill xmlns:a="http://schemas.openxmlformats.org/drawingml/2006/main"/>
-          <a:ln xmlns:a="http://schemas.openxmlformats.org/drawingml/2006/main" w="0">
-            <a:noFill/>
-            <a:prstDash val="solid"/>
-          </a:ln>
-        </p:spPr>
-        <p:txBody>
-          <a:bodyPr xmlns:a="http://schemas.openxmlformats.org/drawingml/2006/main"/>
-          <a:lstStyle xmlns:a="http://schemas.openxmlformats.org/drawingml/2006/main"/>
-          <a:p xmlns:a="http://schemas.openxmlformats.org/drawingml/2006/main">
-            <a:pPr algn="l">
-              <a:defRPr sz="1500" b="0">
-                <a:solidFill>
-                  <a:srgbClr val="1F2933"/>
-                </a:solidFill>
-              </a:defRPr>
-            </a:pPr>
-            <a:r>
-              <a:rPr sz="1500" b="0">
-                <a:solidFill>
-                  <a:srgbClr val="1F2933"/>
-                </a:solidFill>
-              </a:rPr>
-              <a:t>Membantu memahami contoh kode atau langkah pemecahan masalah.</a:t>
-            </a:r>
-          </a:p>
-        </p:txBody>
-      </p:sp>
-      <p:sp>
-        <p:nvSpPr>
-          <p:cNvPr id="15" name="">
-            <a:extLst xmlns:a="http://schemas.openxmlformats.org/drawingml/2006/main">
-              <a:ext uri="{FF2B5EF4-FFF2-40B4-BE49-F238E27FC236}">
-                <a16:creationId xmlns:a16="http://schemas.microsoft.com/office/drawing/2014/main" id="{EA5CDB95-ED60-49D3-AC99-BCBAB6DC0009}"/>
-              </a:ext>
-            </a:extLst>
-          </p:cNvPr>
-          <p:cNvSpPr>
-            <a:spLocks xmlns:a="http://schemas.openxmlformats.org/drawingml/2006/main" noGrp="1"/>
-          </p:cNvSpPr>
-          <p:nvPr/>
-        </p:nvSpPr>
-        <p:spPr>
-          <a:xfrm xmlns:a="http://schemas.openxmlformats.org/drawingml/2006/main">
-            <a:off x="6400800" y="1771650"/>
-            <a:ext cx="2095500" cy="285750"/>
-          </a:xfrm>
-          <a:prstGeom xmlns:a="http://schemas.openxmlformats.org/drawingml/2006/main" prst="rect">
-            <a:avLst/>
-          </a:prstGeom>
-          <a:noFill xmlns:a="http://schemas.openxmlformats.org/drawingml/2006/main"/>
-          <a:ln xmlns:a="http://schemas.openxmlformats.org/drawingml/2006/main" w="0">
-            <a:noFill/>
-            <a:prstDash val="solid"/>
-          </a:ln>
-        </p:spPr>
-        <p:txBody>
-          <a:bodyPr xmlns:a="http://schemas.openxmlformats.org/drawingml/2006/main"/>
-          <a:lstStyle xmlns:a="http://schemas.openxmlformats.org/drawingml/2006/main"/>
-          <a:p xmlns:a="http://schemas.openxmlformats.org/drawingml/2006/main">
-            <a:pPr algn="l">
-              <a:defRPr sz="2100" b="1">
-                <a:solidFill>
-                  <a:srgbClr val="16324F"/>
-                </a:solidFill>
-              </a:defRPr>
-            </a:pPr>
-            <a:r>
-              <a:rPr sz="2100" b="1">
-                <a:solidFill>
-                  <a:srgbClr val="16324F"/>
-                </a:solidFill>
-              </a:rPr>
-              <a:t>Untuk kreativitas</a:t>
-            </a:r>
-          </a:p>
-        </p:txBody>
-      </p:sp>
-      <p:sp>
-        <p:nvSpPr>
-          <p:cNvPr id="16" name="">
-            <a:extLst xmlns:a="http://schemas.openxmlformats.org/drawingml/2006/main">
-              <a:ext uri="{FF2B5EF4-FFF2-40B4-BE49-F238E27FC236}">
-                <a16:creationId xmlns:a16="http://schemas.microsoft.com/office/drawing/2014/main" id="{1FCC79B6-9D96-4F79-9637-9A72E1A6EDCB}"/>
-              </a:ext>
-            </a:extLst>
-          </p:cNvPr>
-          <p:cNvSpPr>
-            <a:spLocks xmlns:a="http://schemas.openxmlformats.org/drawingml/2006/main" noGrp="1"/>
-          </p:cNvSpPr>
-          <p:nvPr/>
-        </p:nvSpPr>
-        <p:spPr>
-          <a:xfrm xmlns:a="http://schemas.openxmlformats.org/drawingml/2006/main">
-            <a:off x="6400800" y="2390775"/>
-            <a:ext cx="95250" cy="95250"/>
-          </a:xfrm>
-          <a:prstGeom xmlns:a="http://schemas.openxmlformats.org/drawingml/2006/main" prst="ellipse">
-            <a:avLst/>
-          </a:prstGeom>
-          <a:solidFill xmlns:a="http://schemas.openxmlformats.org/drawingml/2006/main">
-            <a:srgbClr val="16324F"/>
-          </a:solidFill>
-          <a:ln xmlns:a="http://schemas.openxmlformats.org/drawingml/2006/main" w="0">
-            <a:noFill/>
-            <a:prstDash val="solid"/>
-          </a:ln>
-        </p:spPr>
-      </p:sp>
-      <p:sp>
-        <p:nvSpPr>
-          <p:cNvPr id="17" name="">
-            <a:extLst xmlns:a="http://schemas.openxmlformats.org/drawingml/2006/main">
-              <a:ext uri="{FF2B5EF4-FFF2-40B4-BE49-F238E27FC236}">
-                <a16:creationId xmlns:a16="http://schemas.microsoft.com/office/drawing/2014/main" id="{0DBC5FC5-7930-4AA3-8C70-685ED563163D}"/>
-              </a:ext>
-            </a:extLst>
-          </p:cNvPr>
-          <p:cNvSpPr>
-            <a:spLocks xmlns:a="http://schemas.openxmlformats.org/drawingml/2006/main" noGrp="1"/>
-          </p:cNvSpPr>
-          <p:nvPr/>
-        </p:nvSpPr>
-        <p:spPr>
-          <a:xfrm xmlns:a="http://schemas.openxmlformats.org/drawingml/2006/main">
-            <a:off x="6610350" y="2305050"/>
-            <a:ext cx="4076700" cy="361950"/>
-          </a:xfrm>
-          <a:prstGeom xmlns:a="http://schemas.openxmlformats.org/drawingml/2006/main" prst="rect">
-            <a:avLst/>
-          </a:prstGeom>
-          <a:noFill xmlns:a="http://schemas.openxmlformats.org/drawingml/2006/main"/>
-          <a:ln xmlns:a="http://schemas.openxmlformats.org/drawingml/2006/main" w="0">
-            <a:noFill/>
-            <a:prstDash val="solid"/>
-          </a:ln>
-        </p:spPr>
-        <p:txBody>
-          <a:bodyPr xmlns:a="http://schemas.openxmlformats.org/drawingml/2006/main"/>
-          <a:lstStyle xmlns:a="http://schemas.openxmlformats.org/drawingml/2006/main"/>
-          <a:p xmlns:a="http://schemas.openxmlformats.org/drawingml/2006/main">
-            <a:pPr algn="l">
-              <a:defRPr sz="1500" b="0">
-                <a:solidFill>
-                  <a:srgbClr val="1F2933"/>
-                </a:solidFill>
-              </a:defRPr>
-            </a:pPr>
-            <a:r>
-              <a:rPr sz="1500" b="0">
-                <a:solidFill>
-                  <a:srgbClr val="1F2933"/>
-                </a:solidFill>
-              </a:rPr>
-              <a:t>Membuat gambar dari deskripsi teks.</a:t>
-            </a:r>
-          </a:p>
-        </p:txBody>
-      </p:sp>
-      <p:sp>
-        <p:nvSpPr>
-          <p:cNvPr id="18" name="">
-            <a:extLst xmlns:a="http://schemas.openxmlformats.org/drawingml/2006/main">
-              <a:ext uri="{FF2B5EF4-FFF2-40B4-BE49-F238E27FC236}">
-                <a16:creationId xmlns:a16="http://schemas.microsoft.com/office/drawing/2014/main" id="{CCAF9064-DBD4-4576-9D32-3E2D875962F9}"/>
-              </a:ext>
-            </a:extLst>
-          </p:cNvPr>
-          <p:cNvSpPr>
-            <a:spLocks xmlns:a="http://schemas.openxmlformats.org/drawingml/2006/main" noGrp="1"/>
-          </p:cNvSpPr>
-          <p:nvPr/>
-        </p:nvSpPr>
-        <p:spPr>
-          <a:xfrm xmlns:a="http://schemas.openxmlformats.org/drawingml/2006/main">
-            <a:off x="6400800" y="2828925"/>
-            <a:ext cx="95250" cy="95250"/>
-          </a:xfrm>
-          <a:prstGeom xmlns:a="http://schemas.openxmlformats.org/drawingml/2006/main" prst="ellipse">
-            <a:avLst/>
-          </a:prstGeom>
-          <a:solidFill xmlns:a="http://schemas.openxmlformats.org/drawingml/2006/main">
-            <a:srgbClr val="16324F"/>
-          </a:solidFill>
-          <a:ln xmlns:a="http://schemas.openxmlformats.org/drawingml/2006/main" w="0">
-            <a:noFill/>
-            <a:prstDash val="solid"/>
-          </a:ln>
-        </p:spPr>
-      </p:sp>
-      <p:sp>
-        <p:nvSpPr>
-          <p:cNvPr id="19" name="">
-            <a:extLst xmlns:a="http://schemas.openxmlformats.org/drawingml/2006/main">
-              <a:ext uri="{FF2B5EF4-FFF2-40B4-BE49-F238E27FC236}">
-                <a16:creationId xmlns:a16="http://schemas.microsoft.com/office/drawing/2014/main" id="{05B6CEFF-4944-43FA-8B7B-090B2CAECD1C}"/>
-              </a:ext>
-            </a:extLst>
-          </p:cNvPr>
-          <p:cNvSpPr>
-            <a:spLocks xmlns:a="http://schemas.openxmlformats.org/drawingml/2006/main" noGrp="1"/>
-          </p:cNvSpPr>
-          <p:nvPr/>
-        </p:nvSpPr>
-        <p:spPr>
-          <a:xfrm xmlns:a="http://schemas.openxmlformats.org/drawingml/2006/main">
-            <a:off x="6610350" y="2743200"/>
-            <a:ext cx="4076700" cy="361950"/>
-          </a:xfrm>
-          <a:prstGeom xmlns:a="http://schemas.openxmlformats.org/drawingml/2006/main" prst="rect">
-            <a:avLst/>
-          </a:prstGeom>
-          <a:noFill xmlns:a="http://schemas.openxmlformats.org/drawingml/2006/main"/>
-          <a:ln xmlns:a="http://schemas.openxmlformats.org/drawingml/2006/main" w="0">
-            <a:noFill/>
-            <a:prstDash val="solid"/>
-          </a:ln>
-        </p:spPr>
-        <p:txBody>
-          <a:bodyPr xmlns:a="http://schemas.openxmlformats.org/drawingml/2006/main"/>
-          <a:lstStyle xmlns:a="http://schemas.openxmlformats.org/drawingml/2006/main"/>
-          <a:p xmlns:a="http://schemas.openxmlformats.org/drawingml/2006/main">
-            <a:pPr algn="l">
-              <a:defRPr sz="1500" b="0">
-                <a:solidFill>
-                  <a:srgbClr val="1F2933"/>
-                </a:solidFill>
-              </a:defRPr>
-            </a:pPr>
-            <a:r>
-              <a:rPr sz="1500" b="0">
-                <a:solidFill>
-                  <a:srgbClr val="1F2933"/>
-                </a:solidFill>
-              </a:rPr>
-              <a:t>Menyusun draft awal tulisan atau caption.</a:t>
-            </a:r>
-          </a:p>
-        </p:txBody>
-      </p:sp>
-      <p:sp>
-        <p:nvSpPr>
-          <p:cNvPr id="20" name="">
-            <a:extLst xmlns:a="http://schemas.openxmlformats.org/drawingml/2006/main">
-              <a:ext uri="{FF2B5EF4-FFF2-40B4-BE49-F238E27FC236}">
-                <a16:creationId xmlns:a16="http://schemas.microsoft.com/office/drawing/2014/main" id="{A18FD3AE-96A2-4380-9650-1884D375E9E3}"/>
-              </a:ext>
-            </a:extLst>
-          </p:cNvPr>
-          <p:cNvSpPr>
-            <a:spLocks xmlns:a="http://schemas.openxmlformats.org/drawingml/2006/main" noGrp="1"/>
-          </p:cNvSpPr>
-          <p:nvPr/>
-        </p:nvSpPr>
-        <p:spPr>
-          <a:xfrm xmlns:a="http://schemas.openxmlformats.org/drawingml/2006/main">
-            <a:off x="6400800" y="3267075"/>
-            <a:ext cx="95250" cy="95250"/>
-          </a:xfrm>
-          <a:prstGeom xmlns:a="http://schemas.openxmlformats.org/drawingml/2006/main" prst="ellipse">
-            <a:avLst/>
-          </a:prstGeom>
-          <a:solidFill xmlns:a="http://schemas.openxmlformats.org/drawingml/2006/main">
-            <a:srgbClr val="16324F"/>
-          </a:solidFill>
-          <a:ln xmlns:a="http://schemas.openxmlformats.org/drawingml/2006/main" w="0">
-            <a:noFill/>
-            <a:prstDash val="solid"/>
-          </a:ln>
-        </p:spPr>
-      </p:sp>
-      <p:sp>
-        <p:nvSpPr>
-          <p:cNvPr id="21" name="">
-            <a:extLst xmlns:a="http://schemas.openxmlformats.org/drawingml/2006/main">
-              <a:ext uri="{FF2B5EF4-FFF2-40B4-BE49-F238E27FC236}">
-                <a16:creationId xmlns:a16="http://schemas.microsoft.com/office/drawing/2014/main" id="{BFCD683B-814C-45EC-A9C0-7E35DD222D41}"/>
-              </a:ext>
-            </a:extLst>
-          </p:cNvPr>
-          <p:cNvSpPr>
-            <a:spLocks xmlns:a="http://schemas.openxmlformats.org/drawingml/2006/main" noGrp="1"/>
-          </p:cNvSpPr>
-          <p:nvPr/>
-        </p:nvSpPr>
-        <p:spPr>
-          <a:xfrm xmlns:a="http://schemas.openxmlformats.org/drawingml/2006/main">
-            <a:off x="6610350" y="3181350"/>
-            <a:ext cx="4076700" cy="361950"/>
-          </a:xfrm>
-          <a:prstGeom xmlns:a="http://schemas.openxmlformats.org/drawingml/2006/main" prst="rect">
-            <a:avLst/>
-          </a:prstGeom>
-          <a:noFill xmlns:a="http://schemas.openxmlformats.org/drawingml/2006/main"/>
-          <a:ln xmlns:a="http://schemas.openxmlformats.org/drawingml/2006/main" w="0">
-            <a:noFill/>
-            <a:prstDash val="solid"/>
-          </a:ln>
-        </p:spPr>
-        <p:txBody>
-          <a:bodyPr xmlns:a="http://schemas.openxmlformats.org/drawingml/2006/main"/>
-          <a:lstStyle xmlns:a="http://schemas.openxmlformats.org/drawingml/2006/main"/>
-          <a:p xmlns:a="http://schemas.openxmlformats.org/drawingml/2006/main">
-            <a:pPr algn="l">
-              <a:defRPr sz="1500" b="0">
-                <a:solidFill>
-                  <a:srgbClr val="1F2933"/>
-                </a:solidFill>
-              </a:defRPr>
-            </a:pPr>
-            <a:r>
-              <a:rPr sz="1500" b="0">
-                <a:solidFill>
-                  <a:srgbClr val="1F2933"/>
-                </a:solidFill>
-              </a:rPr>
-              <a:t>Membantu membuat variasi ide konten.</a:t>
-            </a:r>
-          </a:p>
-        </p:txBody>
-      </p:sp>
-      <p:sp>
-        <p:nvSpPr>
-          <p:cNvPr id="22" name="">
-            <a:extLst xmlns:a="http://schemas.openxmlformats.org/drawingml/2006/main">
-              <a:ext uri="{FF2B5EF4-FFF2-40B4-BE49-F238E27FC236}">
-                <a16:creationId xmlns:a16="http://schemas.microsoft.com/office/drawing/2014/main" id="{C4143B89-B88B-4C6A-BC0B-0D4E60AE517E}"/>
-              </a:ext>
-            </a:extLst>
-          </p:cNvPr>
-          <p:cNvSpPr>
-            <a:spLocks xmlns:a="http://schemas.openxmlformats.org/drawingml/2006/main" noGrp="1"/>
-          </p:cNvSpPr>
-          <p:nvPr/>
-        </p:nvSpPr>
-        <p:spPr>
-          <a:xfrm xmlns:a="http://schemas.openxmlformats.org/drawingml/2006/main">
-            <a:off x="6400800" y="3705225"/>
-            <a:ext cx="95250" cy="95250"/>
-          </a:xfrm>
-          <a:prstGeom xmlns:a="http://schemas.openxmlformats.org/drawingml/2006/main" prst="ellipse">
-            <a:avLst/>
-          </a:prstGeom>
-          <a:solidFill xmlns:a="http://schemas.openxmlformats.org/drawingml/2006/main">
-            <a:srgbClr val="16324F"/>
-          </a:solidFill>
-          <a:ln xmlns:a="http://schemas.openxmlformats.org/drawingml/2006/main" w="0">
-            <a:noFill/>
-            <a:prstDash val="solid"/>
-          </a:ln>
-        </p:spPr>
-      </p:sp>
-      <p:sp>
-        <p:nvSpPr>
-          <p:cNvPr id="23" name="">
-            <a:extLst xmlns:a="http://schemas.openxmlformats.org/drawingml/2006/main">
-              <a:ext uri="{FF2B5EF4-FFF2-40B4-BE49-F238E27FC236}">
-                <a16:creationId xmlns:a16="http://schemas.microsoft.com/office/drawing/2014/main" id="{36666E6B-A999-456D-87F7-31F8C0065CF9}"/>
-              </a:ext>
-            </a:extLst>
-          </p:cNvPr>
-          <p:cNvSpPr>
-            <a:spLocks xmlns:a="http://schemas.openxmlformats.org/drawingml/2006/main" noGrp="1"/>
-          </p:cNvSpPr>
-          <p:nvPr/>
-        </p:nvSpPr>
-        <p:spPr>
-          <a:xfrm xmlns:a="http://schemas.openxmlformats.org/drawingml/2006/main">
-            <a:off x="6610350" y="3619500"/>
-            <a:ext cx="4076700" cy="361950"/>
-          </a:xfrm>
-          <a:prstGeom xmlns:a="http://schemas.openxmlformats.org/drawingml/2006/main" prst="rect">
-            <a:avLst/>
-          </a:prstGeom>
-          <a:noFill xmlns:a="http://schemas.openxmlformats.org/drawingml/2006/main"/>
-          <a:ln xmlns:a="http://schemas.openxmlformats.org/drawingml/2006/main" w="0">
-            <a:noFill/>
-            <a:prstDash val="solid"/>
-          </a:ln>
-        </p:spPr>
-        <p:txBody>
-          <a:bodyPr xmlns:a="http://schemas.openxmlformats.org/drawingml/2006/main"/>
-          <a:lstStyle xmlns:a="http://schemas.openxmlformats.org/drawingml/2006/main"/>
-          <a:p xmlns:a="http://schemas.openxmlformats.org/drawingml/2006/main">
-            <a:pPr algn="l">
-              <a:defRPr sz="1500" b="0">
-                <a:solidFill>
-                  <a:srgbClr val="1F2933"/>
-                </a:solidFill>
-              </a:defRPr>
-            </a:pPr>
-            <a:r>
-              <a:rPr sz="1500" b="0">
-                <a:solidFill>
-                  <a:srgbClr val="1F2933"/>
-                </a:solidFill>
-              </a:rPr>
-              <a:t>Memberi contoh struktur narasi atau alur presentasi.</a:t>
-            </a:r>
-          </a:p>
-        </p:txBody>
-      </p:sp>
-      <p:sp>
-        <p:nvSpPr>
-          <p:cNvPr id="24" name="">
-            <a:extLst xmlns:a="http://schemas.openxmlformats.org/drawingml/2006/main">
-              <a:ext uri="{FF2B5EF4-FFF2-40B4-BE49-F238E27FC236}">
-                <a16:creationId xmlns:a16="http://schemas.microsoft.com/office/drawing/2014/main" id="{08FA2DD4-A7A8-4901-A082-7EA9DAC710C6}"/>
-              </a:ext>
-            </a:extLst>
-          </p:cNvPr>
-          <p:cNvSpPr>
-            <a:spLocks xmlns:a="http://schemas.openxmlformats.org/drawingml/2006/main" noGrp="1"/>
-          </p:cNvSpPr>
-          <p:nvPr/>
-        </p:nvSpPr>
-        <p:spPr>
-          <a:xfrm xmlns:a="http://schemas.openxmlformats.org/drawingml/2006/main">
-            <a:off x="1009650" y="5848350"/>
-            <a:ext cx="9982200" cy="323850"/>
+                <a16:creationId xmlns:a16="http://schemas.microsoft.com/office/drawing/2014/main" id="{97C749D6-E4C3-4B63-8B22-70B3AFC4F5EA}"/>
+              </a:ext>
+            </a:extLst>
+          </p:cNvPr>
+          <p:cNvSpPr>
+            <a:spLocks xmlns:a="http://schemas.openxmlformats.org/drawingml/2006/main" noGrp="1"/>
+          </p:cNvSpPr>
+          <p:nvPr/>
+        </p:nvSpPr>
+        <p:spPr>
+          <a:xfrm xmlns:a="http://schemas.openxmlformats.org/drawingml/2006/main">
+            <a:off x="1009650" y="5562600"/>
+            <a:ext cx="9982200" cy="285750"/>
           </a:xfrm>
           <a:prstGeom xmlns:a="http://schemas.openxmlformats.org/drawingml/2006/main" prst="rect">
             <a:avLst/>
@@ -3683,17 +3366,17 @@
                   <a:srgbClr val="24577A"/>
                 </a:solidFill>
               </a:rPr>
-              <a:t>Yang harus dijaga: hasil AI tetap perlu dicek, dipahami, dan diolah ulang dengan bahasa serta pemikiran kalian sendiri.</a:t>
-            </a:r>
-          </a:p>
-        </p:txBody>
-      </p:sp>
-      <p:sp>
-        <p:nvSpPr>
-          <p:cNvPr id="25" name="">
-            <a:extLst xmlns:a="http://schemas.openxmlformats.org/drawingml/2006/main">
-              <a:ext uri="{FF2B5EF4-FFF2-40B4-BE49-F238E27FC236}">
-                <a16:creationId xmlns:a16="http://schemas.microsoft.com/office/drawing/2014/main" id="{56C1FA25-272A-47E1-A625-E63B6848F6B8}"/>
+              <a:t>Prinsip penting: pilih tool berdasarkan kebutuhan tugas, bukan hanya karena sedang populer.</a:t>
+            </a:r>
+          </a:p>
+        </p:txBody>
+      </p:sp>
+      <p:sp>
+        <p:nvSpPr>
+          <p:cNvPr id="14" name="">
+            <a:extLst xmlns:a="http://schemas.openxmlformats.org/drawingml/2006/main">
+              <a:ext uri="{FF2B5EF4-FFF2-40B4-BE49-F238E27FC236}">
+                <a16:creationId xmlns:a16="http://schemas.microsoft.com/office/drawing/2014/main" id="{4980FBE1-1B6B-4039-9FC4-3169FDFF1C75}"/>
               </a:ext>
             </a:extLst>
           </p:cNvPr>
@@ -3721,10 +3404,10 @@
       </p:sp>
       <p:sp>
         <p:nvSpPr>
-          <p:cNvPr id="26" name="">
-            <a:extLst xmlns:a="http://schemas.openxmlformats.org/drawingml/2006/main">
-              <a:ext uri="{FF2B5EF4-FFF2-40B4-BE49-F238E27FC236}">
-                <a16:creationId xmlns:a16="http://schemas.microsoft.com/office/drawing/2014/main" id="{12015E12-3305-4705-ABED-90DD631CCF9F}"/>
+          <p:cNvPr id="15" name="">
+            <a:extLst xmlns:a="http://schemas.openxmlformats.org/drawingml/2006/main">
+              <a:ext uri="{FF2B5EF4-FFF2-40B4-BE49-F238E27FC236}">
+                <a16:creationId xmlns:a16="http://schemas.microsoft.com/office/drawing/2014/main" id="{37F16490-5C48-4DB0-8B97-86A8E89B51F9}"/>
               </a:ext>
             </a:extLst>
           </p:cNvPr>
@@ -3771,10 +3454,10 @@
       </p:sp>
       <p:sp>
         <p:nvSpPr>
-          <p:cNvPr id="27" name="">
-            <a:extLst xmlns:a="http://schemas.openxmlformats.org/drawingml/2006/main">
-              <a:ext uri="{FF2B5EF4-FFF2-40B4-BE49-F238E27FC236}">
-                <a16:creationId xmlns:a16="http://schemas.microsoft.com/office/drawing/2014/main" id="{BD930536-137E-4013-8ADF-B7F2F923F0A0}"/>
+          <p:cNvPr id="16" name="">
+            <a:extLst xmlns:a="http://schemas.openxmlformats.org/drawingml/2006/main">
+              <a:ext uri="{FF2B5EF4-FFF2-40B4-BE49-F238E27FC236}">
+                <a16:creationId xmlns:a16="http://schemas.microsoft.com/office/drawing/2014/main" id="{0820E1A0-53BC-4868-9F69-259B86BDECA5}"/>
               </a:ext>
             </a:extLst>
           </p:cNvPr>
@@ -3822,7 +3505,7 @@
     </p:spTree>
     <p:extLst>
       <p:ext uri="{BB962C8B-B14F-4D97-AF65-F5344CB8AC3E}">
-        <p14:creationId xmlns:p14="http://schemas.microsoft.com/office/powerpoint/2010/main" val="1017525083"/>
+        <p14:creationId xmlns:p14="http://schemas.microsoft.com/office/powerpoint/2010/main" val="265918038"/>
       </p:ext>
     </p:extLst>
   </p:cSld>
@@ -3850,14 +3533,14 @@
       </p:grpSpPr>
       <p:pic>
         <p:nvPicPr>
-          <p:cNvPr id="30" name=""/>
+          <p:cNvPr id="28" name=""/>
           <p:cNvPicPr>
             <a:picLocks xmlns:a="http://schemas.openxmlformats.org/drawingml/2006/main" noChangeAspect="1"/>
           </p:cNvPicPr>
           <p:nvPr/>
         </p:nvPicPr>
         <p:blipFill>
-          <a:blip xmlns:r="http://schemas.openxmlformats.org/officeDocument/2006/relationships" xmlns:a="http://schemas.openxmlformats.org/drawingml/2006/main" r:embed="R07a9f28804314650"/>
+          <a:blip xmlns:r="http://schemas.openxmlformats.org/officeDocument/2006/relationships" xmlns:a="http://schemas.openxmlformats.org/drawingml/2006/main" r:embed="R063aa84923d94f04"/>
           <a:stretch xmlns:a="http://schemas.openxmlformats.org/drawingml/2006/main"/>
         </p:blipFill>
         <p:spPr>
@@ -3875,7 +3558,7 @@
           <p:cNvPr id="2" name="">
             <a:extLst xmlns:a="http://schemas.openxmlformats.org/drawingml/2006/main">
               <a:ext uri="{FF2B5EF4-FFF2-40B4-BE49-F238E27FC236}">
-                <a16:creationId xmlns:a16="http://schemas.microsoft.com/office/drawing/2014/main" id="{8CDDB02F-364D-4353-8BAB-CEF38639E770}"/>
+                <a16:creationId xmlns:a16="http://schemas.microsoft.com/office/drawing/2014/main" id="{6693D628-27C8-4036-9329-6F2539F689BD}"/>
               </a:ext>
             </a:extLst>
           </p:cNvPr>
@@ -3887,7 +3570,7 @@
         <p:spPr>
           <a:xfrm xmlns:a="http://schemas.openxmlformats.org/drawingml/2006/main">
             <a:off x="723900" y="666750"/>
-            <a:ext cx="10744200" cy="533400"/>
+            <a:ext cx="9334500" cy="533400"/>
           </a:xfrm>
           <a:prstGeom xmlns:a="http://schemas.openxmlformats.org/drawingml/2006/main" prst="rect">
             <a:avLst/>
@@ -3906,7 +3589,7 @@
           <p:cNvPr id="3" name="">
             <a:extLst xmlns:a="http://schemas.openxmlformats.org/drawingml/2006/main">
               <a:ext uri="{FF2B5EF4-FFF2-40B4-BE49-F238E27FC236}">
-                <a16:creationId xmlns:a16="http://schemas.microsoft.com/office/drawing/2014/main" id="{5935261A-9463-445A-B65D-4D218A8D8A4F}"/>
+                <a16:creationId xmlns:a16="http://schemas.microsoft.com/office/drawing/2014/main" id="{CD6F57AB-A912-4CC4-BE83-39B0215E25B1}"/>
               </a:ext>
             </a:extLst>
           </p:cNvPr>
@@ -3918,7 +3601,7 @@
         <p:spPr>
           <a:xfrm xmlns:a="http://schemas.openxmlformats.org/drawingml/2006/main">
             <a:off x="895350" y="762000"/>
-            <a:ext cx="7239000" cy="323850"/>
+            <a:ext cx="8191500" cy="323850"/>
           </a:xfrm>
           <a:prstGeom xmlns:a="http://schemas.openxmlformats.org/drawingml/2006/main" prst="rect">
             <a:avLst/>
@@ -3946,7 +3629,7 @@
                   <a:srgbClr val="FFFFFF"/>
                 </a:solidFill>
               </a:rPr>
-              <a:t>Manfaat dan Risiko Gen-AI</a:t>
+              <a:t>Use Case Akademik yang Baik</a:t>
             </a:r>
           </a:p>
         </p:txBody>
@@ -3956,181 +3639,19 @@
           <p:cNvPr id="4" name="">
             <a:extLst xmlns:a="http://schemas.openxmlformats.org/drawingml/2006/main">
               <a:ext uri="{FF2B5EF4-FFF2-40B4-BE49-F238E27FC236}">
-                <a16:creationId xmlns:a16="http://schemas.microsoft.com/office/drawing/2014/main" id="{367A39AD-EA24-4CF5-9EAD-93E96DF2D2ED}"/>
-              </a:ext>
-            </a:extLst>
-          </p:cNvPr>
-          <p:cNvSpPr>
-            <a:spLocks xmlns:a="http://schemas.openxmlformats.org/drawingml/2006/main" noGrp="1"/>
-          </p:cNvSpPr>
-          <p:nvPr/>
-        </p:nvSpPr>
-        <p:spPr>
-          <a:xfrm xmlns:a="http://schemas.openxmlformats.org/drawingml/2006/main">
-            <a:off x="914400" y="1562100"/>
-            <a:ext cx="4762500" cy="533400"/>
-          </a:xfrm>
-          <a:prstGeom xmlns:a="http://schemas.openxmlformats.org/drawingml/2006/main" prst="rect">
-            <a:avLst/>
-          </a:prstGeom>
-          <a:solidFill xmlns:a="http://schemas.openxmlformats.org/drawingml/2006/main">
-            <a:srgbClr val="24577A"/>
-          </a:solidFill>
-          <a:ln xmlns:a="http://schemas.openxmlformats.org/drawingml/2006/main" w="0">
-            <a:noFill/>
-            <a:prstDash val="solid"/>
-          </a:ln>
-        </p:spPr>
-      </p:sp>
-      <p:sp>
-        <p:nvSpPr>
-          <p:cNvPr id="5" name="">
-            <a:extLst xmlns:a="http://schemas.openxmlformats.org/drawingml/2006/main">
-              <a:ext uri="{FF2B5EF4-FFF2-40B4-BE49-F238E27FC236}">
-                <a16:creationId xmlns:a16="http://schemas.microsoft.com/office/drawing/2014/main" id="{CBF90E3C-1E97-440C-B14A-086C99C25E03}"/>
-              </a:ext>
-            </a:extLst>
-          </p:cNvPr>
-          <p:cNvSpPr>
-            <a:spLocks xmlns:a="http://schemas.openxmlformats.org/drawingml/2006/main" noGrp="1"/>
-          </p:cNvSpPr>
-          <p:nvPr/>
-        </p:nvSpPr>
-        <p:spPr>
-          <a:xfrm xmlns:a="http://schemas.openxmlformats.org/drawingml/2006/main">
-            <a:off x="5905500" y="1562100"/>
-            <a:ext cx="5295900" cy="533400"/>
-          </a:xfrm>
-          <a:prstGeom xmlns:a="http://schemas.openxmlformats.org/drawingml/2006/main" prst="rect">
-            <a:avLst/>
-          </a:prstGeom>
-          <a:solidFill xmlns:a="http://schemas.openxmlformats.org/drawingml/2006/main">
-            <a:srgbClr val="24577A"/>
-          </a:solidFill>
-          <a:ln xmlns:a="http://schemas.openxmlformats.org/drawingml/2006/main" w="0">
-            <a:noFill/>
-            <a:prstDash val="solid"/>
-          </a:ln>
-        </p:spPr>
-      </p:sp>
-      <p:sp>
-        <p:nvSpPr>
-          <p:cNvPr id="6" name="">
-            <a:extLst xmlns:a="http://schemas.openxmlformats.org/drawingml/2006/main">
-              <a:ext uri="{FF2B5EF4-FFF2-40B4-BE49-F238E27FC236}">
-                <a16:creationId xmlns:a16="http://schemas.microsoft.com/office/drawing/2014/main" id="{DF24D310-870E-4A4C-996E-EA3BF9E6363E}"/>
-              </a:ext>
-            </a:extLst>
-          </p:cNvPr>
-          <p:cNvSpPr>
-            <a:spLocks xmlns:a="http://schemas.openxmlformats.org/drawingml/2006/main" noGrp="1"/>
-          </p:cNvSpPr>
-          <p:nvPr/>
-        </p:nvSpPr>
-        <p:spPr>
-          <a:xfrm xmlns:a="http://schemas.openxmlformats.org/drawingml/2006/main">
-            <a:off x="1104900" y="1676400"/>
-            <a:ext cx="2286000" cy="285750"/>
-          </a:xfrm>
-          <a:prstGeom xmlns:a="http://schemas.openxmlformats.org/drawingml/2006/main" prst="rect">
-            <a:avLst/>
-          </a:prstGeom>
-          <a:noFill xmlns:a="http://schemas.openxmlformats.org/drawingml/2006/main"/>
-          <a:ln xmlns:a="http://schemas.openxmlformats.org/drawingml/2006/main" w="0">
-            <a:noFill/>
-            <a:prstDash val="solid"/>
-          </a:ln>
-        </p:spPr>
-        <p:txBody>
-          <a:bodyPr xmlns:a="http://schemas.openxmlformats.org/drawingml/2006/main"/>
-          <a:lstStyle xmlns:a="http://schemas.openxmlformats.org/drawingml/2006/main"/>
-          <a:p xmlns:a="http://schemas.openxmlformats.org/drawingml/2006/main">
-            <a:pPr algn="l">
-              <a:defRPr sz="1800" b="1">
-                <a:solidFill>
-                  <a:srgbClr val="FFFFFF"/>
-                </a:solidFill>
-              </a:defRPr>
-            </a:pPr>
-            <a:r>
-              <a:rPr sz="1800" b="1">
-                <a:solidFill>
-                  <a:srgbClr val="FFFFFF"/>
-                </a:solidFill>
-              </a:rPr>
-              <a:t>Manfaat</a:t>
-            </a:r>
-          </a:p>
-        </p:txBody>
-      </p:sp>
-      <p:sp>
-        <p:nvSpPr>
-          <p:cNvPr id="7" name="">
-            <a:extLst xmlns:a="http://schemas.openxmlformats.org/drawingml/2006/main">
-              <a:ext uri="{FF2B5EF4-FFF2-40B4-BE49-F238E27FC236}">
-                <a16:creationId xmlns:a16="http://schemas.microsoft.com/office/drawing/2014/main" id="{37C7FCAA-4CF6-4804-9616-D69F52FB13AF}"/>
-              </a:ext>
-            </a:extLst>
-          </p:cNvPr>
-          <p:cNvSpPr>
-            <a:spLocks xmlns:a="http://schemas.openxmlformats.org/drawingml/2006/main" noGrp="1"/>
-          </p:cNvSpPr>
-          <p:nvPr/>
-        </p:nvSpPr>
-        <p:spPr>
-          <a:xfrm xmlns:a="http://schemas.openxmlformats.org/drawingml/2006/main">
-            <a:off x="6096000" y="1676400"/>
-            <a:ext cx="4095750" cy="285750"/>
-          </a:xfrm>
-          <a:prstGeom xmlns:a="http://schemas.openxmlformats.org/drawingml/2006/main" prst="rect">
-            <a:avLst/>
-          </a:prstGeom>
-          <a:noFill xmlns:a="http://schemas.openxmlformats.org/drawingml/2006/main"/>
-          <a:ln xmlns:a="http://schemas.openxmlformats.org/drawingml/2006/main" w="0">
-            <a:noFill/>
-            <a:prstDash val="solid"/>
-          </a:ln>
-        </p:spPr>
-        <p:txBody>
-          <a:bodyPr xmlns:a="http://schemas.openxmlformats.org/drawingml/2006/main"/>
-          <a:lstStyle xmlns:a="http://schemas.openxmlformats.org/drawingml/2006/main"/>
-          <a:p xmlns:a="http://schemas.openxmlformats.org/drawingml/2006/main">
-            <a:pPr algn="l">
-              <a:defRPr sz="1800" b="1">
-                <a:solidFill>
-                  <a:srgbClr val="FFFFFF"/>
-                </a:solidFill>
-              </a:defRPr>
-            </a:pPr>
-            <a:r>
-              <a:rPr sz="1800" b="1">
-                <a:solidFill>
-                  <a:srgbClr val="FFFFFF"/>
-                </a:solidFill>
-              </a:rPr>
-              <a:t>Risiko yang Perlu Diwaspadai</a:t>
-            </a:r>
-          </a:p>
-        </p:txBody>
-      </p:sp>
-      <p:sp>
-        <p:nvSpPr>
-          <p:cNvPr id="8" name="">
-            <a:extLst xmlns:a="http://schemas.openxmlformats.org/drawingml/2006/main">
-              <a:ext uri="{FF2B5EF4-FFF2-40B4-BE49-F238E27FC236}">
-                <a16:creationId xmlns:a16="http://schemas.microsoft.com/office/drawing/2014/main" id="{EDED275C-2F94-4E92-A872-B58E0750CC2A}"/>
-              </a:ext>
-            </a:extLst>
-          </p:cNvPr>
-          <p:cNvSpPr>
-            <a:spLocks xmlns:a="http://schemas.openxmlformats.org/drawingml/2006/main" noGrp="1"/>
-          </p:cNvSpPr>
-          <p:nvPr/>
-        </p:nvSpPr>
-        <p:spPr>
-          <a:xfrm xmlns:a="http://schemas.openxmlformats.org/drawingml/2006/main">
-            <a:off x="914400" y="2095500"/>
-            <a:ext cx="4762500" cy="2895600"/>
+                <a16:creationId xmlns:a16="http://schemas.microsoft.com/office/drawing/2014/main" id="{F795A51E-74D1-40C8-91C5-25002B399E10}"/>
+              </a:ext>
+            </a:extLst>
+          </p:cNvPr>
+          <p:cNvSpPr>
+            <a:spLocks xmlns:a="http://schemas.openxmlformats.org/drawingml/2006/main" noGrp="1"/>
+          </p:cNvSpPr>
+          <p:nvPr/>
+        </p:nvSpPr>
+        <p:spPr>
+          <a:xfrm xmlns:a="http://schemas.openxmlformats.org/drawingml/2006/main">
+            <a:off x="876300" y="1562100"/>
+            <a:ext cx="4953000" cy="3771900"/>
           </a:xfrm>
           <a:prstGeom xmlns:a="http://schemas.openxmlformats.org/drawingml/2006/main" prst="rect">
             <a:avLst/>
@@ -4148,22 +3669,22 @@
       </p:sp>
       <p:sp>
         <p:nvSpPr>
-          <p:cNvPr id="9" name="">
-            <a:extLst xmlns:a="http://schemas.openxmlformats.org/drawingml/2006/main">
-              <a:ext uri="{FF2B5EF4-FFF2-40B4-BE49-F238E27FC236}">
-                <a16:creationId xmlns:a16="http://schemas.microsoft.com/office/drawing/2014/main" id="{D993402F-A00B-4790-AFC5-8521D55B08EF}"/>
-              </a:ext>
-            </a:extLst>
-          </p:cNvPr>
-          <p:cNvSpPr>
-            <a:spLocks xmlns:a="http://schemas.openxmlformats.org/drawingml/2006/main" noGrp="1"/>
-          </p:cNvSpPr>
-          <p:nvPr/>
-        </p:nvSpPr>
-        <p:spPr>
-          <a:xfrm xmlns:a="http://schemas.openxmlformats.org/drawingml/2006/main">
-            <a:off x="5905500" y="2095500"/>
-            <a:ext cx="5295900" cy="2895600"/>
+          <p:cNvPr id="5" name="">
+            <a:extLst xmlns:a="http://schemas.openxmlformats.org/drawingml/2006/main">
+              <a:ext uri="{FF2B5EF4-FFF2-40B4-BE49-F238E27FC236}">
+                <a16:creationId xmlns:a16="http://schemas.microsoft.com/office/drawing/2014/main" id="{673E64D3-F6A8-4965-9CDB-78E293E7BE30}"/>
+              </a:ext>
+            </a:extLst>
+          </p:cNvPr>
+          <p:cNvSpPr>
+            <a:spLocks xmlns:a="http://schemas.openxmlformats.org/drawingml/2006/main" noGrp="1"/>
+          </p:cNvSpPr>
+          <p:nvPr/>
+        </p:nvSpPr>
+        <p:spPr>
+          <a:xfrm xmlns:a="http://schemas.openxmlformats.org/drawingml/2006/main">
+            <a:off x="6134100" y="1562100"/>
+            <a:ext cx="5067300" cy="3771900"/>
           </a:xfrm>
           <a:prstGeom xmlns:a="http://schemas.openxmlformats.org/drawingml/2006/main" prst="rect">
             <a:avLst/>
@@ -4181,21 +3702,71 @@
       </p:sp>
       <p:sp>
         <p:nvSpPr>
-          <p:cNvPr id="10" name="">
-            <a:extLst xmlns:a="http://schemas.openxmlformats.org/drawingml/2006/main">
-              <a:ext uri="{FF2B5EF4-FFF2-40B4-BE49-F238E27FC236}">
-                <a16:creationId xmlns:a16="http://schemas.microsoft.com/office/drawing/2014/main" id="{08CBF1AF-8175-4188-8002-3863E9918137}"/>
-              </a:ext>
-            </a:extLst>
-          </p:cNvPr>
-          <p:cNvSpPr>
-            <a:spLocks xmlns:a="http://schemas.openxmlformats.org/drawingml/2006/main" noGrp="1"/>
-          </p:cNvSpPr>
-          <p:nvPr/>
-        </p:nvSpPr>
-        <p:spPr>
-          <a:xfrm xmlns:a="http://schemas.openxmlformats.org/drawingml/2006/main">
-            <a:off x="1162050" y="2409825"/>
+          <p:cNvPr id="6" name="">
+            <a:extLst xmlns:a="http://schemas.openxmlformats.org/drawingml/2006/main">
+              <a:ext uri="{FF2B5EF4-FFF2-40B4-BE49-F238E27FC236}">
+                <a16:creationId xmlns:a16="http://schemas.microsoft.com/office/drawing/2014/main" id="{676BB923-2033-4A59-9A46-01BC1914DBD5}"/>
+              </a:ext>
+            </a:extLst>
+          </p:cNvPr>
+          <p:cNvSpPr>
+            <a:spLocks xmlns:a="http://schemas.openxmlformats.org/drawingml/2006/main" noGrp="1"/>
+          </p:cNvSpPr>
+          <p:nvPr/>
+        </p:nvSpPr>
+        <p:spPr>
+          <a:xfrm xmlns:a="http://schemas.openxmlformats.org/drawingml/2006/main">
+            <a:off x="1123950" y="1809750"/>
+            <a:ext cx="2476500" cy="285750"/>
+          </a:xfrm>
+          <a:prstGeom xmlns:a="http://schemas.openxmlformats.org/drawingml/2006/main" prst="rect">
+            <a:avLst/>
+          </a:prstGeom>
+          <a:noFill xmlns:a="http://schemas.openxmlformats.org/drawingml/2006/main"/>
+          <a:ln xmlns:a="http://schemas.openxmlformats.org/drawingml/2006/main" w="0">
+            <a:noFill/>
+            <a:prstDash val="solid"/>
+          </a:ln>
+        </p:spPr>
+        <p:txBody>
+          <a:bodyPr xmlns:a="http://schemas.openxmlformats.org/drawingml/2006/main"/>
+          <a:lstStyle xmlns:a="http://schemas.openxmlformats.org/drawingml/2006/main"/>
+          <a:p xmlns:a="http://schemas.openxmlformats.org/drawingml/2006/main">
+            <a:pPr algn="l">
+              <a:defRPr sz="2100" b="1">
+                <a:solidFill>
+                  <a:srgbClr val="16324F"/>
+                </a:solidFill>
+              </a:defRPr>
+            </a:pPr>
+            <a:r>
+              <a:rPr sz="2100" b="1">
+                <a:solidFill>
+                  <a:srgbClr val="16324F"/>
+                </a:solidFill>
+              </a:rPr>
+              <a:t>Bantuan yang sehat</a:t>
+            </a:r>
+          </a:p>
+        </p:txBody>
+      </p:sp>
+      <p:sp>
+        <p:nvSpPr>
+          <p:cNvPr id="7" name="">
+            <a:extLst xmlns:a="http://schemas.openxmlformats.org/drawingml/2006/main">
+              <a:ext uri="{FF2B5EF4-FFF2-40B4-BE49-F238E27FC236}">
+                <a16:creationId xmlns:a16="http://schemas.microsoft.com/office/drawing/2014/main" id="{C2F1F79A-05D5-493B-B68B-EBD191F8FAFF}"/>
+              </a:ext>
+            </a:extLst>
+          </p:cNvPr>
+          <p:cNvSpPr>
+            <a:spLocks xmlns:a="http://schemas.openxmlformats.org/drawingml/2006/main" noGrp="1"/>
+          </p:cNvSpPr>
+          <p:nvPr/>
+        </p:nvSpPr>
+        <p:spPr>
+          <a:xfrm xmlns:a="http://schemas.openxmlformats.org/drawingml/2006/main">
+            <a:off x="1123950" y="2362200"/>
             <a:ext cx="95250" cy="95250"/>
           </a:xfrm>
           <a:prstGeom xmlns:a="http://schemas.openxmlformats.org/drawingml/2006/main" prst="ellipse">
@@ -4212,22 +3783,22 @@
       </p:sp>
       <p:sp>
         <p:nvSpPr>
-          <p:cNvPr id="11" name="">
-            <a:extLst xmlns:a="http://schemas.openxmlformats.org/drawingml/2006/main">
-              <a:ext uri="{FF2B5EF4-FFF2-40B4-BE49-F238E27FC236}">
-                <a16:creationId xmlns:a16="http://schemas.microsoft.com/office/drawing/2014/main" id="{BF093EA4-A823-4A22-8CA2-74268ECEE438}"/>
-              </a:ext>
-            </a:extLst>
-          </p:cNvPr>
-          <p:cNvSpPr>
-            <a:spLocks xmlns:a="http://schemas.openxmlformats.org/drawingml/2006/main" noGrp="1"/>
-          </p:cNvSpPr>
-          <p:nvPr/>
-        </p:nvSpPr>
-        <p:spPr>
-          <a:xfrm xmlns:a="http://schemas.openxmlformats.org/drawingml/2006/main">
-            <a:off x="1371600" y="2324100"/>
-            <a:ext cx="3905250" cy="361950"/>
+          <p:cNvPr id="8" name="">
+            <a:extLst xmlns:a="http://schemas.openxmlformats.org/drawingml/2006/main">
+              <a:ext uri="{FF2B5EF4-FFF2-40B4-BE49-F238E27FC236}">
+                <a16:creationId xmlns:a16="http://schemas.microsoft.com/office/drawing/2014/main" id="{C2935084-CA6C-4F07-9410-224E4C0E3133}"/>
+              </a:ext>
+            </a:extLst>
+          </p:cNvPr>
+          <p:cNvSpPr>
+            <a:spLocks xmlns:a="http://schemas.openxmlformats.org/drawingml/2006/main" noGrp="1"/>
+          </p:cNvSpPr>
+          <p:nvPr/>
+        </p:nvSpPr>
+        <p:spPr>
+          <a:xfrm xmlns:a="http://schemas.openxmlformats.org/drawingml/2006/main">
+            <a:off x="1333500" y="2286000"/>
+            <a:ext cx="3981450" cy="381000"/>
           </a:xfrm>
           <a:prstGeom xmlns:a="http://schemas.openxmlformats.org/drawingml/2006/main" prst="rect">
             <a:avLst/>
@@ -4255,28 +3826,28 @@
                   <a:srgbClr val="1F2933"/>
                 </a:solidFill>
               </a:rPr>
-              <a:t>Membantu mencari ide awal.</a:t>
-            </a:r>
-          </a:p>
-        </p:txBody>
-      </p:sp>
-      <p:sp>
-        <p:nvSpPr>
-          <p:cNvPr id="12" name="">
-            <a:extLst xmlns:a="http://schemas.openxmlformats.org/drawingml/2006/main">
-              <a:ext uri="{FF2B5EF4-FFF2-40B4-BE49-F238E27FC236}">
-                <a16:creationId xmlns:a16="http://schemas.microsoft.com/office/drawing/2014/main" id="{E3C1D9BE-DBB0-49C5-908E-C3448BD4F90A}"/>
-              </a:ext>
-            </a:extLst>
-          </p:cNvPr>
-          <p:cNvSpPr>
-            <a:spLocks xmlns:a="http://schemas.openxmlformats.org/drawingml/2006/main" noGrp="1"/>
-          </p:cNvSpPr>
-          <p:nvPr/>
-        </p:nvSpPr>
-        <p:spPr>
-          <a:xfrm xmlns:a="http://schemas.openxmlformats.org/drawingml/2006/main">
-            <a:off x="1162050" y="2847975"/>
+              <a:t>Menjelaskan konsep dengan bahasa lebih sederhana.</a:t>
+            </a:r>
+          </a:p>
+        </p:txBody>
+      </p:sp>
+      <p:sp>
+        <p:nvSpPr>
+          <p:cNvPr id="9" name="">
+            <a:extLst xmlns:a="http://schemas.openxmlformats.org/drawingml/2006/main">
+              <a:ext uri="{FF2B5EF4-FFF2-40B4-BE49-F238E27FC236}">
+                <a16:creationId xmlns:a16="http://schemas.microsoft.com/office/drawing/2014/main" id="{EC152030-F0A6-4A96-B942-5941FDC6DEE2}"/>
+              </a:ext>
+            </a:extLst>
+          </p:cNvPr>
+          <p:cNvSpPr>
+            <a:spLocks xmlns:a="http://schemas.openxmlformats.org/drawingml/2006/main" noGrp="1"/>
+          </p:cNvSpPr>
+          <p:nvPr/>
+        </p:nvSpPr>
+        <p:spPr>
+          <a:xfrm xmlns:a="http://schemas.openxmlformats.org/drawingml/2006/main">
+            <a:off x="1123950" y="2819400"/>
             <a:ext cx="95250" cy="95250"/>
           </a:xfrm>
           <a:prstGeom xmlns:a="http://schemas.openxmlformats.org/drawingml/2006/main" prst="ellipse">
@@ -4293,22 +3864,22 @@
       </p:sp>
       <p:sp>
         <p:nvSpPr>
-          <p:cNvPr id="13" name="">
-            <a:extLst xmlns:a="http://schemas.openxmlformats.org/drawingml/2006/main">
-              <a:ext uri="{FF2B5EF4-FFF2-40B4-BE49-F238E27FC236}">
-                <a16:creationId xmlns:a16="http://schemas.microsoft.com/office/drawing/2014/main" id="{33157AE5-2A02-4CA7-A223-3920F5BA0D1C}"/>
-              </a:ext>
-            </a:extLst>
-          </p:cNvPr>
-          <p:cNvSpPr>
-            <a:spLocks xmlns:a="http://schemas.openxmlformats.org/drawingml/2006/main" noGrp="1"/>
-          </p:cNvSpPr>
-          <p:nvPr/>
-        </p:nvSpPr>
-        <p:spPr>
-          <a:xfrm xmlns:a="http://schemas.openxmlformats.org/drawingml/2006/main">
-            <a:off x="1371600" y="2762250"/>
-            <a:ext cx="3905250" cy="361950"/>
+          <p:cNvPr id="10" name="">
+            <a:extLst xmlns:a="http://schemas.openxmlformats.org/drawingml/2006/main">
+              <a:ext uri="{FF2B5EF4-FFF2-40B4-BE49-F238E27FC236}">
+                <a16:creationId xmlns:a16="http://schemas.microsoft.com/office/drawing/2014/main" id="{087ECA1D-88E4-43AB-A872-DA1CE5E336E8}"/>
+              </a:ext>
+            </a:extLst>
+          </p:cNvPr>
+          <p:cNvSpPr>
+            <a:spLocks xmlns:a="http://schemas.openxmlformats.org/drawingml/2006/main" noGrp="1"/>
+          </p:cNvSpPr>
+          <p:nvPr/>
+        </p:nvSpPr>
+        <p:spPr>
+          <a:xfrm xmlns:a="http://schemas.openxmlformats.org/drawingml/2006/main">
+            <a:off x="1333500" y="2743200"/>
+            <a:ext cx="3981450" cy="381000"/>
           </a:xfrm>
           <a:prstGeom xmlns:a="http://schemas.openxmlformats.org/drawingml/2006/main" prst="rect">
             <a:avLst/>
@@ -4336,28 +3907,28 @@
                   <a:srgbClr val="1F2933"/>
                 </a:solidFill>
               </a:rPr>
-              <a:t>Membantu merangkum dan menjelaskan materi.</a:t>
-            </a:r>
-          </a:p>
-        </p:txBody>
-      </p:sp>
-      <p:sp>
-        <p:nvSpPr>
-          <p:cNvPr id="14" name="">
-            <a:extLst xmlns:a="http://schemas.openxmlformats.org/drawingml/2006/main">
-              <a:ext uri="{FF2B5EF4-FFF2-40B4-BE49-F238E27FC236}">
-                <a16:creationId xmlns:a16="http://schemas.microsoft.com/office/drawing/2014/main" id="{BFEA13FF-0970-4F8D-921B-124696A4FE97}"/>
-              </a:ext>
-            </a:extLst>
-          </p:cNvPr>
-          <p:cNvSpPr>
-            <a:spLocks xmlns:a="http://schemas.openxmlformats.org/drawingml/2006/main" noGrp="1"/>
-          </p:cNvSpPr>
-          <p:nvPr/>
-        </p:nvSpPr>
-        <p:spPr>
-          <a:xfrm xmlns:a="http://schemas.openxmlformats.org/drawingml/2006/main">
-            <a:off x="1162050" y="3286125"/>
+              <a:t>Merangkum catatan yang sudah dibuat siswa.</a:t>
+            </a:r>
+          </a:p>
+        </p:txBody>
+      </p:sp>
+      <p:sp>
+        <p:nvSpPr>
+          <p:cNvPr id="11" name="">
+            <a:extLst xmlns:a="http://schemas.openxmlformats.org/drawingml/2006/main">
+              <a:ext uri="{FF2B5EF4-FFF2-40B4-BE49-F238E27FC236}">
+                <a16:creationId xmlns:a16="http://schemas.microsoft.com/office/drawing/2014/main" id="{6B72D462-F44E-49DD-987E-A0C000E84485}"/>
+              </a:ext>
+            </a:extLst>
+          </p:cNvPr>
+          <p:cNvSpPr>
+            <a:spLocks xmlns:a="http://schemas.openxmlformats.org/drawingml/2006/main" noGrp="1"/>
+          </p:cNvSpPr>
+          <p:nvPr/>
+        </p:nvSpPr>
+        <p:spPr>
+          <a:xfrm xmlns:a="http://schemas.openxmlformats.org/drawingml/2006/main">
+            <a:off x="1123950" y="3276600"/>
             <a:ext cx="95250" cy="95250"/>
           </a:xfrm>
           <a:prstGeom xmlns:a="http://schemas.openxmlformats.org/drawingml/2006/main" prst="ellipse">
@@ -4374,22 +3945,22 @@
       </p:sp>
       <p:sp>
         <p:nvSpPr>
-          <p:cNvPr id="15" name="">
-            <a:extLst xmlns:a="http://schemas.openxmlformats.org/drawingml/2006/main">
-              <a:ext uri="{FF2B5EF4-FFF2-40B4-BE49-F238E27FC236}">
-                <a16:creationId xmlns:a16="http://schemas.microsoft.com/office/drawing/2014/main" id="{063E42E6-9097-4AA1-9BFA-DF9FAABDEDD2}"/>
-              </a:ext>
-            </a:extLst>
-          </p:cNvPr>
-          <p:cNvSpPr>
-            <a:spLocks xmlns:a="http://schemas.openxmlformats.org/drawingml/2006/main" noGrp="1"/>
-          </p:cNvSpPr>
-          <p:nvPr/>
-        </p:nvSpPr>
-        <p:spPr>
-          <a:xfrm xmlns:a="http://schemas.openxmlformats.org/drawingml/2006/main">
-            <a:off x="1371600" y="3200400"/>
-            <a:ext cx="3905250" cy="361950"/>
+          <p:cNvPr id="12" name="">
+            <a:extLst xmlns:a="http://schemas.openxmlformats.org/drawingml/2006/main">
+              <a:ext uri="{FF2B5EF4-FFF2-40B4-BE49-F238E27FC236}">
+                <a16:creationId xmlns:a16="http://schemas.microsoft.com/office/drawing/2014/main" id="{C493A97B-7C99-4DF0-85E2-206CBAF8A986}"/>
+              </a:ext>
+            </a:extLst>
+          </p:cNvPr>
+          <p:cNvSpPr>
+            <a:spLocks xmlns:a="http://schemas.openxmlformats.org/drawingml/2006/main" noGrp="1"/>
+          </p:cNvSpPr>
+          <p:nvPr/>
+        </p:nvSpPr>
+        <p:spPr>
+          <a:xfrm xmlns:a="http://schemas.openxmlformats.org/drawingml/2006/main">
+            <a:off x="1333500" y="3200400"/>
+            <a:ext cx="3981450" cy="381000"/>
           </a:xfrm>
           <a:prstGeom xmlns:a="http://schemas.openxmlformats.org/drawingml/2006/main" prst="rect">
             <a:avLst/>
@@ -4417,28 +3988,28 @@
                   <a:srgbClr val="1F2933"/>
                 </a:solidFill>
               </a:rPr>
-              <a:t>Membantu membuat draft awal.</a:t>
-            </a:r>
-          </a:p>
-        </p:txBody>
-      </p:sp>
-      <p:sp>
-        <p:nvSpPr>
-          <p:cNvPr id="16" name="">
-            <a:extLst xmlns:a="http://schemas.openxmlformats.org/drawingml/2006/main">
-              <a:ext uri="{FF2B5EF4-FFF2-40B4-BE49-F238E27FC236}">
-                <a16:creationId xmlns:a16="http://schemas.microsoft.com/office/drawing/2014/main" id="{19C8C78A-61C5-489D-B2D6-03041F0660BF}"/>
-              </a:ext>
-            </a:extLst>
-          </p:cNvPr>
-          <p:cNvSpPr>
-            <a:spLocks xmlns:a="http://schemas.openxmlformats.org/drawingml/2006/main" noGrp="1"/>
-          </p:cNvSpPr>
-          <p:nvPr/>
-        </p:nvSpPr>
-        <p:spPr>
-          <a:xfrm xmlns:a="http://schemas.openxmlformats.org/drawingml/2006/main">
-            <a:off x="1162050" y="3724275"/>
+              <a:t>Membuat soal latihan dan kunci jawaban.</a:t>
+            </a:r>
+          </a:p>
+        </p:txBody>
+      </p:sp>
+      <p:sp>
+        <p:nvSpPr>
+          <p:cNvPr id="13" name="">
+            <a:extLst xmlns:a="http://schemas.openxmlformats.org/drawingml/2006/main">
+              <a:ext uri="{FF2B5EF4-FFF2-40B4-BE49-F238E27FC236}">
+                <a16:creationId xmlns:a16="http://schemas.microsoft.com/office/drawing/2014/main" id="{ADC87D37-1D4B-4005-B44E-C0DAA5D4E398}"/>
+              </a:ext>
+            </a:extLst>
+          </p:cNvPr>
+          <p:cNvSpPr>
+            <a:spLocks xmlns:a="http://schemas.openxmlformats.org/drawingml/2006/main" noGrp="1"/>
+          </p:cNvSpPr>
+          <p:nvPr/>
+        </p:nvSpPr>
+        <p:spPr>
+          <a:xfrm xmlns:a="http://schemas.openxmlformats.org/drawingml/2006/main">
+            <a:off x="1123950" y="3733800"/>
             <a:ext cx="95250" cy="95250"/>
           </a:xfrm>
           <a:prstGeom xmlns:a="http://schemas.openxmlformats.org/drawingml/2006/main" prst="ellipse">
@@ -4455,22 +4026,22 @@
       </p:sp>
       <p:sp>
         <p:nvSpPr>
-          <p:cNvPr id="17" name="">
-            <a:extLst xmlns:a="http://schemas.openxmlformats.org/drawingml/2006/main">
-              <a:ext uri="{FF2B5EF4-FFF2-40B4-BE49-F238E27FC236}">
-                <a16:creationId xmlns:a16="http://schemas.microsoft.com/office/drawing/2014/main" id="{CA918A99-93B5-484B-861A-26656D145AD2}"/>
-              </a:ext>
-            </a:extLst>
-          </p:cNvPr>
-          <p:cNvSpPr>
-            <a:spLocks xmlns:a="http://schemas.openxmlformats.org/drawingml/2006/main" noGrp="1"/>
-          </p:cNvSpPr>
-          <p:nvPr/>
-        </p:nvSpPr>
-        <p:spPr>
-          <a:xfrm xmlns:a="http://schemas.openxmlformats.org/drawingml/2006/main">
-            <a:off x="1371600" y="3638550"/>
-            <a:ext cx="3905250" cy="361950"/>
+          <p:cNvPr id="14" name="">
+            <a:extLst xmlns:a="http://schemas.openxmlformats.org/drawingml/2006/main">
+              <a:ext uri="{FF2B5EF4-FFF2-40B4-BE49-F238E27FC236}">
+                <a16:creationId xmlns:a16="http://schemas.microsoft.com/office/drawing/2014/main" id="{20664D38-C7DC-4901-80B9-D05DC6B8C048}"/>
+              </a:ext>
+            </a:extLst>
+          </p:cNvPr>
+          <p:cNvSpPr>
+            <a:spLocks xmlns:a="http://schemas.openxmlformats.org/drawingml/2006/main" noGrp="1"/>
+          </p:cNvSpPr>
+          <p:nvPr/>
+        </p:nvSpPr>
+        <p:spPr>
+          <a:xfrm xmlns:a="http://schemas.openxmlformats.org/drawingml/2006/main">
+            <a:off x="1333500" y="3657600"/>
+            <a:ext cx="3981450" cy="381000"/>
           </a:xfrm>
           <a:prstGeom xmlns:a="http://schemas.openxmlformats.org/drawingml/2006/main" prst="rect">
             <a:avLst/>
@@ -4498,28 +4069,78 @@
                   <a:srgbClr val="1F2933"/>
                 </a:solidFill>
               </a:rPr>
-              <a:t>Mempercepat pekerjaan tertentu.</a:t>
-            </a:r>
-          </a:p>
-        </p:txBody>
-      </p:sp>
-      <p:sp>
-        <p:nvSpPr>
-          <p:cNvPr id="18" name="">
-            <a:extLst xmlns:a="http://schemas.openxmlformats.org/drawingml/2006/main">
-              <a:ext uri="{FF2B5EF4-FFF2-40B4-BE49-F238E27FC236}">
-                <a16:creationId xmlns:a16="http://schemas.microsoft.com/office/drawing/2014/main" id="{1F1BCEE9-1EE4-4162-B4B4-4C043EF5F884}"/>
-              </a:ext>
-            </a:extLst>
-          </p:cNvPr>
-          <p:cNvSpPr>
-            <a:spLocks xmlns:a="http://schemas.openxmlformats.org/drawingml/2006/main" noGrp="1"/>
-          </p:cNvSpPr>
-          <p:nvPr/>
-        </p:nvSpPr>
-        <p:spPr>
-          <a:xfrm xmlns:a="http://schemas.openxmlformats.org/drawingml/2006/main">
-            <a:off x="6153150" y="2409825"/>
+              <a:t>Membantu membuat kerangka presentasi.</a:t>
+            </a:r>
+          </a:p>
+        </p:txBody>
+      </p:sp>
+      <p:sp>
+        <p:nvSpPr>
+          <p:cNvPr id="15" name="">
+            <a:extLst xmlns:a="http://schemas.openxmlformats.org/drawingml/2006/main">
+              <a:ext uri="{FF2B5EF4-FFF2-40B4-BE49-F238E27FC236}">
+                <a16:creationId xmlns:a16="http://schemas.microsoft.com/office/drawing/2014/main" id="{8C7E1EB2-A2BF-4295-B123-DD5D0F4BC4E1}"/>
+              </a:ext>
+            </a:extLst>
+          </p:cNvPr>
+          <p:cNvSpPr>
+            <a:spLocks xmlns:a="http://schemas.openxmlformats.org/drawingml/2006/main" noGrp="1"/>
+          </p:cNvSpPr>
+          <p:nvPr/>
+        </p:nvSpPr>
+        <p:spPr>
+          <a:xfrm xmlns:a="http://schemas.openxmlformats.org/drawingml/2006/main">
+            <a:off x="6381750" y="1809750"/>
+            <a:ext cx="2286000" cy="285750"/>
+          </a:xfrm>
+          <a:prstGeom xmlns:a="http://schemas.openxmlformats.org/drawingml/2006/main" prst="rect">
+            <a:avLst/>
+          </a:prstGeom>
+          <a:noFill xmlns:a="http://schemas.openxmlformats.org/drawingml/2006/main"/>
+          <a:ln xmlns:a="http://schemas.openxmlformats.org/drawingml/2006/main" w="0">
+            <a:noFill/>
+            <a:prstDash val="solid"/>
+          </a:ln>
+        </p:spPr>
+        <p:txBody>
+          <a:bodyPr xmlns:a="http://schemas.openxmlformats.org/drawingml/2006/main"/>
+          <a:lstStyle xmlns:a="http://schemas.openxmlformats.org/drawingml/2006/main"/>
+          <a:p xmlns:a="http://schemas.openxmlformats.org/drawingml/2006/main">
+            <a:pPr algn="l">
+              <a:defRPr sz="2100" b="1">
+                <a:solidFill>
+                  <a:srgbClr val="16324F"/>
+                </a:solidFill>
+              </a:defRPr>
+            </a:pPr>
+            <a:r>
+              <a:rPr sz="2100" b="1">
+                <a:solidFill>
+                  <a:srgbClr val="16324F"/>
+                </a:solidFill>
+              </a:rPr>
+              <a:t>Contoh konkret</a:t>
+            </a:r>
+          </a:p>
+        </p:txBody>
+      </p:sp>
+      <p:sp>
+        <p:nvSpPr>
+          <p:cNvPr id="16" name="">
+            <a:extLst xmlns:a="http://schemas.openxmlformats.org/drawingml/2006/main">
+              <a:ext uri="{FF2B5EF4-FFF2-40B4-BE49-F238E27FC236}">
+                <a16:creationId xmlns:a16="http://schemas.microsoft.com/office/drawing/2014/main" id="{CEA0675B-6D2D-4077-97D9-30C755847DCC}"/>
+              </a:ext>
+            </a:extLst>
+          </p:cNvPr>
+          <p:cNvSpPr>
+            <a:spLocks xmlns:a="http://schemas.openxmlformats.org/drawingml/2006/main" noGrp="1"/>
+          </p:cNvSpPr>
+          <p:nvPr/>
+        </p:nvSpPr>
+        <p:spPr>
+          <a:xfrm xmlns:a="http://schemas.openxmlformats.org/drawingml/2006/main">
+            <a:off x="6381750" y="2362200"/>
             <a:ext cx="95250" cy="95250"/>
           </a:xfrm>
           <a:prstGeom xmlns:a="http://schemas.openxmlformats.org/drawingml/2006/main" prst="ellipse">
@@ -4536,22 +4157,22 @@
       </p:sp>
       <p:sp>
         <p:nvSpPr>
-          <p:cNvPr id="19" name="">
-            <a:extLst xmlns:a="http://schemas.openxmlformats.org/drawingml/2006/main">
-              <a:ext uri="{FF2B5EF4-FFF2-40B4-BE49-F238E27FC236}">
-                <a16:creationId xmlns:a16="http://schemas.microsoft.com/office/drawing/2014/main" id="{6F800241-2FC6-4017-A9A4-D3E68B01BC74}"/>
-              </a:ext>
-            </a:extLst>
-          </p:cNvPr>
-          <p:cNvSpPr>
-            <a:spLocks xmlns:a="http://schemas.openxmlformats.org/drawingml/2006/main" noGrp="1"/>
-          </p:cNvSpPr>
-          <p:nvPr/>
-        </p:nvSpPr>
-        <p:spPr>
-          <a:xfrm xmlns:a="http://schemas.openxmlformats.org/drawingml/2006/main">
-            <a:off x="6362700" y="2324100"/>
-            <a:ext cx="4419600" cy="361950"/>
+          <p:cNvPr id="17" name="">
+            <a:extLst xmlns:a="http://schemas.openxmlformats.org/drawingml/2006/main">
+              <a:ext uri="{FF2B5EF4-FFF2-40B4-BE49-F238E27FC236}">
+                <a16:creationId xmlns:a16="http://schemas.microsoft.com/office/drawing/2014/main" id="{31B5695B-272E-4FD5-A38D-C688D99AD837}"/>
+              </a:ext>
+            </a:extLst>
+          </p:cNvPr>
+          <p:cNvSpPr>
+            <a:spLocks xmlns:a="http://schemas.openxmlformats.org/drawingml/2006/main" noGrp="1"/>
+          </p:cNvSpPr>
+          <p:nvPr/>
+        </p:nvSpPr>
+        <p:spPr>
+          <a:xfrm xmlns:a="http://schemas.openxmlformats.org/drawingml/2006/main">
+            <a:off x="6591300" y="2286000"/>
+            <a:ext cx="4057650" cy="381000"/>
           </a:xfrm>
           <a:prstGeom xmlns:a="http://schemas.openxmlformats.org/drawingml/2006/main" prst="rect">
             <a:avLst/>
@@ -4579,28 +4200,28 @@
                   <a:srgbClr val="1F2933"/>
                 </a:solidFill>
               </a:rPr>
-              <a:t>Jawaban bisa salah tetapi terdengar meyakinkan.</a:t>
-            </a:r>
-          </a:p>
-        </p:txBody>
-      </p:sp>
-      <p:sp>
-        <p:nvSpPr>
-          <p:cNvPr id="20" name="">
-            <a:extLst xmlns:a="http://schemas.openxmlformats.org/drawingml/2006/main">
-              <a:ext uri="{FF2B5EF4-FFF2-40B4-BE49-F238E27FC236}">
-                <a16:creationId xmlns:a16="http://schemas.microsoft.com/office/drawing/2014/main" id="{CFC59A80-CE36-47FE-88FF-5D854D5C3EDB}"/>
-              </a:ext>
-            </a:extLst>
-          </p:cNvPr>
-          <p:cNvSpPr>
-            <a:spLocks xmlns:a="http://schemas.openxmlformats.org/drawingml/2006/main" noGrp="1"/>
-          </p:cNvSpPr>
-          <p:nvPr/>
-        </p:nvSpPr>
-        <p:spPr>
-          <a:xfrm xmlns:a="http://schemas.openxmlformats.org/drawingml/2006/main">
-            <a:off x="6153150" y="2847975"/>
+              <a:t>“Jelaskan fotosintesis untuk siswa kelas X dalam 5 poin.”</a:t>
+            </a:r>
+          </a:p>
+        </p:txBody>
+      </p:sp>
+      <p:sp>
+        <p:nvSpPr>
+          <p:cNvPr id="18" name="">
+            <a:extLst xmlns:a="http://schemas.openxmlformats.org/drawingml/2006/main">
+              <a:ext uri="{FF2B5EF4-FFF2-40B4-BE49-F238E27FC236}">
+                <a16:creationId xmlns:a16="http://schemas.microsoft.com/office/drawing/2014/main" id="{E3616D86-55AC-4116-B04B-7FE1570AAB21}"/>
+              </a:ext>
+            </a:extLst>
+          </p:cNvPr>
+          <p:cNvSpPr>
+            <a:spLocks xmlns:a="http://schemas.openxmlformats.org/drawingml/2006/main" noGrp="1"/>
+          </p:cNvSpPr>
+          <p:nvPr/>
+        </p:nvSpPr>
+        <p:spPr>
+          <a:xfrm xmlns:a="http://schemas.openxmlformats.org/drawingml/2006/main">
+            <a:off x="6381750" y="2819400"/>
             <a:ext cx="95250" cy="95250"/>
           </a:xfrm>
           <a:prstGeom xmlns:a="http://schemas.openxmlformats.org/drawingml/2006/main" prst="ellipse">
@@ -4617,22 +4238,22 @@
       </p:sp>
       <p:sp>
         <p:nvSpPr>
-          <p:cNvPr id="21" name="">
-            <a:extLst xmlns:a="http://schemas.openxmlformats.org/drawingml/2006/main">
-              <a:ext uri="{FF2B5EF4-FFF2-40B4-BE49-F238E27FC236}">
-                <a16:creationId xmlns:a16="http://schemas.microsoft.com/office/drawing/2014/main" id="{4AE105E2-3FCC-42F4-A576-564F01E798E0}"/>
-              </a:ext>
-            </a:extLst>
-          </p:cNvPr>
-          <p:cNvSpPr>
-            <a:spLocks xmlns:a="http://schemas.openxmlformats.org/drawingml/2006/main" noGrp="1"/>
-          </p:cNvSpPr>
-          <p:nvPr/>
-        </p:nvSpPr>
-        <p:spPr>
-          <a:xfrm xmlns:a="http://schemas.openxmlformats.org/drawingml/2006/main">
-            <a:off x="6362700" y="2762250"/>
-            <a:ext cx="4419600" cy="361950"/>
+          <p:cNvPr id="19" name="">
+            <a:extLst xmlns:a="http://schemas.openxmlformats.org/drawingml/2006/main">
+              <a:ext uri="{FF2B5EF4-FFF2-40B4-BE49-F238E27FC236}">
+                <a16:creationId xmlns:a16="http://schemas.microsoft.com/office/drawing/2014/main" id="{3F927F40-D616-4C15-ADF8-59A3C6F9A871}"/>
+              </a:ext>
+            </a:extLst>
+          </p:cNvPr>
+          <p:cNvSpPr>
+            <a:spLocks xmlns:a="http://schemas.openxmlformats.org/drawingml/2006/main" noGrp="1"/>
+          </p:cNvSpPr>
+          <p:nvPr/>
+        </p:nvSpPr>
+        <p:spPr>
+          <a:xfrm xmlns:a="http://schemas.openxmlformats.org/drawingml/2006/main">
+            <a:off x="6591300" y="2743200"/>
+            <a:ext cx="4057650" cy="381000"/>
           </a:xfrm>
           <a:prstGeom xmlns:a="http://schemas.openxmlformats.org/drawingml/2006/main" prst="rect">
             <a:avLst/>
@@ -4660,28 +4281,28 @@
                   <a:srgbClr val="1F2933"/>
                 </a:solidFill>
               </a:rPr>
-              <a:t>Siswa bisa terlalu bergantung dan malas berpikir.</a:t>
-            </a:r>
-          </a:p>
-        </p:txBody>
-      </p:sp>
-      <p:sp>
-        <p:nvSpPr>
-          <p:cNvPr id="22" name="">
-            <a:extLst xmlns:a="http://schemas.openxmlformats.org/drawingml/2006/main">
-              <a:ext uri="{FF2B5EF4-FFF2-40B4-BE49-F238E27FC236}">
-                <a16:creationId xmlns:a16="http://schemas.microsoft.com/office/drawing/2014/main" id="{39548373-89F5-43C0-B819-F558E47F312F}"/>
-              </a:ext>
-            </a:extLst>
-          </p:cNvPr>
-          <p:cNvSpPr>
-            <a:spLocks xmlns:a="http://schemas.openxmlformats.org/drawingml/2006/main" noGrp="1"/>
-          </p:cNvSpPr>
-          <p:nvPr/>
-        </p:nvSpPr>
-        <p:spPr>
-          <a:xfrm xmlns:a="http://schemas.openxmlformats.org/drawingml/2006/main">
-            <a:off x="6153150" y="3286125"/>
+              <a:t>“Buat 5 soal latihan dari materi Revolusi Industri 4.0.”</a:t>
+            </a:r>
+          </a:p>
+        </p:txBody>
+      </p:sp>
+      <p:sp>
+        <p:nvSpPr>
+          <p:cNvPr id="20" name="">
+            <a:extLst xmlns:a="http://schemas.openxmlformats.org/drawingml/2006/main">
+              <a:ext uri="{FF2B5EF4-FFF2-40B4-BE49-F238E27FC236}">
+                <a16:creationId xmlns:a16="http://schemas.microsoft.com/office/drawing/2014/main" id="{4E7489CE-A1CA-45BC-B7B6-3F636D61493E}"/>
+              </a:ext>
+            </a:extLst>
+          </p:cNvPr>
+          <p:cNvSpPr>
+            <a:spLocks xmlns:a="http://schemas.openxmlformats.org/drawingml/2006/main" noGrp="1"/>
+          </p:cNvSpPr>
+          <p:nvPr/>
+        </p:nvSpPr>
+        <p:spPr>
+          <a:xfrm xmlns:a="http://schemas.openxmlformats.org/drawingml/2006/main">
+            <a:off x="6381750" y="3276600"/>
             <a:ext cx="95250" cy="95250"/>
           </a:xfrm>
           <a:prstGeom xmlns:a="http://schemas.openxmlformats.org/drawingml/2006/main" prst="ellipse">
@@ -4698,22 +4319,22 @@
       </p:sp>
       <p:sp>
         <p:nvSpPr>
-          <p:cNvPr id="23" name="">
-            <a:extLst xmlns:a="http://schemas.openxmlformats.org/drawingml/2006/main">
-              <a:ext uri="{FF2B5EF4-FFF2-40B4-BE49-F238E27FC236}">
-                <a16:creationId xmlns:a16="http://schemas.microsoft.com/office/drawing/2014/main" id="{BC21ADFD-1FF5-4B2A-AB6D-0B7A492D5A2D}"/>
-              </a:ext>
-            </a:extLst>
-          </p:cNvPr>
-          <p:cNvSpPr>
-            <a:spLocks xmlns:a="http://schemas.openxmlformats.org/drawingml/2006/main" noGrp="1"/>
-          </p:cNvSpPr>
-          <p:nvPr/>
-        </p:nvSpPr>
-        <p:spPr>
-          <a:xfrm xmlns:a="http://schemas.openxmlformats.org/drawingml/2006/main">
-            <a:off x="6362700" y="3200400"/>
-            <a:ext cx="4419600" cy="361950"/>
+          <p:cNvPr id="21" name="">
+            <a:extLst xmlns:a="http://schemas.openxmlformats.org/drawingml/2006/main">
+              <a:ext uri="{FF2B5EF4-FFF2-40B4-BE49-F238E27FC236}">
+                <a16:creationId xmlns:a16="http://schemas.microsoft.com/office/drawing/2014/main" id="{A68F958D-62C8-47B6-A815-F23BCEEBE2F1}"/>
+              </a:ext>
+            </a:extLst>
+          </p:cNvPr>
+          <p:cNvSpPr>
+            <a:spLocks xmlns:a="http://schemas.openxmlformats.org/drawingml/2006/main" noGrp="1"/>
+          </p:cNvSpPr>
+          <p:nvPr/>
+        </p:nvSpPr>
+        <p:spPr>
+          <a:xfrm xmlns:a="http://schemas.openxmlformats.org/drawingml/2006/main">
+            <a:off x="6591300" y="3200400"/>
+            <a:ext cx="4057650" cy="381000"/>
           </a:xfrm>
           <a:prstGeom xmlns:a="http://schemas.openxmlformats.org/drawingml/2006/main" prst="rect">
             <a:avLst/>
@@ -4741,28 +4362,28 @@
                   <a:srgbClr val="1F2933"/>
                 </a:solidFill>
               </a:rPr>
-              <a:t>Ada risiko plagiarisme jika menyalin mentah-mentah.</a:t>
-            </a:r>
-          </a:p>
-        </p:txBody>
-      </p:sp>
-      <p:sp>
-        <p:nvSpPr>
-          <p:cNvPr id="24" name="">
-            <a:extLst xmlns:a="http://schemas.openxmlformats.org/drawingml/2006/main">
-              <a:ext uri="{FF2B5EF4-FFF2-40B4-BE49-F238E27FC236}">
-                <a16:creationId xmlns:a16="http://schemas.microsoft.com/office/drawing/2014/main" id="{427C19B0-92D1-4A1F-B566-3A786F4B80EC}"/>
-              </a:ext>
-            </a:extLst>
-          </p:cNvPr>
-          <p:cNvSpPr>
-            <a:spLocks xmlns:a="http://schemas.openxmlformats.org/drawingml/2006/main" noGrp="1"/>
-          </p:cNvSpPr>
-          <p:nvPr/>
-        </p:nvSpPr>
-        <p:spPr>
-          <a:xfrm xmlns:a="http://schemas.openxmlformats.org/drawingml/2006/main">
-            <a:off x="6153150" y="3724275"/>
+              <a:t>“Rapikan outline presentasi saya jadi 3 slide utama.”</a:t>
+            </a:r>
+          </a:p>
+        </p:txBody>
+      </p:sp>
+      <p:sp>
+        <p:nvSpPr>
+          <p:cNvPr id="22" name="">
+            <a:extLst xmlns:a="http://schemas.openxmlformats.org/drawingml/2006/main">
+              <a:ext uri="{FF2B5EF4-FFF2-40B4-BE49-F238E27FC236}">
+                <a16:creationId xmlns:a16="http://schemas.microsoft.com/office/drawing/2014/main" id="{42727DCC-D0E0-4840-85D8-9EDF8DDCC79D}"/>
+              </a:ext>
+            </a:extLst>
+          </p:cNvPr>
+          <p:cNvSpPr>
+            <a:spLocks xmlns:a="http://schemas.openxmlformats.org/drawingml/2006/main" noGrp="1"/>
+          </p:cNvSpPr>
+          <p:nvPr/>
+        </p:nvSpPr>
+        <p:spPr>
+          <a:xfrm xmlns:a="http://schemas.openxmlformats.org/drawingml/2006/main">
+            <a:off x="6381750" y="3733800"/>
             <a:ext cx="95250" cy="95250"/>
           </a:xfrm>
           <a:prstGeom xmlns:a="http://schemas.openxmlformats.org/drawingml/2006/main" prst="ellipse">
@@ -4779,22 +4400,22 @@
       </p:sp>
       <p:sp>
         <p:nvSpPr>
-          <p:cNvPr id="25" name="">
-            <a:extLst xmlns:a="http://schemas.openxmlformats.org/drawingml/2006/main">
-              <a:ext uri="{FF2B5EF4-FFF2-40B4-BE49-F238E27FC236}">
-                <a16:creationId xmlns:a16="http://schemas.microsoft.com/office/drawing/2014/main" id="{6F347E08-B1AA-4F67-9BCC-C0AE19094871}"/>
-              </a:ext>
-            </a:extLst>
-          </p:cNvPr>
-          <p:cNvSpPr>
-            <a:spLocks xmlns:a="http://schemas.openxmlformats.org/drawingml/2006/main" noGrp="1"/>
-          </p:cNvSpPr>
-          <p:nvPr/>
-        </p:nvSpPr>
-        <p:spPr>
-          <a:xfrm xmlns:a="http://schemas.openxmlformats.org/drawingml/2006/main">
-            <a:off x="6362700" y="3638550"/>
-            <a:ext cx="4419600" cy="361950"/>
+          <p:cNvPr id="23" name="">
+            <a:extLst xmlns:a="http://schemas.openxmlformats.org/drawingml/2006/main">
+              <a:ext uri="{FF2B5EF4-FFF2-40B4-BE49-F238E27FC236}">
+                <a16:creationId xmlns:a16="http://schemas.microsoft.com/office/drawing/2014/main" id="{975EA05B-777F-49AF-8467-6081535C2132}"/>
+              </a:ext>
+            </a:extLst>
+          </p:cNvPr>
+          <p:cNvSpPr>
+            <a:spLocks xmlns:a="http://schemas.openxmlformats.org/drawingml/2006/main" noGrp="1"/>
+          </p:cNvSpPr>
+          <p:nvPr/>
+        </p:nvSpPr>
+        <p:spPr>
+          <a:xfrm xmlns:a="http://schemas.openxmlformats.org/drawingml/2006/main">
+            <a:off x="6591300" y="3657600"/>
+            <a:ext cx="4057650" cy="381000"/>
           </a:xfrm>
           <a:prstGeom xmlns:a="http://schemas.openxmlformats.org/drawingml/2006/main" prst="rect">
             <a:avLst/>
@@ -4822,29 +4443,29 @@
                   <a:srgbClr val="1F2933"/>
                 </a:solidFill>
               </a:rPr>
-              <a:t>Data pribadi bisa tidak aman jika dibagikan sembarangan.</a:t>
-            </a:r>
-          </a:p>
-        </p:txBody>
-      </p:sp>
-      <p:sp>
-        <p:nvSpPr>
-          <p:cNvPr id="26" name="">
-            <a:extLst xmlns:a="http://schemas.openxmlformats.org/drawingml/2006/main">
-              <a:ext uri="{FF2B5EF4-FFF2-40B4-BE49-F238E27FC236}">
-                <a16:creationId xmlns:a16="http://schemas.microsoft.com/office/drawing/2014/main" id="{BD3DA348-982A-46CC-97CC-7EED36A18906}"/>
-              </a:ext>
-            </a:extLst>
-          </p:cNvPr>
-          <p:cNvSpPr>
-            <a:spLocks xmlns:a="http://schemas.openxmlformats.org/drawingml/2006/main" noGrp="1"/>
-          </p:cNvSpPr>
-          <p:nvPr/>
-        </p:nvSpPr>
-        <p:spPr>
-          <a:xfrm xmlns:a="http://schemas.openxmlformats.org/drawingml/2006/main">
-            <a:off x="1047750" y="5200650"/>
-            <a:ext cx="9982200" cy="571500"/>
+              <a:t>“Tolong cek apakah paragraf saya sudah jelas dan runtut.”</a:t>
+            </a:r>
+          </a:p>
+        </p:txBody>
+      </p:sp>
+      <p:sp>
+        <p:nvSpPr>
+          <p:cNvPr id="24" name="">
+            <a:extLst xmlns:a="http://schemas.openxmlformats.org/drawingml/2006/main">
+              <a:ext uri="{FF2B5EF4-FFF2-40B4-BE49-F238E27FC236}">
+                <a16:creationId xmlns:a16="http://schemas.microsoft.com/office/drawing/2014/main" id="{2E36E7BF-E276-4871-9435-57C917676170}"/>
+              </a:ext>
+            </a:extLst>
+          </p:cNvPr>
+          <p:cNvSpPr>
+            <a:spLocks xmlns:a="http://schemas.openxmlformats.org/drawingml/2006/main" noGrp="1"/>
+          </p:cNvSpPr>
+          <p:nvPr/>
+        </p:nvSpPr>
+        <p:spPr>
+          <a:xfrm xmlns:a="http://schemas.openxmlformats.org/drawingml/2006/main">
+            <a:off x="1009650" y="5657850"/>
+            <a:ext cx="9982200" cy="266700"/>
           </a:xfrm>
           <a:prstGeom xmlns:a="http://schemas.openxmlformats.org/drawingml/2006/main" prst="rect">
             <a:avLst/>
@@ -4872,17 +4493,17 @@
                   <a:srgbClr val="16324F"/>
                 </a:solidFill>
               </a:rPr>
-              <a:t>Kesimpulan slide ini: Gen-AI berguna jika dipakai untuk membantu belajar, tetapi berbahaya jika dipakai tanpa kejujuran dan pemeriksaan ulang.</a:t>
-            </a:r>
-          </a:p>
-        </p:txBody>
-      </p:sp>
-      <p:sp>
-        <p:nvSpPr>
-          <p:cNvPr id="27" name="">
-            <a:extLst xmlns:a="http://schemas.openxmlformats.org/drawingml/2006/main">
-              <a:ext uri="{FF2B5EF4-FFF2-40B4-BE49-F238E27FC236}">
-                <a16:creationId xmlns:a16="http://schemas.microsoft.com/office/drawing/2014/main" id="{6271B152-9F5E-42FE-ACC5-E77E7EB48A47}"/>
+              <a:t>Ukuran sederhananya: AI membantu proses belajar, bukan menggantikan proses berpikir.</a:t>
+            </a:r>
+          </a:p>
+        </p:txBody>
+      </p:sp>
+      <p:sp>
+        <p:nvSpPr>
+          <p:cNvPr id="25" name="">
+            <a:extLst xmlns:a="http://schemas.openxmlformats.org/drawingml/2006/main">
+              <a:ext uri="{FF2B5EF4-FFF2-40B4-BE49-F238E27FC236}">
+                <a16:creationId xmlns:a16="http://schemas.microsoft.com/office/drawing/2014/main" id="{C8D680DE-CE44-4920-BBEF-90634C045814}"/>
               </a:ext>
             </a:extLst>
           </p:cNvPr>
@@ -4910,10 +4531,10 @@
       </p:sp>
       <p:sp>
         <p:nvSpPr>
-          <p:cNvPr id="28" name="">
-            <a:extLst xmlns:a="http://schemas.openxmlformats.org/drawingml/2006/main">
-              <a:ext uri="{FF2B5EF4-FFF2-40B4-BE49-F238E27FC236}">
-                <a16:creationId xmlns:a16="http://schemas.microsoft.com/office/drawing/2014/main" id="{8C1A42F2-8359-4D77-9BF4-938EC56D957C}"/>
+          <p:cNvPr id="26" name="">
+            <a:extLst xmlns:a="http://schemas.openxmlformats.org/drawingml/2006/main">
+              <a:ext uri="{FF2B5EF4-FFF2-40B4-BE49-F238E27FC236}">
+                <a16:creationId xmlns:a16="http://schemas.microsoft.com/office/drawing/2014/main" id="{7023227A-E1AC-4E1A-B41A-339BC1B24668}"/>
               </a:ext>
             </a:extLst>
           </p:cNvPr>
@@ -4960,10 +4581,10 @@
       </p:sp>
       <p:sp>
         <p:nvSpPr>
-          <p:cNvPr id="29" name="">
-            <a:extLst xmlns:a="http://schemas.openxmlformats.org/drawingml/2006/main">
-              <a:ext uri="{FF2B5EF4-FFF2-40B4-BE49-F238E27FC236}">
-                <a16:creationId xmlns:a16="http://schemas.microsoft.com/office/drawing/2014/main" id="{C2EB29E4-6D18-4465-8E61-4F82FC7DA968}"/>
+          <p:cNvPr id="27" name="">
+            <a:extLst xmlns:a="http://schemas.openxmlformats.org/drawingml/2006/main">
+              <a:ext uri="{FF2B5EF4-FFF2-40B4-BE49-F238E27FC236}">
+                <a16:creationId xmlns:a16="http://schemas.microsoft.com/office/drawing/2014/main" id="{225DD74B-3244-4C54-B862-092199890D89}"/>
               </a:ext>
             </a:extLst>
           </p:cNvPr>
@@ -5011,7 +4632,7 @@
     </p:spTree>
     <p:extLst>
       <p:ext uri="{BB962C8B-B14F-4D97-AF65-F5344CB8AC3E}">
-        <p14:creationId xmlns:p14="http://schemas.microsoft.com/office/powerpoint/2010/main" val="637137692"/>
+        <p14:creationId xmlns:p14="http://schemas.microsoft.com/office/powerpoint/2010/main" val="551318987"/>
       </p:ext>
     </p:extLst>
   </p:cSld>
@@ -5039,14 +4660,14 @@
       </p:grpSpPr>
       <p:pic>
         <p:nvPicPr>
-          <p:cNvPr id="19" name=""/>
+          <p:cNvPr id="22" name=""/>
           <p:cNvPicPr>
             <a:picLocks xmlns:a="http://schemas.openxmlformats.org/drawingml/2006/main" noChangeAspect="1"/>
           </p:cNvPicPr>
           <p:nvPr/>
         </p:nvPicPr>
         <p:blipFill>
-          <a:blip xmlns:r="http://schemas.openxmlformats.org/officeDocument/2006/relationships" xmlns:a="http://schemas.openxmlformats.org/drawingml/2006/main" r:embed="R9b9bc73e3578437d"/>
+          <a:blip xmlns:r="http://schemas.openxmlformats.org/officeDocument/2006/relationships" xmlns:a="http://schemas.openxmlformats.org/drawingml/2006/main" r:embed="R76acb4c24cc24397"/>
           <a:stretch xmlns:a="http://schemas.openxmlformats.org/drawingml/2006/main"/>
         </p:blipFill>
         <p:spPr>
@@ -5064,7 +4685,7 @@
           <p:cNvPr id="2" name="">
             <a:extLst xmlns:a="http://schemas.openxmlformats.org/drawingml/2006/main">
               <a:ext uri="{FF2B5EF4-FFF2-40B4-BE49-F238E27FC236}">
-                <a16:creationId xmlns:a16="http://schemas.microsoft.com/office/drawing/2014/main" id="{A97CB4E6-7C7F-4A4F-B307-F9DCAF1C0D51}"/>
+                <a16:creationId xmlns:a16="http://schemas.microsoft.com/office/drawing/2014/main" id="{24089B3B-E515-4CF4-BFF3-D2E8BFC03808}"/>
               </a:ext>
             </a:extLst>
           </p:cNvPr>
@@ -5076,7 +4697,7 @@
         <p:spPr>
           <a:xfrm xmlns:a="http://schemas.openxmlformats.org/drawingml/2006/main">
             <a:off x="723900" y="666750"/>
-            <a:ext cx="10744200" cy="533400"/>
+            <a:ext cx="9334500" cy="533400"/>
           </a:xfrm>
           <a:prstGeom xmlns:a="http://schemas.openxmlformats.org/drawingml/2006/main" prst="rect">
             <a:avLst/>
@@ -5095,7 +4716,7 @@
           <p:cNvPr id="3" name="">
             <a:extLst xmlns:a="http://schemas.openxmlformats.org/drawingml/2006/main">
               <a:ext uri="{FF2B5EF4-FFF2-40B4-BE49-F238E27FC236}">
-                <a16:creationId xmlns:a16="http://schemas.microsoft.com/office/drawing/2014/main" id="{16E87CD9-947D-48EA-8DEF-02F026350F6D}"/>
+                <a16:creationId xmlns:a16="http://schemas.microsoft.com/office/drawing/2014/main" id="{7A6E4CC8-ECD6-4809-9B94-8D18D4CC3232}"/>
               </a:ext>
             </a:extLst>
           </p:cNvPr>
@@ -5107,7 +4728,7 @@
         <p:spPr>
           <a:xfrm xmlns:a="http://schemas.openxmlformats.org/drawingml/2006/main">
             <a:off x="895350" y="762000"/>
-            <a:ext cx="7239000" cy="323850"/>
+            <a:ext cx="8191500" cy="323850"/>
           </a:xfrm>
           <a:prstGeom xmlns:a="http://schemas.openxmlformats.org/drawingml/2006/main" prst="rect">
             <a:avLst/>
@@ -5135,7 +4756,7 @@
                   <a:srgbClr val="FFFFFF"/>
                 </a:solidFill>
               </a:rPr>
-              <a:t>Cara Memakai Gen-AI dengan Bijak</a:t>
+              <a:t>Strategi Prompting</a:t>
             </a:r>
           </a:p>
         </p:txBody>
@@ -5145,18 +4766,68 @@
           <p:cNvPr id="4" name="">
             <a:extLst xmlns:a="http://schemas.openxmlformats.org/drawingml/2006/main">
               <a:ext uri="{FF2B5EF4-FFF2-40B4-BE49-F238E27FC236}">
-                <a16:creationId xmlns:a16="http://schemas.microsoft.com/office/drawing/2014/main" id="{AD6B6FBE-8744-47B4-B595-8D7D9FB1D767}"/>
-              </a:ext>
-            </a:extLst>
-          </p:cNvPr>
-          <p:cNvSpPr>
-            <a:spLocks xmlns:a="http://schemas.openxmlformats.org/drawingml/2006/main" noGrp="1"/>
-          </p:cNvSpPr>
-          <p:nvPr/>
-        </p:nvSpPr>
-        <p:spPr>
-          <a:xfrm xmlns:a="http://schemas.openxmlformats.org/drawingml/2006/main">
-            <a:off x="1009650" y="1704975"/>
+                <a16:creationId xmlns:a16="http://schemas.microsoft.com/office/drawing/2014/main" id="{82E1AB3D-7AA8-4689-B7AA-F9A353DF84A1}"/>
+              </a:ext>
+            </a:extLst>
+          </p:cNvPr>
+          <p:cNvSpPr>
+            <a:spLocks xmlns:a="http://schemas.openxmlformats.org/drawingml/2006/main" noGrp="1"/>
+          </p:cNvSpPr>
+          <p:nvPr/>
+        </p:nvSpPr>
+        <p:spPr>
+          <a:xfrm xmlns:a="http://schemas.openxmlformats.org/drawingml/2006/main">
+            <a:off x="933450" y="1524000"/>
+            <a:ext cx="4000500" cy="323850"/>
+          </a:xfrm>
+          <a:prstGeom xmlns:a="http://schemas.openxmlformats.org/drawingml/2006/main" prst="rect">
+            <a:avLst/>
+          </a:prstGeom>
+          <a:noFill xmlns:a="http://schemas.openxmlformats.org/drawingml/2006/main"/>
+          <a:ln xmlns:a="http://schemas.openxmlformats.org/drawingml/2006/main" w="0">
+            <a:noFill/>
+            <a:prstDash val="solid"/>
+          </a:ln>
+        </p:spPr>
+        <p:txBody>
+          <a:bodyPr xmlns:a="http://schemas.openxmlformats.org/drawingml/2006/main"/>
+          <a:lstStyle xmlns:a="http://schemas.openxmlformats.org/drawingml/2006/main"/>
+          <a:p xmlns:a="http://schemas.openxmlformats.org/drawingml/2006/main">
+            <a:pPr algn="l">
+              <a:defRPr sz="2100" b="1">
+                <a:solidFill>
+                  <a:srgbClr val="16324F"/>
+                </a:solidFill>
+              </a:defRPr>
+            </a:pPr>
+            <a:r>
+              <a:rPr sz="2100" b="1">
+                <a:solidFill>
+                  <a:srgbClr val="16324F"/>
+                </a:solidFill>
+              </a:rPr>
+              <a:t>Prompt yang baik biasanya punya 4 unsur:</a:t>
+            </a:r>
+          </a:p>
+        </p:txBody>
+      </p:sp>
+      <p:sp>
+        <p:nvSpPr>
+          <p:cNvPr id="5" name="">
+            <a:extLst xmlns:a="http://schemas.openxmlformats.org/drawingml/2006/main">
+              <a:ext uri="{FF2B5EF4-FFF2-40B4-BE49-F238E27FC236}">
+                <a16:creationId xmlns:a16="http://schemas.microsoft.com/office/drawing/2014/main" id="{C3B331C4-F754-4DD3-B56D-8F32371F1272}"/>
+              </a:ext>
+            </a:extLst>
+          </p:cNvPr>
+          <p:cNvSpPr>
+            <a:spLocks xmlns:a="http://schemas.openxmlformats.org/drawingml/2006/main" noGrp="1"/>
+          </p:cNvSpPr>
+          <p:nvPr/>
+        </p:nvSpPr>
+        <p:spPr>
+          <a:xfrm xmlns:a="http://schemas.openxmlformats.org/drawingml/2006/main">
+            <a:off x="971550" y="2305050"/>
             <a:ext cx="95250" cy="95250"/>
           </a:xfrm>
           <a:prstGeom xmlns:a="http://schemas.openxmlformats.org/drawingml/2006/main" prst="ellipse">
@@ -5173,22 +4844,22 @@
       </p:sp>
       <p:sp>
         <p:nvSpPr>
-          <p:cNvPr id="5" name="">
-            <a:extLst xmlns:a="http://schemas.openxmlformats.org/drawingml/2006/main">
-              <a:ext uri="{FF2B5EF4-FFF2-40B4-BE49-F238E27FC236}">
-                <a16:creationId xmlns:a16="http://schemas.microsoft.com/office/drawing/2014/main" id="{8602260E-D84D-4DEE-BE03-445710632909}"/>
-              </a:ext>
-            </a:extLst>
-          </p:cNvPr>
-          <p:cNvSpPr>
-            <a:spLocks xmlns:a="http://schemas.openxmlformats.org/drawingml/2006/main" noGrp="1"/>
-          </p:cNvSpPr>
-          <p:nvPr/>
-        </p:nvSpPr>
-        <p:spPr>
-          <a:xfrm xmlns:a="http://schemas.openxmlformats.org/drawingml/2006/main">
-            <a:off x="1219200" y="1619250"/>
-            <a:ext cx="9505950" cy="416242"/>
+          <p:cNvPr id="6" name="">
+            <a:extLst xmlns:a="http://schemas.openxmlformats.org/drawingml/2006/main">
+              <a:ext uri="{FF2B5EF4-FFF2-40B4-BE49-F238E27FC236}">
+                <a16:creationId xmlns:a16="http://schemas.microsoft.com/office/drawing/2014/main" id="{84102376-4975-49D3-94BB-F1242F22D5D9}"/>
+              </a:ext>
+            </a:extLst>
+          </p:cNvPr>
+          <p:cNvSpPr>
+            <a:spLocks xmlns:a="http://schemas.openxmlformats.org/drawingml/2006/main" noGrp="1"/>
+          </p:cNvSpPr>
+          <p:nvPr/>
+        </p:nvSpPr>
+        <p:spPr>
+          <a:xfrm xmlns:a="http://schemas.openxmlformats.org/drawingml/2006/main">
+            <a:off x="1181100" y="2228850"/>
+            <a:ext cx="4362450" cy="361950"/>
           </a:xfrm>
           <a:prstGeom xmlns:a="http://schemas.openxmlformats.org/drawingml/2006/main" prst="rect">
             <a:avLst/>
@@ -5204,40 +4875,40 @@
           <a:lstStyle xmlns:a="http://schemas.openxmlformats.org/drawingml/2006/main"/>
           <a:p xmlns:a="http://schemas.openxmlformats.org/drawingml/2006/main">
             <a:pPr algn="l">
-              <a:defRPr sz="1725" b="0">
+              <a:defRPr sz="1425" b="0">
                 <a:solidFill>
                   <a:srgbClr val="1F2933"/>
                 </a:solidFill>
               </a:defRPr>
             </a:pPr>
             <a:r>
-              <a:rPr sz="1725" b="0">
+              <a:rPr sz="1425" b="0">
                 <a:solidFill>
                   <a:srgbClr val="1F2933"/>
                 </a:solidFill>
               </a:rPr>
-              <a:t>Gunakan untuk membantu memahami, bukan untuk mencontek mentah-mentah.</a:t>
-            </a:r>
-          </a:p>
-        </p:txBody>
-      </p:sp>
-      <p:sp>
-        <p:nvSpPr>
-          <p:cNvPr id="6" name="">
-            <a:extLst xmlns:a="http://schemas.openxmlformats.org/drawingml/2006/main">
-              <a:ext uri="{FF2B5EF4-FFF2-40B4-BE49-F238E27FC236}">
-                <a16:creationId xmlns:a16="http://schemas.microsoft.com/office/drawing/2014/main" id="{6795A5F3-EC72-4B03-ADB7-521B6AEE34E7}"/>
-              </a:ext>
-            </a:extLst>
-          </p:cNvPr>
-          <p:cNvSpPr>
-            <a:spLocks xmlns:a="http://schemas.openxmlformats.org/drawingml/2006/main" noGrp="1"/>
-          </p:cNvSpPr>
-          <p:nvPr/>
-        </p:nvSpPr>
-        <p:spPr>
-          <a:xfrm xmlns:a="http://schemas.openxmlformats.org/drawingml/2006/main">
-            <a:off x="1009650" y="2235518"/>
+              <a:t>Tujuan: saya ingin AI membantu untuk apa?</a:t>
+            </a:r>
+          </a:p>
+        </p:txBody>
+      </p:sp>
+      <p:sp>
+        <p:nvSpPr>
+          <p:cNvPr id="7" name="">
+            <a:extLst xmlns:a="http://schemas.openxmlformats.org/drawingml/2006/main">
+              <a:ext uri="{FF2B5EF4-FFF2-40B4-BE49-F238E27FC236}">
+                <a16:creationId xmlns:a16="http://schemas.microsoft.com/office/drawing/2014/main" id="{2B341EC3-7D4C-455A-8386-95836D8BD650}"/>
+              </a:ext>
+            </a:extLst>
+          </p:cNvPr>
+          <p:cNvSpPr>
+            <a:spLocks xmlns:a="http://schemas.openxmlformats.org/drawingml/2006/main" noGrp="1"/>
+          </p:cNvSpPr>
+          <p:nvPr/>
+        </p:nvSpPr>
+        <p:spPr>
+          <a:xfrm xmlns:a="http://schemas.openxmlformats.org/drawingml/2006/main">
+            <a:off x="971550" y="2743200"/>
             <a:ext cx="95250" cy="95250"/>
           </a:xfrm>
           <a:prstGeom xmlns:a="http://schemas.openxmlformats.org/drawingml/2006/main" prst="ellipse">
@@ -5254,22 +4925,22 @@
       </p:sp>
       <p:sp>
         <p:nvSpPr>
-          <p:cNvPr id="7" name="">
-            <a:extLst xmlns:a="http://schemas.openxmlformats.org/drawingml/2006/main">
-              <a:ext uri="{FF2B5EF4-FFF2-40B4-BE49-F238E27FC236}">
-                <a16:creationId xmlns:a16="http://schemas.microsoft.com/office/drawing/2014/main" id="{BF258FA5-1514-487A-984C-7FC678005A2B}"/>
-              </a:ext>
-            </a:extLst>
-          </p:cNvPr>
-          <p:cNvSpPr>
-            <a:spLocks xmlns:a="http://schemas.openxmlformats.org/drawingml/2006/main" noGrp="1"/>
-          </p:cNvSpPr>
-          <p:nvPr/>
-        </p:nvSpPr>
-        <p:spPr>
-          <a:xfrm xmlns:a="http://schemas.openxmlformats.org/drawingml/2006/main">
-            <a:off x="1219200" y="2149793"/>
-            <a:ext cx="9505950" cy="416242"/>
+          <p:cNvPr id="8" name="">
+            <a:extLst xmlns:a="http://schemas.openxmlformats.org/drawingml/2006/main">
+              <a:ext uri="{FF2B5EF4-FFF2-40B4-BE49-F238E27FC236}">
+                <a16:creationId xmlns:a16="http://schemas.microsoft.com/office/drawing/2014/main" id="{B941BD24-8314-43FD-8540-EB70CC6E8A1C}"/>
+              </a:ext>
+            </a:extLst>
+          </p:cNvPr>
+          <p:cNvSpPr>
+            <a:spLocks xmlns:a="http://schemas.openxmlformats.org/drawingml/2006/main" noGrp="1"/>
+          </p:cNvSpPr>
+          <p:nvPr/>
+        </p:nvSpPr>
+        <p:spPr>
+          <a:xfrm xmlns:a="http://schemas.openxmlformats.org/drawingml/2006/main">
+            <a:off x="1181100" y="2667000"/>
+            <a:ext cx="4362450" cy="361950"/>
           </a:xfrm>
           <a:prstGeom xmlns:a="http://schemas.openxmlformats.org/drawingml/2006/main" prst="rect">
             <a:avLst/>
@@ -5285,40 +4956,40 @@
           <a:lstStyle xmlns:a="http://schemas.openxmlformats.org/drawingml/2006/main"/>
           <a:p xmlns:a="http://schemas.openxmlformats.org/drawingml/2006/main">
             <a:pPr algn="l">
-              <a:defRPr sz="1725" b="0">
+              <a:defRPr sz="1425" b="0">
                 <a:solidFill>
                   <a:srgbClr val="1F2933"/>
                 </a:solidFill>
               </a:defRPr>
             </a:pPr>
             <a:r>
-              <a:rPr sz="1725" b="0">
+              <a:rPr sz="1425" b="0">
                 <a:solidFill>
                   <a:srgbClr val="1F2933"/>
                 </a:solidFill>
               </a:rPr>
-              <a:t>Selalu cek ulang fakta penting dari buku, guru, atau sumber tepercaya.</a:t>
-            </a:r>
-          </a:p>
-        </p:txBody>
-      </p:sp>
-      <p:sp>
-        <p:nvSpPr>
-          <p:cNvPr id="8" name="">
-            <a:extLst xmlns:a="http://schemas.openxmlformats.org/drawingml/2006/main">
-              <a:ext uri="{FF2B5EF4-FFF2-40B4-BE49-F238E27FC236}">
-                <a16:creationId xmlns:a16="http://schemas.microsoft.com/office/drawing/2014/main" id="{BCCC3294-4C45-4BCC-AACF-EF7F95C9916C}"/>
-              </a:ext>
-            </a:extLst>
-          </p:cNvPr>
-          <p:cNvSpPr>
-            <a:spLocks xmlns:a="http://schemas.openxmlformats.org/drawingml/2006/main" noGrp="1"/>
-          </p:cNvSpPr>
-          <p:nvPr/>
-        </p:nvSpPr>
-        <p:spPr>
-          <a:xfrm xmlns:a="http://schemas.openxmlformats.org/drawingml/2006/main">
-            <a:off x="1009650" y="2766060"/>
+              <a:t>Konteks: topiknya apa, level siswa berapa?</a:t>
+            </a:r>
+          </a:p>
+        </p:txBody>
+      </p:sp>
+      <p:sp>
+        <p:nvSpPr>
+          <p:cNvPr id="9" name="">
+            <a:extLst xmlns:a="http://schemas.openxmlformats.org/drawingml/2006/main">
+              <a:ext uri="{FF2B5EF4-FFF2-40B4-BE49-F238E27FC236}">
+                <a16:creationId xmlns:a16="http://schemas.microsoft.com/office/drawing/2014/main" id="{6D23A304-F8AC-429A-B7A6-9EE6C923C39E}"/>
+              </a:ext>
+            </a:extLst>
+          </p:cNvPr>
+          <p:cNvSpPr>
+            <a:spLocks xmlns:a="http://schemas.openxmlformats.org/drawingml/2006/main" noGrp="1"/>
+          </p:cNvSpPr>
+          <p:nvPr/>
+        </p:nvSpPr>
+        <p:spPr>
+          <a:xfrm xmlns:a="http://schemas.openxmlformats.org/drawingml/2006/main">
+            <a:off x="971550" y="3181350"/>
             <a:ext cx="95250" cy="95250"/>
           </a:xfrm>
           <a:prstGeom xmlns:a="http://schemas.openxmlformats.org/drawingml/2006/main" prst="ellipse">
@@ -5335,22 +5006,22 @@
       </p:sp>
       <p:sp>
         <p:nvSpPr>
-          <p:cNvPr id="9" name="">
-            <a:extLst xmlns:a="http://schemas.openxmlformats.org/drawingml/2006/main">
-              <a:ext uri="{FF2B5EF4-FFF2-40B4-BE49-F238E27FC236}">
-                <a16:creationId xmlns:a16="http://schemas.microsoft.com/office/drawing/2014/main" id="{7F668DA0-8604-414E-98D9-22F7887F4F4B}"/>
-              </a:ext>
-            </a:extLst>
-          </p:cNvPr>
-          <p:cNvSpPr>
-            <a:spLocks xmlns:a="http://schemas.openxmlformats.org/drawingml/2006/main" noGrp="1"/>
-          </p:cNvSpPr>
-          <p:nvPr/>
-        </p:nvSpPr>
-        <p:spPr>
-          <a:xfrm xmlns:a="http://schemas.openxmlformats.org/drawingml/2006/main">
-            <a:off x="1219200" y="2680335"/>
-            <a:ext cx="9505950" cy="416242"/>
+          <p:cNvPr id="10" name="">
+            <a:extLst xmlns:a="http://schemas.openxmlformats.org/drawingml/2006/main">
+              <a:ext uri="{FF2B5EF4-FFF2-40B4-BE49-F238E27FC236}">
+                <a16:creationId xmlns:a16="http://schemas.microsoft.com/office/drawing/2014/main" id="{FE77A60A-538B-443F-B537-2A8A6BE4D175}"/>
+              </a:ext>
+            </a:extLst>
+          </p:cNvPr>
+          <p:cNvSpPr>
+            <a:spLocks xmlns:a="http://schemas.openxmlformats.org/drawingml/2006/main" noGrp="1"/>
+          </p:cNvSpPr>
+          <p:nvPr/>
+        </p:nvSpPr>
+        <p:spPr>
+          <a:xfrm xmlns:a="http://schemas.openxmlformats.org/drawingml/2006/main">
+            <a:off x="1181100" y="3105150"/>
+            <a:ext cx="4362450" cy="361950"/>
           </a:xfrm>
           <a:prstGeom xmlns:a="http://schemas.openxmlformats.org/drawingml/2006/main" prst="rect">
             <a:avLst/>
@@ -5366,40 +5037,40 @@
           <a:lstStyle xmlns:a="http://schemas.openxmlformats.org/drawingml/2006/main"/>
           <a:p xmlns:a="http://schemas.openxmlformats.org/drawingml/2006/main">
             <a:pPr algn="l">
-              <a:defRPr sz="1725" b="0">
+              <a:defRPr sz="1425" b="0">
                 <a:solidFill>
                   <a:srgbClr val="1F2933"/>
                 </a:solidFill>
               </a:defRPr>
             </a:pPr>
             <a:r>
-              <a:rPr sz="1725" b="0">
+              <a:rPr sz="1425" b="0">
                 <a:solidFill>
                   <a:srgbClr val="1F2933"/>
                 </a:solidFill>
               </a:rPr>
-              <a:t>Jangan masukkan data pribadi, kata sandi, atau informasi sensitif.</a:t>
-            </a:r>
-          </a:p>
-        </p:txBody>
-      </p:sp>
-      <p:sp>
-        <p:nvSpPr>
-          <p:cNvPr id="10" name="">
-            <a:extLst xmlns:a="http://schemas.openxmlformats.org/drawingml/2006/main">
-              <a:ext uri="{FF2B5EF4-FFF2-40B4-BE49-F238E27FC236}">
-                <a16:creationId xmlns:a16="http://schemas.microsoft.com/office/drawing/2014/main" id="{36BC6645-ECE4-4224-8C51-6E7AE2589BA6}"/>
-              </a:ext>
-            </a:extLst>
-          </p:cNvPr>
-          <p:cNvSpPr>
-            <a:spLocks xmlns:a="http://schemas.openxmlformats.org/drawingml/2006/main" noGrp="1"/>
-          </p:cNvSpPr>
-          <p:nvPr/>
-        </p:nvSpPr>
-        <p:spPr>
-          <a:xfrm xmlns:a="http://schemas.openxmlformats.org/drawingml/2006/main">
-            <a:off x="1009650" y="3296602"/>
+              <a:t>Format: saya ingin poin, tabel, atau contoh soal?</a:t>
+            </a:r>
+          </a:p>
+        </p:txBody>
+      </p:sp>
+      <p:sp>
+        <p:nvSpPr>
+          <p:cNvPr id="11" name="">
+            <a:extLst xmlns:a="http://schemas.openxmlformats.org/drawingml/2006/main">
+              <a:ext uri="{FF2B5EF4-FFF2-40B4-BE49-F238E27FC236}">
+                <a16:creationId xmlns:a16="http://schemas.microsoft.com/office/drawing/2014/main" id="{63B0805B-F9CA-460F-AE72-32088E23FEAC}"/>
+              </a:ext>
+            </a:extLst>
+          </p:cNvPr>
+          <p:cNvSpPr>
+            <a:spLocks xmlns:a="http://schemas.openxmlformats.org/drawingml/2006/main" noGrp="1"/>
+          </p:cNvSpPr>
+          <p:nvPr/>
+        </p:nvSpPr>
+        <p:spPr>
+          <a:xfrm xmlns:a="http://schemas.openxmlformats.org/drawingml/2006/main">
+            <a:off x="971550" y="3619500"/>
             <a:ext cx="95250" cy="95250"/>
           </a:xfrm>
           <a:prstGeom xmlns:a="http://schemas.openxmlformats.org/drawingml/2006/main" prst="ellipse">
@@ -5416,22 +5087,22 @@
       </p:sp>
       <p:sp>
         <p:nvSpPr>
-          <p:cNvPr id="11" name="">
-            <a:extLst xmlns:a="http://schemas.openxmlformats.org/drawingml/2006/main">
-              <a:ext uri="{FF2B5EF4-FFF2-40B4-BE49-F238E27FC236}">
-                <a16:creationId xmlns:a16="http://schemas.microsoft.com/office/drawing/2014/main" id="{D6D03743-0DEA-4519-8E5A-FB42D25BB3EE}"/>
-              </a:ext>
-            </a:extLst>
-          </p:cNvPr>
-          <p:cNvSpPr>
-            <a:spLocks xmlns:a="http://schemas.openxmlformats.org/drawingml/2006/main" noGrp="1"/>
-          </p:cNvSpPr>
-          <p:nvPr/>
-        </p:nvSpPr>
-        <p:spPr>
-          <a:xfrm xmlns:a="http://schemas.openxmlformats.org/drawingml/2006/main">
-            <a:off x="1219200" y="3210877"/>
-            <a:ext cx="9505950" cy="416242"/>
+          <p:cNvPr id="12" name="">
+            <a:extLst xmlns:a="http://schemas.openxmlformats.org/drawingml/2006/main">
+              <a:ext uri="{FF2B5EF4-FFF2-40B4-BE49-F238E27FC236}">
+                <a16:creationId xmlns:a16="http://schemas.microsoft.com/office/drawing/2014/main" id="{3B8CA3B6-E9FD-4962-B5D9-5FA9D1DE5A8F}"/>
+              </a:ext>
+            </a:extLst>
+          </p:cNvPr>
+          <p:cNvSpPr>
+            <a:spLocks xmlns:a="http://schemas.openxmlformats.org/drawingml/2006/main" noGrp="1"/>
+          </p:cNvSpPr>
+          <p:nvPr/>
+        </p:nvSpPr>
+        <p:spPr>
+          <a:xfrm xmlns:a="http://schemas.openxmlformats.org/drawingml/2006/main">
+            <a:off x="1181100" y="3543300"/>
+            <a:ext cx="4362450" cy="361950"/>
           </a:xfrm>
           <a:prstGeom xmlns:a="http://schemas.openxmlformats.org/drawingml/2006/main" prst="rect">
             <a:avLst/>
@@ -5447,122 +5118,41 @@
           <a:lstStyle xmlns:a="http://schemas.openxmlformats.org/drawingml/2006/main"/>
           <a:p xmlns:a="http://schemas.openxmlformats.org/drawingml/2006/main">
             <a:pPr algn="l">
-              <a:defRPr sz="1725" b="0">
+              <a:defRPr sz="1425" b="0">
                 <a:solidFill>
                   <a:srgbClr val="1F2933"/>
                 </a:solidFill>
               </a:defRPr>
             </a:pPr>
             <a:r>
-              <a:rPr sz="1725" b="0">
+              <a:rPr sz="1425" b="0">
                 <a:solidFill>
                   <a:srgbClr val="1F2933"/>
                 </a:solidFill>
               </a:rPr>
-              <a:t>Kalau memakai hasil AI untuk tugas, olah kembali dengan pemahaman dan bahasa kalian sendiri.</a:t>
-            </a:r>
-          </a:p>
-        </p:txBody>
-      </p:sp>
-      <p:sp>
-        <p:nvSpPr>
-          <p:cNvPr id="12" name="">
-            <a:extLst xmlns:a="http://schemas.openxmlformats.org/drawingml/2006/main">
-              <a:ext uri="{FF2B5EF4-FFF2-40B4-BE49-F238E27FC236}">
-                <a16:creationId xmlns:a16="http://schemas.microsoft.com/office/drawing/2014/main" id="{DA4ABDBC-8922-4C7B-95B4-BBB232783A4C}"/>
-              </a:ext>
-            </a:extLst>
-          </p:cNvPr>
-          <p:cNvSpPr>
-            <a:spLocks xmlns:a="http://schemas.openxmlformats.org/drawingml/2006/main" noGrp="1"/>
-          </p:cNvSpPr>
-          <p:nvPr/>
-        </p:nvSpPr>
-        <p:spPr>
-          <a:xfrm xmlns:a="http://schemas.openxmlformats.org/drawingml/2006/main">
-            <a:off x="1009650" y="3827145"/>
-            <a:ext cx="95250" cy="95250"/>
-          </a:xfrm>
-          <a:prstGeom xmlns:a="http://schemas.openxmlformats.org/drawingml/2006/main" prst="ellipse">
-            <a:avLst/>
-          </a:prstGeom>
-          <a:solidFill xmlns:a="http://schemas.openxmlformats.org/drawingml/2006/main">
-            <a:srgbClr val="16324F"/>
-          </a:solidFill>
-          <a:ln xmlns:a="http://schemas.openxmlformats.org/drawingml/2006/main" w="0">
-            <a:noFill/>
-            <a:prstDash val="solid"/>
-          </a:ln>
-        </p:spPr>
+              <a:t>Revisi: kalau hasil belum pas, minta diperbaiki lagi.</a:t>
+            </a:r>
+          </a:p>
+        </p:txBody>
       </p:sp>
       <p:sp>
         <p:nvSpPr>
           <p:cNvPr id="13" name="">
             <a:extLst xmlns:a="http://schemas.openxmlformats.org/drawingml/2006/main">
               <a:ext uri="{FF2B5EF4-FFF2-40B4-BE49-F238E27FC236}">
-                <a16:creationId xmlns:a16="http://schemas.microsoft.com/office/drawing/2014/main" id="{FA59F467-6C3E-431F-AF66-63B25564A6A3}"/>
-              </a:ext>
-            </a:extLst>
-          </p:cNvPr>
-          <p:cNvSpPr>
-            <a:spLocks xmlns:a="http://schemas.openxmlformats.org/drawingml/2006/main" noGrp="1"/>
-          </p:cNvSpPr>
-          <p:nvPr/>
-        </p:nvSpPr>
-        <p:spPr>
-          <a:xfrm xmlns:a="http://schemas.openxmlformats.org/drawingml/2006/main">
-            <a:off x="1219200" y="3741420"/>
-            <a:ext cx="9505950" cy="416242"/>
-          </a:xfrm>
-          <a:prstGeom xmlns:a="http://schemas.openxmlformats.org/drawingml/2006/main" prst="rect">
-            <a:avLst/>
-          </a:prstGeom>
-          <a:noFill xmlns:a="http://schemas.openxmlformats.org/drawingml/2006/main"/>
-          <a:ln xmlns:a="http://schemas.openxmlformats.org/drawingml/2006/main" w="0">
-            <a:noFill/>
-            <a:prstDash val="solid"/>
-          </a:ln>
-        </p:spPr>
-        <p:txBody>
-          <a:bodyPr xmlns:a="http://schemas.openxmlformats.org/drawingml/2006/main"/>
-          <a:lstStyle xmlns:a="http://schemas.openxmlformats.org/drawingml/2006/main"/>
-          <a:p xmlns:a="http://schemas.openxmlformats.org/drawingml/2006/main">
-            <a:pPr algn="l">
-              <a:defRPr sz="1725" b="0">
-                <a:solidFill>
-                  <a:srgbClr val="1F2933"/>
-                </a:solidFill>
-              </a:defRPr>
-            </a:pPr>
-            <a:r>
-              <a:rPr sz="1725" b="0">
-                <a:solidFill>
-                  <a:srgbClr val="1F2933"/>
-                </a:solidFill>
-              </a:rPr>
-              <a:t>Anggap AI sebagai alat diskusi awal, bukan pengganti nalar dan kejujuran.</a:t>
-            </a:r>
-          </a:p>
-        </p:txBody>
-      </p:sp>
-      <p:sp>
-        <p:nvSpPr>
-          <p:cNvPr id="14" name="">
-            <a:extLst xmlns:a="http://schemas.openxmlformats.org/drawingml/2006/main">
-              <a:ext uri="{FF2B5EF4-FFF2-40B4-BE49-F238E27FC236}">
-                <a16:creationId xmlns:a16="http://schemas.microsoft.com/office/drawing/2014/main" id="{69426E7F-43AE-4621-8CC5-FDD8C9F4DCC2}"/>
-              </a:ext>
-            </a:extLst>
-          </p:cNvPr>
-          <p:cNvSpPr>
-            <a:spLocks xmlns:a="http://schemas.openxmlformats.org/drawingml/2006/main" noGrp="1"/>
-          </p:cNvSpPr>
-          <p:nvPr/>
-        </p:nvSpPr>
-        <p:spPr>
-          <a:xfrm xmlns:a="http://schemas.openxmlformats.org/drawingml/2006/main">
-            <a:off x="1257300" y="5105400"/>
-            <a:ext cx="9620250" cy="800100"/>
+                <a16:creationId xmlns:a16="http://schemas.microsoft.com/office/drawing/2014/main" id="{27756389-EB1C-4C3D-A1EC-16840DEB512E}"/>
+              </a:ext>
+            </a:extLst>
+          </p:cNvPr>
+          <p:cNvSpPr>
+            <a:spLocks xmlns:a="http://schemas.openxmlformats.org/drawingml/2006/main" noGrp="1"/>
+          </p:cNvSpPr>
+          <p:nvPr/>
+        </p:nvSpPr>
+        <p:spPr>
+          <a:xfrm xmlns:a="http://schemas.openxmlformats.org/drawingml/2006/main">
+            <a:off x="6134100" y="1562100"/>
+            <a:ext cx="5067300" cy="2152650"/>
           </a:xfrm>
           <a:prstGeom xmlns:a="http://schemas.openxmlformats.org/drawingml/2006/main" prst="rect">
             <a:avLst/>
@@ -5578,22 +5168,72 @@
       </p:sp>
       <p:sp>
         <p:nvSpPr>
+          <p:cNvPr id="14" name="">
+            <a:extLst xmlns:a="http://schemas.openxmlformats.org/drawingml/2006/main">
+              <a:ext uri="{FF2B5EF4-FFF2-40B4-BE49-F238E27FC236}">
+                <a16:creationId xmlns:a16="http://schemas.microsoft.com/office/drawing/2014/main" id="{5744CF9C-3B87-43F4-98F9-C08707039EFB}"/>
+              </a:ext>
+            </a:extLst>
+          </p:cNvPr>
+          <p:cNvSpPr>
+            <a:spLocks xmlns:a="http://schemas.openxmlformats.org/drawingml/2006/main" noGrp="1"/>
+          </p:cNvSpPr>
+          <p:nvPr/>
+        </p:nvSpPr>
+        <p:spPr>
+          <a:xfrm xmlns:a="http://schemas.openxmlformats.org/drawingml/2006/main">
+            <a:off x="6381750" y="1790700"/>
+            <a:ext cx="2095500" cy="247650"/>
+          </a:xfrm>
+          <a:prstGeom xmlns:a="http://schemas.openxmlformats.org/drawingml/2006/main" prst="rect">
+            <a:avLst/>
+          </a:prstGeom>
+          <a:noFill xmlns:a="http://schemas.openxmlformats.org/drawingml/2006/main"/>
+          <a:ln xmlns:a="http://schemas.openxmlformats.org/drawingml/2006/main" w="0">
+            <a:noFill/>
+            <a:prstDash val="solid"/>
+          </a:ln>
+        </p:spPr>
+        <p:txBody>
+          <a:bodyPr xmlns:a="http://schemas.openxmlformats.org/drawingml/2006/main"/>
+          <a:lstStyle xmlns:a="http://schemas.openxmlformats.org/drawingml/2006/main"/>
+          <a:p xmlns:a="http://schemas.openxmlformats.org/drawingml/2006/main">
+            <a:pPr algn="l">
+              <a:defRPr sz="1650" b="1">
+                <a:solidFill>
+                  <a:srgbClr val="16324F"/>
+                </a:solidFill>
+              </a:defRPr>
+            </a:pPr>
+            <a:r>
+              <a:rPr sz="1650" b="1">
+                <a:solidFill>
+                  <a:srgbClr val="16324F"/>
+                </a:solidFill>
+              </a:rPr>
+              <a:t>Prompt lebih baik</a:t>
+            </a:r>
+          </a:p>
+        </p:txBody>
+      </p:sp>
+      <p:sp>
+        <p:nvSpPr>
           <p:cNvPr id="15" name="">
             <a:extLst xmlns:a="http://schemas.openxmlformats.org/drawingml/2006/main">
               <a:ext uri="{FF2B5EF4-FFF2-40B4-BE49-F238E27FC236}">
-                <a16:creationId xmlns:a16="http://schemas.microsoft.com/office/drawing/2014/main" id="{E73D56EB-E5C7-4E93-922C-5CEDCCD27558}"/>
-              </a:ext>
-            </a:extLst>
-          </p:cNvPr>
-          <p:cNvSpPr>
-            <a:spLocks xmlns:a="http://schemas.openxmlformats.org/drawingml/2006/main" noGrp="1"/>
-          </p:cNvSpPr>
-          <p:nvPr/>
-        </p:nvSpPr>
-        <p:spPr>
-          <a:xfrm xmlns:a="http://schemas.openxmlformats.org/drawingml/2006/main">
-            <a:off x="1562100" y="5334000"/>
-            <a:ext cx="9048750" cy="323850"/>
+                <a16:creationId xmlns:a16="http://schemas.microsoft.com/office/drawing/2014/main" id="{7DC5CF82-F653-4183-AE51-275BE9ACE37B}"/>
+              </a:ext>
+            </a:extLst>
+          </p:cNvPr>
+          <p:cNvSpPr>
+            <a:spLocks xmlns:a="http://schemas.openxmlformats.org/drawingml/2006/main" noGrp="1"/>
+          </p:cNvSpPr>
+          <p:nvPr/>
+        </p:nvSpPr>
+        <p:spPr>
+          <a:xfrm xmlns:a="http://schemas.openxmlformats.org/drawingml/2006/main">
+            <a:off x="6381750" y="2247900"/>
+            <a:ext cx="4381500" cy="895350"/>
           </a:xfrm>
           <a:prstGeom xmlns:a="http://schemas.openxmlformats.org/drawingml/2006/main" prst="rect">
             <a:avLst/>
@@ -5608,30 +5248,163 @@
           <a:bodyPr xmlns:a="http://schemas.openxmlformats.org/drawingml/2006/main"/>
           <a:lstStyle xmlns:a="http://schemas.openxmlformats.org/drawingml/2006/main"/>
           <a:p xmlns:a="http://schemas.openxmlformats.org/drawingml/2006/main">
-            <a:pPr algn="ctr">
-              <a:defRPr sz="1800" b="1">
+            <a:pPr algn="l">
+              <a:defRPr sz="1350" b="0">
+                <a:solidFill>
+                  <a:srgbClr val="1F2933"/>
+                </a:solidFill>
+              </a:defRPr>
+            </a:pPr>
+            <a:r>
+              <a:rPr sz="1350" b="0">
+                <a:solidFill>
+                  <a:srgbClr val="1F2933"/>
+                </a:solidFill>
+              </a:rPr>
+              <a:t>“Jelaskan fotosintesis untuk siswa kelas X dalam 5 poin singkat, lalu buat 3 pertanyaan latihan beserta jawabannya.”</a:t>
+            </a:r>
+          </a:p>
+        </p:txBody>
+      </p:sp>
+      <p:sp>
+        <p:nvSpPr>
+          <p:cNvPr id="16" name="">
+            <a:extLst xmlns:a="http://schemas.openxmlformats.org/drawingml/2006/main">
+              <a:ext uri="{FF2B5EF4-FFF2-40B4-BE49-F238E27FC236}">
+                <a16:creationId xmlns:a16="http://schemas.microsoft.com/office/drawing/2014/main" id="{7C331E45-3896-4BA4-8C78-6D564FACDB75}"/>
+              </a:ext>
+            </a:extLst>
+          </p:cNvPr>
+          <p:cNvSpPr>
+            <a:spLocks xmlns:a="http://schemas.openxmlformats.org/drawingml/2006/main" noGrp="1"/>
+          </p:cNvSpPr>
+          <p:nvPr/>
+        </p:nvSpPr>
+        <p:spPr>
+          <a:xfrm xmlns:a="http://schemas.openxmlformats.org/drawingml/2006/main">
+            <a:off x="6134100" y="3867150"/>
+            <a:ext cx="5067300" cy="1428750"/>
+          </a:xfrm>
+          <a:prstGeom xmlns:a="http://schemas.openxmlformats.org/drawingml/2006/main" prst="rect">
+            <a:avLst/>
+          </a:prstGeom>
+          <a:solidFill xmlns:a="http://schemas.openxmlformats.org/drawingml/2006/main">
+            <a:srgbClr val="FFFFFF"/>
+          </a:solidFill>
+          <a:ln xmlns:a="http://schemas.openxmlformats.org/drawingml/2006/main" w="9525">
+            <a:solidFill>
+              <a:srgbClr val="C8D6E2"/>
+            </a:solidFill>
+            <a:prstDash val="solid"/>
+          </a:ln>
+        </p:spPr>
+      </p:sp>
+      <p:sp>
+        <p:nvSpPr>
+          <p:cNvPr id="17" name="">
+            <a:extLst xmlns:a="http://schemas.openxmlformats.org/drawingml/2006/main">
+              <a:ext uri="{FF2B5EF4-FFF2-40B4-BE49-F238E27FC236}">
+                <a16:creationId xmlns:a16="http://schemas.microsoft.com/office/drawing/2014/main" id="{B943CE8A-3D48-4E80-B9D1-EBE93937E541}"/>
+              </a:ext>
+            </a:extLst>
+          </p:cNvPr>
+          <p:cNvSpPr>
+            <a:spLocks xmlns:a="http://schemas.openxmlformats.org/drawingml/2006/main" noGrp="1"/>
+          </p:cNvSpPr>
+          <p:nvPr/>
+        </p:nvSpPr>
+        <p:spPr>
+          <a:xfrm xmlns:a="http://schemas.openxmlformats.org/drawingml/2006/main">
+            <a:off x="6381750" y="4095750"/>
+            <a:ext cx="2286000" cy="247650"/>
+          </a:xfrm>
+          <a:prstGeom xmlns:a="http://schemas.openxmlformats.org/drawingml/2006/main" prst="rect">
+            <a:avLst/>
+          </a:prstGeom>
+          <a:noFill xmlns:a="http://schemas.openxmlformats.org/drawingml/2006/main"/>
+          <a:ln xmlns:a="http://schemas.openxmlformats.org/drawingml/2006/main" w="0">
+            <a:noFill/>
+            <a:prstDash val="solid"/>
+          </a:ln>
+        </p:spPr>
+        <p:txBody>
+          <a:bodyPr xmlns:a="http://schemas.openxmlformats.org/drawingml/2006/main"/>
+          <a:lstStyle xmlns:a="http://schemas.openxmlformats.org/drawingml/2006/main"/>
+          <a:p xmlns:a="http://schemas.openxmlformats.org/drawingml/2006/main">
+            <a:pPr algn="l">
+              <a:defRPr sz="1650" b="1">
                 <a:solidFill>
                   <a:srgbClr val="16324F"/>
                 </a:solidFill>
               </a:defRPr>
             </a:pPr>
             <a:r>
-              <a:rPr sz="1800" b="1">
+              <a:rPr sz="1650" b="1">
                 <a:solidFill>
                   <a:srgbClr val="16324F"/>
                 </a:solidFill>
               </a:rPr>
-              <a:t>Sikap yang paling penting adalah jujur. Teknologi boleh membantu, tetapi pemahaman tetap harus tumbuh dari kalian sendiri.</a:t>
-            </a:r>
-          </a:p>
-        </p:txBody>
-      </p:sp>
-      <p:sp>
-        <p:nvSpPr>
-          <p:cNvPr id="16" name="">
-            <a:extLst xmlns:a="http://schemas.openxmlformats.org/drawingml/2006/main">
-              <a:ext uri="{FF2B5EF4-FFF2-40B4-BE49-F238E27FC236}">
-                <a16:creationId xmlns:a16="http://schemas.microsoft.com/office/drawing/2014/main" id="{644DC3EA-3AC7-4388-B298-CEB17DC56867}"/>
+              <a:t>Prompt kurang efektif</a:t>
+            </a:r>
+          </a:p>
+        </p:txBody>
+      </p:sp>
+      <p:sp>
+        <p:nvSpPr>
+          <p:cNvPr id="18" name="">
+            <a:extLst xmlns:a="http://schemas.openxmlformats.org/drawingml/2006/main">
+              <a:ext uri="{FF2B5EF4-FFF2-40B4-BE49-F238E27FC236}">
+                <a16:creationId xmlns:a16="http://schemas.microsoft.com/office/drawing/2014/main" id="{26586E5C-F8D2-4315-AF9F-838A52371FE5}"/>
+              </a:ext>
+            </a:extLst>
+          </p:cNvPr>
+          <p:cNvSpPr>
+            <a:spLocks xmlns:a="http://schemas.openxmlformats.org/drawingml/2006/main" noGrp="1"/>
+          </p:cNvSpPr>
+          <p:nvPr/>
+        </p:nvSpPr>
+        <p:spPr>
+          <a:xfrm xmlns:a="http://schemas.openxmlformats.org/drawingml/2006/main">
+            <a:off x="6381750" y="4552950"/>
+            <a:ext cx="2857500" cy="285750"/>
+          </a:xfrm>
+          <a:prstGeom xmlns:a="http://schemas.openxmlformats.org/drawingml/2006/main" prst="rect">
+            <a:avLst/>
+          </a:prstGeom>
+          <a:noFill xmlns:a="http://schemas.openxmlformats.org/drawingml/2006/main"/>
+          <a:ln xmlns:a="http://schemas.openxmlformats.org/drawingml/2006/main" w="0">
+            <a:noFill/>
+            <a:prstDash val="solid"/>
+          </a:ln>
+        </p:spPr>
+        <p:txBody>
+          <a:bodyPr xmlns:a="http://schemas.openxmlformats.org/drawingml/2006/main"/>
+          <a:lstStyle xmlns:a="http://schemas.openxmlformats.org/drawingml/2006/main"/>
+          <a:p xmlns:a="http://schemas.openxmlformats.org/drawingml/2006/main">
+            <a:pPr algn="l">
+              <a:defRPr sz="1350" b="0">
+                <a:solidFill>
+                  <a:srgbClr val="1F2933"/>
+                </a:solidFill>
+              </a:defRPr>
+            </a:pPr>
+            <a:r>
+              <a:rPr sz="1350" b="0">
+                <a:solidFill>
+                  <a:srgbClr val="1F2933"/>
+                </a:solidFill>
+              </a:rPr>
+              <a:t>“Jelaskan fotosintesis.”</a:t>
+            </a:r>
+          </a:p>
+        </p:txBody>
+      </p:sp>
+      <p:sp>
+        <p:nvSpPr>
+          <p:cNvPr id="19" name="">
+            <a:extLst xmlns:a="http://schemas.openxmlformats.org/drawingml/2006/main">
+              <a:ext uri="{FF2B5EF4-FFF2-40B4-BE49-F238E27FC236}">
+                <a16:creationId xmlns:a16="http://schemas.microsoft.com/office/drawing/2014/main" id="{8903070D-73AB-4A7C-AA7A-7508505662A8}"/>
               </a:ext>
             </a:extLst>
           </p:cNvPr>
@@ -5659,10 +5432,10 @@
       </p:sp>
       <p:sp>
         <p:nvSpPr>
-          <p:cNvPr id="17" name="">
-            <a:extLst xmlns:a="http://schemas.openxmlformats.org/drawingml/2006/main">
-              <a:ext uri="{FF2B5EF4-FFF2-40B4-BE49-F238E27FC236}">
-                <a16:creationId xmlns:a16="http://schemas.microsoft.com/office/drawing/2014/main" id="{6CB9BC6A-353F-4C46-989A-64971F76FBE7}"/>
+          <p:cNvPr id="20" name="">
+            <a:extLst xmlns:a="http://schemas.openxmlformats.org/drawingml/2006/main">
+              <a:ext uri="{FF2B5EF4-FFF2-40B4-BE49-F238E27FC236}">
+                <a16:creationId xmlns:a16="http://schemas.microsoft.com/office/drawing/2014/main" id="{C143BBA9-EF1D-4D93-BCA9-B05DFF24F3E6}"/>
               </a:ext>
             </a:extLst>
           </p:cNvPr>
@@ -5709,10 +5482,10 @@
       </p:sp>
       <p:sp>
         <p:nvSpPr>
-          <p:cNvPr id="18" name="">
-            <a:extLst xmlns:a="http://schemas.openxmlformats.org/drawingml/2006/main">
-              <a:ext uri="{FF2B5EF4-FFF2-40B4-BE49-F238E27FC236}">
-                <a16:creationId xmlns:a16="http://schemas.microsoft.com/office/drawing/2014/main" id="{2551CB51-3685-4BE4-9CAD-0D829CECC0BC}"/>
+          <p:cNvPr id="21" name="">
+            <a:extLst xmlns:a="http://schemas.openxmlformats.org/drawingml/2006/main">
+              <a:ext uri="{FF2B5EF4-FFF2-40B4-BE49-F238E27FC236}">
+                <a16:creationId xmlns:a16="http://schemas.microsoft.com/office/drawing/2014/main" id="{1D138BEB-F220-4286-8D63-1E49D5789205}"/>
               </a:ext>
             </a:extLst>
           </p:cNvPr>
@@ -5760,7 +5533,7 @@
     </p:spTree>
     <p:extLst>
       <p:ext uri="{BB962C8B-B14F-4D97-AF65-F5344CB8AC3E}">
-        <p14:creationId xmlns:p14="http://schemas.microsoft.com/office/powerpoint/2010/main" val="917384543"/>
+        <p14:creationId xmlns:p14="http://schemas.microsoft.com/office/powerpoint/2010/main" val="1986011313"/>
       </p:ext>
     </p:extLst>
   </p:cSld>
@@ -5788,14 +5561,14 @@
       </p:grpSpPr>
       <p:pic>
         <p:nvPicPr>
-          <p:cNvPr id="23" name=""/>
+          <p:cNvPr id="29" name=""/>
           <p:cNvPicPr>
             <a:picLocks xmlns:a="http://schemas.openxmlformats.org/drawingml/2006/main" noChangeAspect="1"/>
           </p:cNvPicPr>
           <p:nvPr/>
         </p:nvPicPr>
         <p:blipFill>
-          <a:blip xmlns:r="http://schemas.openxmlformats.org/officeDocument/2006/relationships" xmlns:a="http://schemas.openxmlformats.org/drawingml/2006/main" r:embed="R80c5a70c4ed048fb"/>
+          <a:blip xmlns:r="http://schemas.openxmlformats.org/officeDocument/2006/relationships" xmlns:a="http://schemas.openxmlformats.org/drawingml/2006/main" r:embed="Rc6e64e7625514553"/>
           <a:stretch xmlns:a="http://schemas.openxmlformats.org/drawingml/2006/main"/>
         </p:blipFill>
         <p:spPr>
@@ -5813,7 +5586,7 @@
           <p:cNvPr id="2" name="">
             <a:extLst xmlns:a="http://schemas.openxmlformats.org/drawingml/2006/main">
               <a:ext uri="{FF2B5EF4-FFF2-40B4-BE49-F238E27FC236}">
-                <a16:creationId xmlns:a16="http://schemas.microsoft.com/office/drawing/2014/main" id="{EBF29F8E-0F51-4872-B33F-91F1A6CDA7FE}"/>
+                <a16:creationId xmlns:a16="http://schemas.microsoft.com/office/drawing/2014/main" id="{9EC8620C-6E43-4868-A80D-A2EE3F9A1599}"/>
               </a:ext>
             </a:extLst>
           </p:cNvPr>
@@ -5825,7 +5598,7 @@
         <p:spPr>
           <a:xfrm xmlns:a="http://schemas.openxmlformats.org/drawingml/2006/main">
             <a:off x="723900" y="666750"/>
-            <a:ext cx="10744200" cy="533400"/>
+            <a:ext cx="9334500" cy="533400"/>
           </a:xfrm>
           <a:prstGeom xmlns:a="http://schemas.openxmlformats.org/drawingml/2006/main" prst="rect">
             <a:avLst/>
@@ -5844,7 +5617,7 @@
           <p:cNvPr id="3" name="">
             <a:extLst xmlns:a="http://schemas.openxmlformats.org/drawingml/2006/main">
               <a:ext uri="{FF2B5EF4-FFF2-40B4-BE49-F238E27FC236}">
-                <a16:creationId xmlns:a16="http://schemas.microsoft.com/office/drawing/2014/main" id="{91755390-78F1-474F-A8F6-648F867B0E1C}"/>
+                <a16:creationId xmlns:a16="http://schemas.microsoft.com/office/drawing/2014/main" id="{47013FAC-B27E-4D14-A069-07C2492E0CC8}"/>
               </a:ext>
             </a:extLst>
           </p:cNvPr>
@@ -5856,7 +5629,7 @@
         <p:spPr>
           <a:xfrm xmlns:a="http://schemas.openxmlformats.org/drawingml/2006/main">
             <a:off x="895350" y="762000"/>
-            <a:ext cx="7239000" cy="323850"/>
+            <a:ext cx="8191500" cy="323850"/>
           </a:xfrm>
           <a:prstGeom xmlns:a="http://schemas.openxmlformats.org/drawingml/2006/main" prst="rect">
             <a:avLst/>
@@ -5884,7 +5657,7 @@
                   <a:srgbClr val="FFFFFF"/>
                 </a:solidFill>
               </a:rPr>
-              <a:t>Tugas Kelompok</a:t>
+              <a:t>Contoh Buruk dan Etika Penggunaan</a:t>
             </a:r>
           </a:p>
         </p:txBody>
@@ -5894,480 +5667,25 @@
           <p:cNvPr id="4" name="">
             <a:extLst xmlns:a="http://schemas.openxmlformats.org/drawingml/2006/main">
               <a:ext uri="{FF2B5EF4-FFF2-40B4-BE49-F238E27FC236}">
-                <a16:creationId xmlns:a16="http://schemas.microsoft.com/office/drawing/2014/main" id="{FCCC129C-A3BD-4647-82E8-38E06BB9914D}"/>
-              </a:ext>
-            </a:extLst>
-          </p:cNvPr>
-          <p:cNvSpPr>
-            <a:spLocks xmlns:a="http://schemas.openxmlformats.org/drawingml/2006/main" noGrp="1"/>
-          </p:cNvSpPr>
-          <p:nvPr/>
-        </p:nvSpPr>
-        <p:spPr>
-          <a:xfrm xmlns:a="http://schemas.openxmlformats.org/drawingml/2006/main">
-            <a:off x="914400" y="1543050"/>
-            <a:ext cx="10287000" cy="457200"/>
-          </a:xfrm>
-          <a:prstGeom xmlns:a="http://schemas.openxmlformats.org/drawingml/2006/main" prst="rect">
-            <a:avLst/>
-          </a:prstGeom>
-          <a:noFill xmlns:a="http://schemas.openxmlformats.org/drawingml/2006/main"/>
-          <a:ln xmlns:a="http://schemas.openxmlformats.org/drawingml/2006/main" w="0">
-            <a:noFill/>
-            <a:prstDash val="solid"/>
-          </a:ln>
-        </p:spPr>
-        <p:txBody>
-          <a:bodyPr xmlns:a="http://schemas.openxmlformats.org/drawingml/2006/main"/>
-          <a:lstStyle xmlns:a="http://schemas.openxmlformats.org/drawingml/2006/main"/>
-          <a:p xmlns:a="http://schemas.openxmlformats.org/drawingml/2006/main">
-            <a:pPr algn="l">
-              <a:defRPr sz="2100" b="1">
-                <a:solidFill>
-                  <a:srgbClr val="16324F"/>
-                </a:solidFill>
-              </a:defRPr>
-            </a:pPr>
-            <a:r>
-              <a:rPr sz="2100" b="1">
-                <a:solidFill>
-                  <a:srgbClr val="16324F"/>
-                </a:solidFill>
-              </a:rPr>
-              <a:t>Memakai Gen-AI untuk Belajar dengan Cerdas dan Bertanggung Jawab</a:t>
-            </a:r>
-          </a:p>
-        </p:txBody>
-      </p:sp>
-      <p:sp>
-        <p:nvSpPr>
-          <p:cNvPr id="5" name="">
-            <a:extLst xmlns:a="http://schemas.openxmlformats.org/drawingml/2006/main">
-              <a:ext uri="{FF2B5EF4-FFF2-40B4-BE49-F238E27FC236}">
-                <a16:creationId xmlns:a16="http://schemas.microsoft.com/office/drawing/2014/main" id="{E2D9329A-B35C-4761-A762-8ED7D2371EFD}"/>
-              </a:ext>
-            </a:extLst>
-          </p:cNvPr>
-          <p:cNvSpPr>
-            <a:spLocks xmlns:a="http://schemas.openxmlformats.org/drawingml/2006/main" noGrp="1"/>
-          </p:cNvSpPr>
-          <p:nvPr/>
-        </p:nvSpPr>
-        <p:spPr>
-          <a:xfrm xmlns:a="http://schemas.openxmlformats.org/drawingml/2006/main">
-            <a:off x="990600" y="2390775"/>
-            <a:ext cx="95250" cy="95250"/>
-          </a:xfrm>
-          <a:prstGeom xmlns:a="http://schemas.openxmlformats.org/drawingml/2006/main" prst="ellipse">
+                <a16:creationId xmlns:a16="http://schemas.microsoft.com/office/drawing/2014/main" id="{7C8F9DFD-5F72-41A5-8023-114A854A9444}"/>
+              </a:ext>
+            </a:extLst>
+          </p:cNvPr>
+          <p:cNvSpPr>
+            <a:spLocks xmlns:a="http://schemas.openxmlformats.org/drawingml/2006/main" noGrp="1"/>
+          </p:cNvSpPr>
+          <p:nvPr/>
+        </p:nvSpPr>
+        <p:spPr>
+          <a:xfrm xmlns:a="http://schemas.openxmlformats.org/drawingml/2006/main">
+            <a:off x="895350" y="1562100"/>
+            <a:ext cx="4762500" cy="3276600"/>
+          </a:xfrm>
+          <a:prstGeom xmlns:a="http://schemas.openxmlformats.org/drawingml/2006/main" prst="rect">
             <a:avLst/>
           </a:prstGeom>
           <a:solidFill xmlns:a="http://schemas.openxmlformats.org/drawingml/2006/main">
-            <a:srgbClr val="16324F"/>
-          </a:solidFill>
-          <a:ln xmlns:a="http://schemas.openxmlformats.org/drawingml/2006/main" w="0">
-            <a:noFill/>
-            <a:prstDash val="solid"/>
-          </a:ln>
-        </p:spPr>
-      </p:sp>
-      <p:sp>
-        <p:nvSpPr>
-          <p:cNvPr id="6" name="">
-            <a:extLst xmlns:a="http://schemas.openxmlformats.org/drawingml/2006/main">
-              <a:ext uri="{FF2B5EF4-FFF2-40B4-BE49-F238E27FC236}">
-                <a16:creationId xmlns:a16="http://schemas.microsoft.com/office/drawing/2014/main" id="{B5CD791D-340F-4567-B5A8-52BEDBD4369C}"/>
-              </a:ext>
-            </a:extLst>
-          </p:cNvPr>
-          <p:cNvSpPr>
-            <a:spLocks xmlns:a="http://schemas.openxmlformats.org/drawingml/2006/main" noGrp="1"/>
-          </p:cNvSpPr>
-          <p:nvPr/>
-        </p:nvSpPr>
-        <p:spPr>
-          <a:xfrm xmlns:a="http://schemas.openxmlformats.org/drawingml/2006/main">
-            <a:off x="1200150" y="2305050"/>
-            <a:ext cx="9601200" cy="398145"/>
-          </a:xfrm>
-          <a:prstGeom xmlns:a="http://schemas.openxmlformats.org/drawingml/2006/main" prst="rect">
-            <a:avLst/>
-          </a:prstGeom>
-          <a:noFill xmlns:a="http://schemas.openxmlformats.org/drawingml/2006/main"/>
-          <a:ln xmlns:a="http://schemas.openxmlformats.org/drawingml/2006/main" w="0">
-            <a:noFill/>
-            <a:prstDash val="solid"/>
-          </a:ln>
-        </p:spPr>
-        <p:txBody>
-          <a:bodyPr xmlns:a="http://schemas.openxmlformats.org/drawingml/2006/main"/>
-          <a:lstStyle xmlns:a="http://schemas.openxmlformats.org/drawingml/2006/main"/>
-          <a:p xmlns:a="http://schemas.openxmlformats.org/drawingml/2006/main">
-            <a:pPr algn="l">
-              <a:defRPr sz="1650" b="0">
-                <a:solidFill>
-                  <a:srgbClr val="1F2933"/>
-                </a:solidFill>
-              </a:defRPr>
-            </a:pPr>
-            <a:r>
-              <a:rPr sz="1650" b="0">
-                <a:solidFill>
-                  <a:srgbClr val="1F2933"/>
-                </a:solidFill>
-              </a:rPr>
-              <a:t>Pilih satu contoh penggunaan Gen-AI yang menurut kalian berguna untuk pelajar.</a:t>
-            </a:r>
-          </a:p>
-        </p:txBody>
-      </p:sp>
-      <p:sp>
-        <p:nvSpPr>
-          <p:cNvPr id="7" name="">
-            <a:extLst xmlns:a="http://schemas.openxmlformats.org/drawingml/2006/main">
-              <a:ext uri="{FF2B5EF4-FFF2-40B4-BE49-F238E27FC236}">
-                <a16:creationId xmlns:a16="http://schemas.microsoft.com/office/drawing/2014/main" id="{0B4383D5-E238-4ACA-8CE8-60D31A2D164D}"/>
-              </a:ext>
-            </a:extLst>
-          </p:cNvPr>
-          <p:cNvSpPr>
-            <a:spLocks xmlns:a="http://schemas.openxmlformats.org/drawingml/2006/main" noGrp="1"/>
-          </p:cNvSpPr>
-          <p:nvPr/>
-        </p:nvSpPr>
-        <p:spPr>
-          <a:xfrm xmlns:a="http://schemas.openxmlformats.org/drawingml/2006/main">
-            <a:off x="990600" y="2884170"/>
-            <a:ext cx="95250" cy="95250"/>
-          </a:xfrm>
-          <a:prstGeom xmlns:a="http://schemas.openxmlformats.org/drawingml/2006/main" prst="ellipse">
-            <a:avLst/>
-          </a:prstGeom>
-          <a:solidFill xmlns:a="http://schemas.openxmlformats.org/drawingml/2006/main">
-            <a:srgbClr val="16324F"/>
-          </a:solidFill>
-          <a:ln xmlns:a="http://schemas.openxmlformats.org/drawingml/2006/main" w="0">
-            <a:noFill/>
-            <a:prstDash val="solid"/>
-          </a:ln>
-        </p:spPr>
-      </p:sp>
-      <p:sp>
-        <p:nvSpPr>
-          <p:cNvPr id="8" name="">
-            <a:extLst xmlns:a="http://schemas.openxmlformats.org/drawingml/2006/main">
-              <a:ext uri="{FF2B5EF4-FFF2-40B4-BE49-F238E27FC236}">
-                <a16:creationId xmlns:a16="http://schemas.microsoft.com/office/drawing/2014/main" id="{BEB7469D-6FBE-48CF-B16C-C814DC62B69E}"/>
-              </a:ext>
-            </a:extLst>
-          </p:cNvPr>
-          <p:cNvSpPr>
-            <a:spLocks xmlns:a="http://schemas.openxmlformats.org/drawingml/2006/main" noGrp="1"/>
-          </p:cNvSpPr>
-          <p:nvPr/>
-        </p:nvSpPr>
-        <p:spPr>
-          <a:xfrm xmlns:a="http://schemas.openxmlformats.org/drawingml/2006/main">
-            <a:off x="1200150" y="2798445"/>
-            <a:ext cx="9601200" cy="398145"/>
-          </a:xfrm>
-          <a:prstGeom xmlns:a="http://schemas.openxmlformats.org/drawingml/2006/main" prst="rect">
-            <a:avLst/>
-          </a:prstGeom>
-          <a:noFill xmlns:a="http://schemas.openxmlformats.org/drawingml/2006/main"/>
-          <a:ln xmlns:a="http://schemas.openxmlformats.org/drawingml/2006/main" w="0">
-            <a:noFill/>
-            <a:prstDash val="solid"/>
-          </a:ln>
-        </p:spPr>
-        <p:txBody>
-          <a:bodyPr xmlns:a="http://schemas.openxmlformats.org/drawingml/2006/main"/>
-          <a:lstStyle xmlns:a="http://schemas.openxmlformats.org/drawingml/2006/main"/>
-          <a:p xmlns:a="http://schemas.openxmlformats.org/drawingml/2006/main">
-            <a:pPr algn="l">
-              <a:defRPr sz="1650" b="0">
-                <a:solidFill>
-                  <a:srgbClr val="1F2933"/>
-                </a:solidFill>
-              </a:defRPr>
-            </a:pPr>
-            <a:r>
-              <a:rPr sz="1650" b="0">
-                <a:solidFill>
-                  <a:srgbClr val="1F2933"/>
-                </a:solidFill>
-              </a:rPr>
-              <a:t>Jelaskan bagaimana alat itu bisa membantu belajar.</a:t>
-            </a:r>
-          </a:p>
-        </p:txBody>
-      </p:sp>
-      <p:sp>
-        <p:nvSpPr>
-          <p:cNvPr id="9" name="">
-            <a:extLst xmlns:a="http://schemas.openxmlformats.org/drawingml/2006/main">
-              <a:ext uri="{FF2B5EF4-FFF2-40B4-BE49-F238E27FC236}">
-                <a16:creationId xmlns:a16="http://schemas.microsoft.com/office/drawing/2014/main" id="{5121CB03-96E1-4750-A7B5-9723630E6012}"/>
-              </a:ext>
-            </a:extLst>
-          </p:cNvPr>
-          <p:cNvSpPr>
-            <a:spLocks xmlns:a="http://schemas.openxmlformats.org/drawingml/2006/main" noGrp="1"/>
-          </p:cNvSpPr>
-          <p:nvPr/>
-        </p:nvSpPr>
-        <p:spPr>
-          <a:xfrm xmlns:a="http://schemas.openxmlformats.org/drawingml/2006/main">
-            <a:off x="990600" y="3377565"/>
-            <a:ext cx="95250" cy="95250"/>
-          </a:xfrm>
-          <a:prstGeom xmlns:a="http://schemas.openxmlformats.org/drawingml/2006/main" prst="ellipse">
-            <a:avLst/>
-          </a:prstGeom>
-          <a:solidFill xmlns:a="http://schemas.openxmlformats.org/drawingml/2006/main">
-            <a:srgbClr val="16324F"/>
-          </a:solidFill>
-          <a:ln xmlns:a="http://schemas.openxmlformats.org/drawingml/2006/main" w="0">
-            <a:noFill/>
-            <a:prstDash val="solid"/>
-          </a:ln>
-        </p:spPr>
-      </p:sp>
-      <p:sp>
-        <p:nvSpPr>
-          <p:cNvPr id="10" name="">
-            <a:extLst xmlns:a="http://schemas.openxmlformats.org/drawingml/2006/main">
-              <a:ext uri="{FF2B5EF4-FFF2-40B4-BE49-F238E27FC236}">
-                <a16:creationId xmlns:a16="http://schemas.microsoft.com/office/drawing/2014/main" id="{20371502-579F-4F13-ADE0-D97436604EF3}"/>
-              </a:ext>
-            </a:extLst>
-          </p:cNvPr>
-          <p:cNvSpPr>
-            <a:spLocks xmlns:a="http://schemas.openxmlformats.org/drawingml/2006/main" noGrp="1"/>
-          </p:cNvSpPr>
-          <p:nvPr/>
-        </p:nvSpPr>
-        <p:spPr>
-          <a:xfrm xmlns:a="http://schemas.openxmlformats.org/drawingml/2006/main">
-            <a:off x="1200150" y="3291840"/>
-            <a:ext cx="9601200" cy="398145"/>
-          </a:xfrm>
-          <a:prstGeom xmlns:a="http://schemas.openxmlformats.org/drawingml/2006/main" prst="rect">
-            <a:avLst/>
-          </a:prstGeom>
-          <a:noFill xmlns:a="http://schemas.openxmlformats.org/drawingml/2006/main"/>
-          <a:ln xmlns:a="http://schemas.openxmlformats.org/drawingml/2006/main" w="0">
-            <a:noFill/>
-            <a:prstDash val="solid"/>
-          </a:ln>
-        </p:spPr>
-        <p:txBody>
-          <a:bodyPr xmlns:a="http://schemas.openxmlformats.org/drawingml/2006/main"/>
-          <a:lstStyle xmlns:a="http://schemas.openxmlformats.org/drawingml/2006/main"/>
-          <a:p xmlns:a="http://schemas.openxmlformats.org/drawingml/2006/main">
-            <a:pPr algn="l">
-              <a:defRPr sz="1650" b="0">
-                <a:solidFill>
-                  <a:srgbClr val="1F2933"/>
-                </a:solidFill>
-              </a:defRPr>
-            </a:pPr>
-            <a:r>
-              <a:rPr sz="1650" b="0">
-                <a:solidFill>
-                  <a:srgbClr val="1F2933"/>
-                </a:solidFill>
-              </a:rPr>
-              <a:t>Sebutkan minimal 2 manfaat jika dipakai dengan benar.</a:t>
-            </a:r>
-          </a:p>
-        </p:txBody>
-      </p:sp>
-      <p:sp>
-        <p:nvSpPr>
-          <p:cNvPr id="11" name="">
-            <a:extLst xmlns:a="http://schemas.openxmlformats.org/drawingml/2006/main">
-              <a:ext uri="{FF2B5EF4-FFF2-40B4-BE49-F238E27FC236}">
-                <a16:creationId xmlns:a16="http://schemas.microsoft.com/office/drawing/2014/main" id="{9D44464C-70CE-4841-A608-3E52AE16F7F8}"/>
-              </a:ext>
-            </a:extLst>
-          </p:cNvPr>
-          <p:cNvSpPr>
-            <a:spLocks xmlns:a="http://schemas.openxmlformats.org/drawingml/2006/main" noGrp="1"/>
-          </p:cNvSpPr>
-          <p:nvPr/>
-        </p:nvSpPr>
-        <p:spPr>
-          <a:xfrm xmlns:a="http://schemas.openxmlformats.org/drawingml/2006/main">
-            <a:off x="990600" y="3870960"/>
-            <a:ext cx="95250" cy="95250"/>
-          </a:xfrm>
-          <a:prstGeom xmlns:a="http://schemas.openxmlformats.org/drawingml/2006/main" prst="ellipse">
-            <a:avLst/>
-          </a:prstGeom>
-          <a:solidFill xmlns:a="http://schemas.openxmlformats.org/drawingml/2006/main">
-            <a:srgbClr val="16324F"/>
-          </a:solidFill>
-          <a:ln xmlns:a="http://schemas.openxmlformats.org/drawingml/2006/main" w="0">
-            <a:noFill/>
-            <a:prstDash val="solid"/>
-          </a:ln>
-        </p:spPr>
-      </p:sp>
-      <p:sp>
-        <p:nvSpPr>
-          <p:cNvPr id="12" name="">
-            <a:extLst xmlns:a="http://schemas.openxmlformats.org/drawingml/2006/main">
-              <a:ext uri="{FF2B5EF4-FFF2-40B4-BE49-F238E27FC236}">
-                <a16:creationId xmlns:a16="http://schemas.microsoft.com/office/drawing/2014/main" id="{B56EC7E9-48E8-4741-A416-9A82341D8C2A}"/>
-              </a:ext>
-            </a:extLst>
-          </p:cNvPr>
-          <p:cNvSpPr>
-            <a:spLocks xmlns:a="http://schemas.openxmlformats.org/drawingml/2006/main" noGrp="1"/>
-          </p:cNvSpPr>
-          <p:nvPr/>
-        </p:nvSpPr>
-        <p:spPr>
-          <a:xfrm xmlns:a="http://schemas.openxmlformats.org/drawingml/2006/main">
-            <a:off x="1200150" y="3785235"/>
-            <a:ext cx="9601200" cy="398145"/>
-          </a:xfrm>
-          <a:prstGeom xmlns:a="http://schemas.openxmlformats.org/drawingml/2006/main" prst="rect">
-            <a:avLst/>
-          </a:prstGeom>
-          <a:noFill xmlns:a="http://schemas.openxmlformats.org/drawingml/2006/main"/>
-          <a:ln xmlns:a="http://schemas.openxmlformats.org/drawingml/2006/main" w="0">
-            <a:noFill/>
-            <a:prstDash val="solid"/>
-          </a:ln>
-        </p:spPr>
-        <p:txBody>
-          <a:bodyPr xmlns:a="http://schemas.openxmlformats.org/drawingml/2006/main"/>
-          <a:lstStyle xmlns:a="http://schemas.openxmlformats.org/drawingml/2006/main"/>
-          <a:p xmlns:a="http://schemas.openxmlformats.org/drawingml/2006/main">
-            <a:pPr algn="l">
-              <a:defRPr sz="1650" b="0">
-                <a:solidFill>
-                  <a:srgbClr val="1F2933"/>
-                </a:solidFill>
-              </a:defRPr>
-            </a:pPr>
-            <a:r>
-              <a:rPr sz="1650" b="0">
-                <a:solidFill>
-                  <a:srgbClr val="1F2933"/>
-                </a:solidFill>
-              </a:rPr>
-              <a:t>Sebutkan minimal 2 risiko jika dipakai tanpa bijak.</a:t>
-            </a:r>
-          </a:p>
-        </p:txBody>
-      </p:sp>
-      <p:sp>
-        <p:nvSpPr>
-          <p:cNvPr id="13" name="">
-            <a:extLst xmlns:a="http://schemas.openxmlformats.org/drawingml/2006/main">
-              <a:ext uri="{FF2B5EF4-FFF2-40B4-BE49-F238E27FC236}">
-                <a16:creationId xmlns:a16="http://schemas.microsoft.com/office/drawing/2014/main" id="{E39ABB03-E48B-41DE-9843-D40FD9A07716}"/>
-              </a:ext>
-            </a:extLst>
-          </p:cNvPr>
-          <p:cNvSpPr>
-            <a:spLocks xmlns:a="http://schemas.openxmlformats.org/drawingml/2006/main" noGrp="1"/>
-          </p:cNvSpPr>
-          <p:nvPr/>
-        </p:nvSpPr>
-        <p:spPr>
-          <a:xfrm xmlns:a="http://schemas.openxmlformats.org/drawingml/2006/main">
-            <a:off x="990600" y="4364355"/>
-            <a:ext cx="95250" cy="95250"/>
-          </a:xfrm>
-          <a:prstGeom xmlns:a="http://schemas.openxmlformats.org/drawingml/2006/main" prst="ellipse">
-            <a:avLst/>
-          </a:prstGeom>
-          <a:solidFill xmlns:a="http://schemas.openxmlformats.org/drawingml/2006/main">
-            <a:srgbClr val="16324F"/>
-          </a:solidFill>
-          <a:ln xmlns:a="http://schemas.openxmlformats.org/drawingml/2006/main" w="0">
-            <a:noFill/>
-            <a:prstDash val="solid"/>
-          </a:ln>
-        </p:spPr>
-      </p:sp>
-      <p:sp>
-        <p:nvSpPr>
-          <p:cNvPr id="14" name="">
-            <a:extLst xmlns:a="http://schemas.openxmlformats.org/drawingml/2006/main">
-              <a:ext uri="{FF2B5EF4-FFF2-40B4-BE49-F238E27FC236}">
-                <a16:creationId xmlns:a16="http://schemas.microsoft.com/office/drawing/2014/main" id="{7BA02F1A-D8C6-41AE-B650-A85F5C731029}"/>
-              </a:ext>
-            </a:extLst>
-          </p:cNvPr>
-          <p:cNvSpPr>
-            <a:spLocks xmlns:a="http://schemas.openxmlformats.org/drawingml/2006/main" noGrp="1"/>
-          </p:cNvSpPr>
-          <p:nvPr/>
-        </p:nvSpPr>
-        <p:spPr>
-          <a:xfrm xmlns:a="http://schemas.openxmlformats.org/drawingml/2006/main">
-            <a:off x="1200150" y="4278630"/>
-            <a:ext cx="9601200" cy="398145"/>
-          </a:xfrm>
-          <a:prstGeom xmlns:a="http://schemas.openxmlformats.org/drawingml/2006/main" prst="rect">
-            <a:avLst/>
-          </a:prstGeom>
-          <a:noFill xmlns:a="http://schemas.openxmlformats.org/drawingml/2006/main"/>
-          <a:ln xmlns:a="http://schemas.openxmlformats.org/drawingml/2006/main" w="0">
-            <a:noFill/>
-            <a:prstDash val="solid"/>
-          </a:ln>
-        </p:spPr>
-        <p:txBody>
-          <a:bodyPr xmlns:a="http://schemas.openxmlformats.org/drawingml/2006/main"/>
-          <a:lstStyle xmlns:a="http://schemas.openxmlformats.org/drawingml/2006/main"/>
-          <a:p xmlns:a="http://schemas.openxmlformats.org/drawingml/2006/main">
-            <a:pPr algn="l">
-              <a:defRPr sz="1650" b="0">
-                <a:solidFill>
-                  <a:srgbClr val="1F2933"/>
-                </a:solidFill>
-              </a:defRPr>
-            </a:pPr>
-            <a:r>
-              <a:rPr sz="1650" b="0">
-                <a:solidFill>
-                  <a:srgbClr val="1F2933"/>
-                </a:solidFill>
-              </a:rPr>
-              <a:t>Tuliskan aturan penggunaan yang jujur dan bertanggung jawab di sekolah.</a:t>
-            </a:r>
-          </a:p>
-        </p:txBody>
-      </p:sp>
-      <p:sp>
-        <p:nvSpPr>
-          <p:cNvPr id="15" name="">
-            <a:extLst xmlns:a="http://schemas.openxmlformats.org/drawingml/2006/main">
-              <a:ext uri="{FF2B5EF4-FFF2-40B4-BE49-F238E27FC236}">
-                <a16:creationId xmlns:a16="http://schemas.microsoft.com/office/drawing/2014/main" id="{E19AD3BE-CAA0-42EB-9B7A-89787783C51B}"/>
-              </a:ext>
-            </a:extLst>
-          </p:cNvPr>
-          <p:cNvSpPr>
-            <a:spLocks xmlns:a="http://schemas.openxmlformats.org/drawingml/2006/main" noGrp="1"/>
-          </p:cNvSpPr>
-          <p:nvPr/>
-        </p:nvSpPr>
-        <p:spPr>
-          <a:xfrm xmlns:a="http://schemas.openxmlformats.org/drawingml/2006/main">
-            <a:off x="914400" y="4705350"/>
-            <a:ext cx="10287000" cy="1200150"/>
-          </a:xfrm>
-          <a:prstGeom xmlns:a="http://schemas.openxmlformats.org/drawingml/2006/main" prst="rect">
-            <a:avLst/>
-          </a:prstGeom>
-          <a:solidFill xmlns:a="http://schemas.openxmlformats.org/drawingml/2006/main">
-            <a:srgbClr val="F5FAFD"/>
+            <a:srgbClr val="FFFFFF"/>
           </a:solidFill>
           <a:ln xmlns:a="http://schemas.openxmlformats.org/drawingml/2006/main" w="9525">
             <a:solidFill>
@@ -6379,22 +5697,55 @@
       </p:sp>
       <p:sp>
         <p:nvSpPr>
-          <p:cNvPr id="16" name="">
-            <a:extLst xmlns:a="http://schemas.openxmlformats.org/drawingml/2006/main">
-              <a:ext uri="{FF2B5EF4-FFF2-40B4-BE49-F238E27FC236}">
-                <a16:creationId xmlns:a16="http://schemas.microsoft.com/office/drawing/2014/main" id="{8489F297-03AB-49FF-A643-7007C0DDF764}"/>
-              </a:ext>
-            </a:extLst>
-          </p:cNvPr>
-          <p:cNvSpPr>
-            <a:spLocks xmlns:a="http://schemas.openxmlformats.org/drawingml/2006/main" noGrp="1"/>
-          </p:cNvSpPr>
-          <p:nvPr/>
-        </p:nvSpPr>
-        <p:spPr>
-          <a:xfrm xmlns:a="http://schemas.openxmlformats.org/drawingml/2006/main">
-            <a:off x="1162050" y="4953000"/>
-            <a:ext cx="2476500" cy="266700"/>
+          <p:cNvPr id="5" name="">
+            <a:extLst xmlns:a="http://schemas.openxmlformats.org/drawingml/2006/main">
+              <a:ext uri="{FF2B5EF4-FFF2-40B4-BE49-F238E27FC236}">
+                <a16:creationId xmlns:a16="http://schemas.microsoft.com/office/drawing/2014/main" id="{FDCE0359-F9DC-4E73-8EDA-36FFC6678306}"/>
+              </a:ext>
+            </a:extLst>
+          </p:cNvPr>
+          <p:cNvSpPr>
+            <a:spLocks xmlns:a="http://schemas.openxmlformats.org/drawingml/2006/main" noGrp="1"/>
+          </p:cNvSpPr>
+          <p:nvPr/>
+        </p:nvSpPr>
+        <p:spPr>
+          <a:xfrm xmlns:a="http://schemas.openxmlformats.org/drawingml/2006/main">
+            <a:off x="5962650" y="1562100"/>
+            <a:ext cx="5238750" cy="3276600"/>
+          </a:xfrm>
+          <a:prstGeom xmlns:a="http://schemas.openxmlformats.org/drawingml/2006/main" prst="rect">
+            <a:avLst/>
+          </a:prstGeom>
+          <a:solidFill xmlns:a="http://schemas.openxmlformats.org/drawingml/2006/main">
+            <a:srgbClr val="F5FAFD"/>
+          </a:solidFill>
+          <a:ln xmlns:a="http://schemas.openxmlformats.org/drawingml/2006/main" w="9525">
+            <a:solidFill>
+              <a:srgbClr val="C8D6E2"/>
+            </a:solidFill>
+            <a:prstDash val="solid"/>
+          </a:ln>
+        </p:spPr>
+      </p:sp>
+      <p:sp>
+        <p:nvSpPr>
+          <p:cNvPr id="6" name="">
+            <a:extLst xmlns:a="http://schemas.openxmlformats.org/drawingml/2006/main">
+              <a:ext uri="{FF2B5EF4-FFF2-40B4-BE49-F238E27FC236}">
+                <a16:creationId xmlns:a16="http://schemas.microsoft.com/office/drawing/2014/main" id="{B1F92AAC-F089-4F8F-87E5-2D937260F2AD}"/>
+              </a:ext>
+            </a:extLst>
+          </p:cNvPr>
+          <p:cNvSpPr>
+            <a:spLocks xmlns:a="http://schemas.openxmlformats.org/drawingml/2006/main" noGrp="1"/>
+          </p:cNvSpPr>
+          <p:nvPr/>
+        </p:nvSpPr>
+        <p:spPr>
+          <a:xfrm xmlns:a="http://schemas.openxmlformats.org/drawingml/2006/main">
+            <a:off x="1143000" y="1790700"/>
+            <a:ext cx="2667000" cy="266700"/>
           </a:xfrm>
           <a:prstGeom xmlns:a="http://schemas.openxmlformats.org/drawingml/2006/main" prst="rect">
             <a:avLst/>
@@ -6410,141 +5761,72 @@
           <a:lstStyle xmlns:a="http://schemas.openxmlformats.org/drawingml/2006/main"/>
           <a:p xmlns:a="http://schemas.openxmlformats.org/drawingml/2006/main">
             <a:pPr algn="l">
-              <a:defRPr sz="1500" b="1">
-                <a:solidFill>
-                  <a:srgbClr val="24577A"/>
-                </a:solidFill>
-              </a:defRPr>
-            </a:pPr>
-            <a:r>
-              <a:rPr sz="1500" b="1">
-                <a:solidFill>
-                  <a:srgbClr val="24577A"/>
-                </a:solidFill>
-              </a:rPr>
-              <a:t>Pengumpulan tugas</a:t>
-            </a:r>
-          </a:p>
-        </p:txBody>
-      </p:sp>
-      <p:sp>
-        <p:nvSpPr>
-          <p:cNvPr id="17" name="">
-            <a:extLst xmlns:a="http://schemas.openxmlformats.org/drawingml/2006/main">
-              <a:ext uri="{FF2B5EF4-FFF2-40B4-BE49-F238E27FC236}">
-                <a16:creationId xmlns:a16="http://schemas.microsoft.com/office/drawing/2014/main" id="{CAD78F31-1F40-4945-9243-B409195D3E6C}"/>
-              </a:ext>
-            </a:extLst>
-          </p:cNvPr>
-          <p:cNvSpPr>
-            <a:spLocks xmlns:a="http://schemas.openxmlformats.org/drawingml/2006/main" noGrp="1"/>
-          </p:cNvSpPr>
-          <p:nvPr/>
-        </p:nvSpPr>
-        <p:spPr>
-          <a:xfrm xmlns:a="http://schemas.openxmlformats.org/drawingml/2006/main">
-            <a:off x="1162050" y="5238750"/>
-            <a:ext cx="4000500" cy="228600"/>
-          </a:xfrm>
-          <a:prstGeom xmlns:a="http://schemas.openxmlformats.org/drawingml/2006/main" prst="rect">
-            <a:avLst/>
-          </a:prstGeom>
-          <a:noFill xmlns:a="http://schemas.openxmlformats.org/drawingml/2006/main"/>
-          <a:ln xmlns:a="http://schemas.openxmlformats.org/drawingml/2006/main" w="0">
-            <a:noFill/>
-            <a:prstDash val="solid"/>
-          </a:ln>
-        </p:spPr>
-        <p:txBody>
-          <a:bodyPr xmlns:a="http://schemas.openxmlformats.org/drawingml/2006/main"/>
-          <a:lstStyle xmlns:a="http://schemas.openxmlformats.org/drawingml/2006/main"/>
-          <a:p xmlns:a="http://schemas.openxmlformats.org/drawingml/2006/main">
-            <a:pPr algn="l">
-              <a:defRPr sz="1425" b="1">
-                <a:solidFill>
-                  <a:srgbClr val="2563EB"/>
-                </a:solidFill>
-              </a:defRPr>
-            </a:pPr>
-            <a:r>
-              <a:rPr sz="1425" b="1">
-                <a:solidFill>
-                  <a:srgbClr val="2563EB"/>
-                </a:solidFill>
-              </a:rPr>
-              <a:t>Kirim ke: ataka.ahmad@gmail.com</a:t>
-            </a:r>
-          </a:p>
-        </p:txBody>
-      </p:sp>
-      <p:sp>
-        <p:nvSpPr>
-          <p:cNvPr id="18" name="">
-            <a:extLst xmlns:a="http://schemas.openxmlformats.org/drawingml/2006/main">
-              <a:ext uri="{FF2B5EF4-FFF2-40B4-BE49-F238E27FC236}">
-                <a16:creationId xmlns:a16="http://schemas.microsoft.com/office/drawing/2014/main" id="{F663BC4A-337E-46B5-802D-BA9A50AC5E5D}"/>
-              </a:ext>
-            </a:extLst>
-          </p:cNvPr>
-          <p:cNvSpPr>
-            <a:spLocks xmlns:a="http://schemas.openxmlformats.org/drawingml/2006/main" noGrp="1"/>
-          </p:cNvSpPr>
-          <p:nvPr/>
-        </p:nvSpPr>
-        <p:spPr>
-          <a:xfrm xmlns:a="http://schemas.openxmlformats.org/drawingml/2006/main">
-            <a:off x="1162050" y="5505450"/>
-            <a:ext cx="7429500" cy="228600"/>
-          </a:xfrm>
-          <a:prstGeom xmlns:a="http://schemas.openxmlformats.org/drawingml/2006/main" prst="rect">
-            <a:avLst/>
-          </a:prstGeom>
-          <a:noFill xmlns:a="http://schemas.openxmlformats.org/drawingml/2006/main"/>
-          <a:ln xmlns:a="http://schemas.openxmlformats.org/drawingml/2006/main" w="0">
-            <a:noFill/>
-            <a:prstDash val="solid"/>
-          </a:ln>
-        </p:spPr>
-        <p:txBody>
-          <a:bodyPr xmlns:a="http://schemas.openxmlformats.org/drawingml/2006/main"/>
-          <a:lstStyle xmlns:a="http://schemas.openxmlformats.org/drawingml/2006/main"/>
-          <a:p xmlns:a="http://schemas.openxmlformats.org/drawingml/2006/main">
-            <a:pPr algn="l">
-              <a:defRPr sz="1350" b="1">
-                <a:solidFill>
-                  <a:srgbClr val="1F2933"/>
-                </a:solidFill>
-              </a:defRPr>
-            </a:pPr>
-            <a:r>
-              <a:rPr sz="1350" b="1">
-                <a:solidFill>
-                  <a:srgbClr val="1F2933"/>
-                </a:solidFill>
-              </a:rPr>
-              <a:t>Subject: SMA Teladan X - Tugas Gen-AI - [Nama Kelompok]</a:t>
-            </a:r>
-          </a:p>
-        </p:txBody>
-      </p:sp>
-      <p:sp>
-        <p:nvSpPr>
-          <p:cNvPr id="19" name="">
-            <a:extLst xmlns:a="http://schemas.openxmlformats.org/drawingml/2006/main">
-              <a:ext uri="{FF2B5EF4-FFF2-40B4-BE49-F238E27FC236}">
-                <a16:creationId xmlns:a16="http://schemas.microsoft.com/office/drawing/2014/main" id="{DFCFF492-DACF-4E74-89BB-EADCF824B3A1}"/>
-              </a:ext>
-            </a:extLst>
-          </p:cNvPr>
-          <p:cNvSpPr>
-            <a:spLocks xmlns:a="http://schemas.openxmlformats.org/drawingml/2006/main" noGrp="1"/>
-          </p:cNvSpPr>
-          <p:nvPr/>
-        </p:nvSpPr>
-        <p:spPr>
-          <a:xfrm xmlns:a="http://schemas.openxmlformats.org/drawingml/2006/main">
-            <a:off x="1162050" y="5734050"/>
-            <a:ext cx="7239000" cy="209550"/>
+              <a:defRPr sz="1800" b="1">
+                <a:solidFill>
+                  <a:srgbClr val="16324F"/>
+                </a:solidFill>
+              </a:defRPr>
+            </a:pPr>
+            <a:r>
+              <a:rPr sz="1800" b="1">
+                <a:solidFill>
+                  <a:srgbClr val="16324F"/>
+                </a:solidFill>
+              </a:rPr>
+              <a:t>Penggunaan yang buruk</a:t>
+            </a:r>
+          </a:p>
+        </p:txBody>
+      </p:sp>
+      <p:sp>
+        <p:nvSpPr>
+          <p:cNvPr id="7" name="">
+            <a:extLst xmlns:a="http://schemas.openxmlformats.org/drawingml/2006/main">
+              <a:ext uri="{FF2B5EF4-FFF2-40B4-BE49-F238E27FC236}">
+                <a16:creationId xmlns:a16="http://schemas.microsoft.com/office/drawing/2014/main" id="{40F8A4D9-A73F-4C6D-9CD7-66B2A9D52366}"/>
+              </a:ext>
+            </a:extLst>
+          </p:cNvPr>
+          <p:cNvSpPr>
+            <a:spLocks xmlns:a="http://schemas.openxmlformats.org/drawingml/2006/main" noGrp="1"/>
+          </p:cNvSpPr>
+          <p:nvPr/>
+        </p:nvSpPr>
+        <p:spPr>
+          <a:xfrm xmlns:a="http://schemas.openxmlformats.org/drawingml/2006/main">
+            <a:off x="1143000" y="2419350"/>
+            <a:ext cx="95250" cy="95250"/>
+          </a:xfrm>
+          <a:prstGeom xmlns:a="http://schemas.openxmlformats.org/drawingml/2006/main" prst="ellipse">
+            <a:avLst/>
+          </a:prstGeom>
+          <a:solidFill xmlns:a="http://schemas.openxmlformats.org/drawingml/2006/main">
+            <a:srgbClr val="16324F"/>
+          </a:solidFill>
+          <a:ln xmlns:a="http://schemas.openxmlformats.org/drawingml/2006/main" w="0">
+            <a:noFill/>
+            <a:prstDash val="solid"/>
+          </a:ln>
+        </p:spPr>
+      </p:sp>
+      <p:sp>
+        <p:nvSpPr>
+          <p:cNvPr id="8" name="">
+            <a:extLst xmlns:a="http://schemas.openxmlformats.org/drawingml/2006/main">
+              <a:ext uri="{FF2B5EF4-FFF2-40B4-BE49-F238E27FC236}">
+                <a16:creationId xmlns:a16="http://schemas.microsoft.com/office/drawing/2014/main" id="{F0568382-FB5E-4B78-9815-6E83824F586E}"/>
+              </a:ext>
+            </a:extLst>
+          </p:cNvPr>
+          <p:cNvSpPr>
+            <a:spLocks xmlns:a="http://schemas.openxmlformats.org/drawingml/2006/main" noGrp="1"/>
+          </p:cNvSpPr>
+          <p:nvPr/>
+        </p:nvSpPr>
+        <p:spPr>
+          <a:xfrm xmlns:a="http://schemas.openxmlformats.org/drawingml/2006/main">
+            <a:off x="1352550" y="2343150"/>
+            <a:ext cx="3790950" cy="342900"/>
           </a:xfrm>
           <a:prstGeom xmlns:a="http://schemas.openxmlformats.org/drawingml/2006/main" prst="rect">
             <a:avLst/>
@@ -6572,7 +5854,462 @@
                   <a:srgbClr val="1F2933"/>
                 </a:solidFill>
               </a:rPr>
-              <a:t>Lampirkan 1 lembar jawaban ringkas atau 1 slide sederhana.</a:t>
+              <a:t>Menyalin jawaban AI mentah-mentah.</a:t>
+            </a:r>
+          </a:p>
+        </p:txBody>
+      </p:sp>
+      <p:sp>
+        <p:nvSpPr>
+          <p:cNvPr id="9" name="">
+            <a:extLst xmlns:a="http://schemas.openxmlformats.org/drawingml/2006/main">
+              <a:ext uri="{FF2B5EF4-FFF2-40B4-BE49-F238E27FC236}">
+                <a16:creationId xmlns:a16="http://schemas.microsoft.com/office/drawing/2014/main" id="{A690B4BB-77C2-4958-80B8-EAC382B71B1A}"/>
+              </a:ext>
+            </a:extLst>
+          </p:cNvPr>
+          <p:cNvSpPr>
+            <a:spLocks xmlns:a="http://schemas.openxmlformats.org/drawingml/2006/main" noGrp="1"/>
+          </p:cNvSpPr>
+          <p:nvPr/>
+        </p:nvSpPr>
+        <p:spPr>
+          <a:xfrm xmlns:a="http://schemas.openxmlformats.org/drawingml/2006/main">
+            <a:off x="1143000" y="2838450"/>
+            <a:ext cx="95250" cy="95250"/>
+          </a:xfrm>
+          <a:prstGeom xmlns:a="http://schemas.openxmlformats.org/drawingml/2006/main" prst="ellipse">
+            <a:avLst/>
+          </a:prstGeom>
+          <a:solidFill xmlns:a="http://schemas.openxmlformats.org/drawingml/2006/main">
+            <a:srgbClr val="16324F"/>
+          </a:solidFill>
+          <a:ln xmlns:a="http://schemas.openxmlformats.org/drawingml/2006/main" w="0">
+            <a:noFill/>
+            <a:prstDash val="solid"/>
+          </a:ln>
+        </p:spPr>
+      </p:sp>
+      <p:sp>
+        <p:nvSpPr>
+          <p:cNvPr id="10" name="">
+            <a:extLst xmlns:a="http://schemas.openxmlformats.org/drawingml/2006/main">
+              <a:ext uri="{FF2B5EF4-FFF2-40B4-BE49-F238E27FC236}">
+                <a16:creationId xmlns:a16="http://schemas.microsoft.com/office/drawing/2014/main" id="{182EB930-A20A-4B36-B169-465D8B2F210E}"/>
+              </a:ext>
+            </a:extLst>
+          </p:cNvPr>
+          <p:cNvSpPr>
+            <a:spLocks xmlns:a="http://schemas.openxmlformats.org/drawingml/2006/main" noGrp="1"/>
+          </p:cNvSpPr>
+          <p:nvPr/>
+        </p:nvSpPr>
+        <p:spPr>
+          <a:xfrm xmlns:a="http://schemas.openxmlformats.org/drawingml/2006/main">
+            <a:off x="1352550" y="2762250"/>
+            <a:ext cx="3790950" cy="342900"/>
+          </a:xfrm>
+          <a:prstGeom xmlns:a="http://schemas.openxmlformats.org/drawingml/2006/main" prst="rect">
+            <a:avLst/>
+          </a:prstGeom>
+          <a:noFill xmlns:a="http://schemas.openxmlformats.org/drawingml/2006/main"/>
+          <a:ln xmlns:a="http://schemas.openxmlformats.org/drawingml/2006/main" w="0">
+            <a:noFill/>
+            <a:prstDash val="solid"/>
+          </a:ln>
+        </p:spPr>
+        <p:txBody>
+          <a:bodyPr xmlns:a="http://schemas.openxmlformats.org/drawingml/2006/main"/>
+          <a:lstStyle xmlns:a="http://schemas.openxmlformats.org/drawingml/2006/main"/>
+          <a:p xmlns:a="http://schemas.openxmlformats.org/drawingml/2006/main">
+            <a:pPr algn="l">
+              <a:defRPr sz="1350" b="0">
+                <a:solidFill>
+                  <a:srgbClr val="1F2933"/>
+                </a:solidFill>
+              </a:defRPr>
+            </a:pPr>
+            <a:r>
+              <a:rPr sz="1350" b="0">
+                <a:solidFill>
+                  <a:srgbClr val="1F2933"/>
+                </a:solidFill>
+              </a:rPr>
+              <a:t>Memakai AI untuk mencontek ujian.</a:t>
+            </a:r>
+          </a:p>
+        </p:txBody>
+      </p:sp>
+      <p:sp>
+        <p:nvSpPr>
+          <p:cNvPr id="11" name="">
+            <a:extLst xmlns:a="http://schemas.openxmlformats.org/drawingml/2006/main">
+              <a:ext uri="{FF2B5EF4-FFF2-40B4-BE49-F238E27FC236}">
+                <a16:creationId xmlns:a16="http://schemas.microsoft.com/office/drawing/2014/main" id="{AD036ED9-8290-444D-8C2F-A8283FE45462}"/>
+              </a:ext>
+            </a:extLst>
+          </p:cNvPr>
+          <p:cNvSpPr>
+            <a:spLocks xmlns:a="http://schemas.openxmlformats.org/drawingml/2006/main" noGrp="1"/>
+          </p:cNvSpPr>
+          <p:nvPr/>
+        </p:nvSpPr>
+        <p:spPr>
+          <a:xfrm xmlns:a="http://schemas.openxmlformats.org/drawingml/2006/main">
+            <a:off x="1143000" y="3257550"/>
+            <a:ext cx="95250" cy="95250"/>
+          </a:xfrm>
+          <a:prstGeom xmlns:a="http://schemas.openxmlformats.org/drawingml/2006/main" prst="ellipse">
+            <a:avLst/>
+          </a:prstGeom>
+          <a:solidFill xmlns:a="http://schemas.openxmlformats.org/drawingml/2006/main">
+            <a:srgbClr val="16324F"/>
+          </a:solidFill>
+          <a:ln xmlns:a="http://schemas.openxmlformats.org/drawingml/2006/main" w="0">
+            <a:noFill/>
+            <a:prstDash val="solid"/>
+          </a:ln>
+        </p:spPr>
+      </p:sp>
+      <p:sp>
+        <p:nvSpPr>
+          <p:cNvPr id="12" name="">
+            <a:extLst xmlns:a="http://schemas.openxmlformats.org/drawingml/2006/main">
+              <a:ext uri="{FF2B5EF4-FFF2-40B4-BE49-F238E27FC236}">
+                <a16:creationId xmlns:a16="http://schemas.microsoft.com/office/drawing/2014/main" id="{839F8531-A35B-4F31-BA40-655EA6687FC8}"/>
+              </a:ext>
+            </a:extLst>
+          </p:cNvPr>
+          <p:cNvSpPr>
+            <a:spLocks xmlns:a="http://schemas.openxmlformats.org/drawingml/2006/main" noGrp="1"/>
+          </p:cNvSpPr>
+          <p:nvPr/>
+        </p:nvSpPr>
+        <p:spPr>
+          <a:xfrm xmlns:a="http://schemas.openxmlformats.org/drawingml/2006/main">
+            <a:off x="1352550" y="3181350"/>
+            <a:ext cx="3790950" cy="342900"/>
+          </a:xfrm>
+          <a:prstGeom xmlns:a="http://schemas.openxmlformats.org/drawingml/2006/main" prst="rect">
+            <a:avLst/>
+          </a:prstGeom>
+          <a:noFill xmlns:a="http://schemas.openxmlformats.org/drawingml/2006/main"/>
+          <a:ln xmlns:a="http://schemas.openxmlformats.org/drawingml/2006/main" w="0">
+            <a:noFill/>
+            <a:prstDash val="solid"/>
+          </a:ln>
+        </p:spPr>
+        <p:txBody>
+          <a:bodyPr xmlns:a="http://schemas.openxmlformats.org/drawingml/2006/main"/>
+          <a:lstStyle xmlns:a="http://schemas.openxmlformats.org/drawingml/2006/main"/>
+          <a:p xmlns:a="http://schemas.openxmlformats.org/drawingml/2006/main">
+            <a:pPr algn="l">
+              <a:defRPr sz="1350" b="0">
+                <a:solidFill>
+                  <a:srgbClr val="1F2933"/>
+                </a:solidFill>
+              </a:defRPr>
+            </a:pPr>
+            <a:r>
+              <a:rPr sz="1350" b="0">
+                <a:solidFill>
+                  <a:srgbClr val="1F2933"/>
+                </a:solidFill>
+              </a:rPr>
+              <a:t>Tidak memeriksa ulang fakta penting.</a:t>
+            </a:r>
+          </a:p>
+        </p:txBody>
+      </p:sp>
+      <p:sp>
+        <p:nvSpPr>
+          <p:cNvPr id="13" name="">
+            <a:extLst xmlns:a="http://schemas.openxmlformats.org/drawingml/2006/main">
+              <a:ext uri="{FF2B5EF4-FFF2-40B4-BE49-F238E27FC236}">
+                <a16:creationId xmlns:a16="http://schemas.microsoft.com/office/drawing/2014/main" id="{B7C862F8-5591-4C49-A22B-8C344F104AEB}"/>
+              </a:ext>
+            </a:extLst>
+          </p:cNvPr>
+          <p:cNvSpPr>
+            <a:spLocks xmlns:a="http://schemas.openxmlformats.org/drawingml/2006/main" noGrp="1"/>
+          </p:cNvSpPr>
+          <p:nvPr/>
+        </p:nvSpPr>
+        <p:spPr>
+          <a:xfrm xmlns:a="http://schemas.openxmlformats.org/drawingml/2006/main">
+            <a:off x="1143000" y="3676650"/>
+            <a:ext cx="95250" cy="95250"/>
+          </a:xfrm>
+          <a:prstGeom xmlns:a="http://schemas.openxmlformats.org/drawingml/2006/main" prst="ellipse">
+            <a:avLst/>
+          </a:prstGeom>
+          <a:solidFill xmlns:a="http://schemas.openxmlformats.org/drawingml/2006/main">
+            <a:srgbClr val="16324F"/>
+          </a:solidFill>
+          <a:ln xmlns:a="http://schemas.openxmlformats.org/drawingml/2006/main" w="0">
+            <a:noFill/>
+            <a:prstDash val="solid"/>
+          </a:ln>
+        </p:spPr>
+      </p:sp>
+      <p:sp>
+        <p:nvSpPr>
+          <p:cNvPr id="14" name="">
+            <a:extLst xmlns:a="http://schemas.openxmlformats.org/drawingml/2006/main">
+              <a:ext uri="{FF2B5EF4-FFF2-40B4-BE49-F238E27FC236}">
+                <a16:creationId xmlns:a16="http://schemas.microsoft.com/office/drawing/2014/main" id="{189F1E83-4893-49AD-8DAF-29013CF038B5}"/>
+              </a:ext>
+            </a:extLst>
+          </p:cNvPr>
+          <p:cNvSpPr>
+            <a:spLocks xmlns:a="http://schemas.openxmlformats.org/drawingml/2006/main" noGrp="1"/>
+          </p:cNvSpPr>
+          <p:nvPr/>
+        </p:nvSpPr>
+        <p:spPr>
+          <a:xfrm xmlns:a="http://schemas.openxmlformats.org/drawingml/2006/main">
+            <a:off x="1352550" y="3600450"/>
+            <a:ext cx="3790950" cy="342900"/>
+          </a:xfrm>
+          <a:prstGeom xmlns:a="http://schemas.openxmlformats.org/drawingml/2006/main" prst="rect">
+            <a:avLst/>
+          </a:prstGeom>
+          <a:noFill xmlns:a="http://schemas.openxmlformats.org/drawingml/2006/main"/>
+          <a:ln xmlns:a="http://schemas.openxmlformats.org/drawingml/2006/main" w="0">
+            <a:noFill/>
+            <a:prstDash val="solid"/>
+          </a:ln>
+        </p:spPr>
+        <p:txBody>
+          <a:bodyPr xmlns:a="http://schemas.openxmlformats.org/drawingml/2006/main"/>
+          <a:lstStyle xmlns:a="http://schemas.openxmlformats.org/drawingml/2006/main"/>
+          <a:p xmlns:a="http://schemas.openxmlformats.org/drawingml/2006/main">
+            <a:pPr algn="l">
+              <a:defRPr sz="1350" b="0">
+                <a:solidFill>
+                  <a:srgbClr val="1F2933"/>
+                </a:solidFill>
+              </a:defRPr>
+            </a:pPr>
+            <a:r>
+              <a:rPr sz="1350" b="0">
+                <a:solidFill>
+                  <a:srgbClr val="1F2933"/>
+                </a:solidFill>
+              </a:rPr>
+              <a:t>Memasukkan data pribadi atau dokumen sensitif.</a:t>
+            </a:r>
+          </a:p>
+        </p:txBody>
+      </p:sp>
+      <p:sp>
+        <p:nvSpPr>
+          <p:cNvPr id="15" name="">
+            <a:extLst xmlns:a="http://schemas.openxmlformats.org/drawingml/2006/main">
+              <a:ext uri="{FF2B5EF4-FFF2-40B4-BE49-F238E27FC236}">
+                <a16:creationId xmlns:a16="http://schemas.microsoft.com/office/drawing/2014/main" id="{D615497C-3F88-4582-B5D2-63115FF55FDD}"/>
+              </a:ext>
+            </a:extLst>
+          </p:cNvPr>
+          <p:cNvSpPr>
+            <a:spLocks xmlns:a="http://schemas.openxmlformats.org/drawingml/2006/main" noGrp="1"/>
+          </p:cNvSpPr>
+          <p:nvPr/>
+        </p:nvSpPr>
+        <p:spPr>
+          <a:xfrm xmlns:a="http://schemas.openxmlformats.org/drawingml/2006/main">
+            <a:off x="6210300" y="1790700"/>
+            <a:ext cx="2857500" cy="266700"/>
+          </a:xfrm>
+          <a:prstGeom xmlns:a="http://schemas.openxmlformats.org/drawingml/2006/main" prst="rect">
+            <a:avLst/>
+          </a:prstGeom>
+          <a:noFill xmlns:a="http://schemas.openxmlformats.org/drawingml/2006/main"/>
+          <a:ln xmlns:a="http://schemas.openxmlformats.org/drawingml/2006/main" w="0">
+            <a:noFill/>
+            <a:prstDash val="solid"/>
+          </a:ln>
+        </p:spPr>
+        <p:txBody>
+          <a:bodyPr xmlns:a="http://schemas.openxmlformats.org/drawingml/2006/main"/>
+          <a:lstStyle xmlns:a="http://schemas.openxmlformats.org/drawingml/2006/main"/>
+          <a:p xmlns:a="http://schemas.openxmlformats.org/drawingml/2006/main">
+            <a:pPr algn="l">
+              <a:defRPr sz="1800" b="1">
+                <a:solidFill>
+                  <a:srgbClr val="16324F"/>
+                </a:solidFill>
+              </a:defRPr>
+            </a:pPr>
+            <a:r>
+              <a:rPr sz="1800" b="1">
+                <a:solidFill>
+                  <a:srgbClr val="16324F"/>
+                </a:solidFill>
+              </a:rPr>
+              <a:t>Etika yang harus dijaga</a:t>
+            </a:r>
+          </a:p>
+        </p:txBody>
+      </p:sp>
+      <p:sp>
+        <p:nvSpPr>
+          <p:cNvPr id="16" name="">
+            <a:extLst xmlns:a="http://schemas.openxmlformats.org/drawingml/2006/main">
+              <a:ext uri="{FF2B5EF4-FFF2-40B4-BE49-F238E27FC236}">
+                <a16:creationId xmlns:a16="http://schemas.microsoft.com/office/drawing/2014/main" id="{868BE72D-7428-4B75-BBC3-49C7E363277E}"/>
+              </a:ext>
+            </a:extLst>
+          </p:cNvPr>
+          <p:cNvSpPr>
+            <a:spLocks xmlns:a="http://schemas.openxmlformats.org/drawingml/2006/main" noGrp="1"/>
+          </p:cNvSpPr>
+          <p:nvPr/>
+        </p:nvSpPr>
+        <p:spPr>
+          <a:xfrm xmlns:a="http://schemas.openxmlformats.org/drawingml/2006/main">
+            <a:off x="6210300" y="2419350"/>
+            <a:ext cx="95250" cy="95250"/>
+          </a:xfrm>
+          <a:prstGeom xmlns:a="http://schemas.openxmlformats.org/drawingml/2006/main" prst="ellipse">
+            <a:avLst/>
+          </a:prstGeom>
+          <a:solidFill xmlns:a="http://schemas.openxmlformats.org/drawingml/2006/main">
+            <a:srgbClr val="16324F"/>
+          </a:solidFill>
+          <a:ln xmlns:a="http://schemas.openxmlformats.org/drawingml/2006/main" w="0">
+            <a:noFill/>
+            <a:prstDash val="solid"/>
+          </a:ln>
+        </p:spPr>
+      </p:sp>
+      <p:sp>
+        <p:nvSpPr>
+          <p:cNvPr id="17" name="">
+            <a:extLst xmlns:a="http://schemas.openxmlformats.org/drawingml/2006/main">
+              <a:ext uri="{FF2B5EF4-FFF2-40B4-BE49-F238E27FC236}">
+                <a16:creationId xmlns:a16="http://schemas.microsoft.com/office/drawing/2014/main" id="{9F045A09-45AE-4C36-9DC3-8F28D6552B04}"/>
+              </a:ext>
+            </a:extLst>
+          </p:cNvPr>
+          <p:cNvSpPr>
+            <a:spLocks xmlns:a="http://schemas.openxmlformats.org/drawingml/2006/main" noGrp="1"/>
+          </p:cNvSpPr>
+          <p:nvPr/>
+        </p:nvSpPr>
+        <p:spPr>
+          <a:xfrm xmlns:a="http://schemas.openxmlformats.org/drawingml/2006/main">
+            <a:off x="6419850" y="2343150"/>
+            <a:ext cx="4133850" cy="342900"/>
+          </a:xfrm>
+          <a:prstGeom xmlns:a="http://schemas.openxmlformats.org/drawingml/2006/main" prst="rect">
+            <a:avLst/>
+          </a:prstGeom>
+          <a:noFill xmlns:a="http://schemas.openxmlformats.org/drawingml/2006/main"/>
+          <a:ln xmlns:a="http://schemas.openxmlformats.org/drawingml/2006/main" w="0">
+            <a:noFill/>
+            <a:prstDash val="solid"/>
+          </a:ln>
+        </p:spPr>
+        <p:txBody>
+          <a:bodyPr xmlns:a="http://schemas.openxmlformats.org/drawingml/2006/main"/>
+          <a:lstStyle xmlns:a="http://schemas.openxmlformats.org/drawingml/2006/main"/>
+          <a:p xmlns:a="http://schemas.openxmlformats.org/drawingml/2006/main">
+            <a:pPr algn="l">
+              <a:defRPr sz="1350" b="0">
+                <a:solidFill>
+                  <a:srgbClr val="1F2933"/>
+                </a:solidFill>
+              </a:defRPr>
+            </a:pPr>
+            <a:r>
+              <a:rPr sz="1350" b="0">
+                <a:solidFill>
+                  <a:srgbClr val="1F2933"/>
+                </a:solidFill>
+              </a:rPr>
+              <a:t>Jujur tentang bantuan AI yang dipakai.</a:t>
+            </a:r>
+          </a:p>
+        </p:txBody>
+      </p:sp>
+      <p:sp>
+        <p:nvSpPr>
+          <p:cNvPr id="18" name="">
+            <a:extLst xmlns:a="http://schemas.openxmlformats.org/drawingml/2006/main">
+              <a:ext uri="{FF2B5EF4-FFF2-40B4-BE49-F238E27FC236}">
+                <a16:creationId xmlns:a16="http://schemas.microsoft.com/office/drawing/2014/main" id="{2A3E5142-50D6-4C9A-8B94-187FC8F6639C}"/>
+              </a:ext>
+            </a:extLst>
+          </p:cNvPr>
+          <p:cNvSpPr>
+            <a:spLocks xmlns:a="http://schemas.openxmlformats.org/drawingml/2006/main" noGrp="1"/>
+          </p:cNvSpPr>
+          <p:nvPr/>
+        </p:nvSpPr>
+        <p:spPr>
+          <a:xfrm xmlns:a="http://schemas.openxmlformats.org/drawingml/2006/main">
+            <a:off x="6210300" y="2838450"/>
+            <a:ext cx="95250" cy="95250"/>
+          </a:xfrm>
+          <a:prstGeom xmlns:a="http://schemas.openxmlformats.org/drawingml/2006/main" prst="ellipse">
+            <a:avLst/>
+          </a:prstGeom>
+          <a:solidFill xmlns:a="http://schemas.openxmlformats.org/drawingml/2006/main">
+            <a:srgbClr val="16324F"/>
+          </a:solidFill>
+          <a:ln xmlns:a="http://schemas.openxmlformats.org/drawingml/2006/main" w="0">
+            <a:noFill/>
+            <a:prstDash val="solid"/>
+          </a:ln>
+        </p:spPr>
+      </p:sp>
+      <p:sp>
+        <p:nvSpPr>
+          <p:cNvPr id="19" name="">
+            <a:extLst xmlns:a="http://schemas.openxmlformats.org/drawingml/2006/main">
+              <a:ext uri="{FF2B5EF4-FFF2-40B4-BE49-F238E27FC236}">
+                <a16:creationId xmlns:a16="http://schemas.microsoft.com/office/drawing/2014/main" id="{25A6F39B-18EB-421E-99ED-C39538088FE4}"/>
+              </a:ext>
+            </a:extLst>
+          </p:cNvPr>
+          <p:cNvSpPr>
+            <a:spLocks xmlns:a="http://schemas.openxmlformats.org/drawingml/2006/main" noGrp="1"/>
+          </p:cNvSpPr>
+          <p:nvPr/>
+        </p:nvSpPr>
+        <p:spPr>
+          <a:xfrm xmlns:a="http://schemas.openxmlformats.org/drawingml/2006/main">
+            <a:off x="6419850" y="2762250"/>
+            <a:ext cx="4133850" cy="342900"/>
+          </a:xfrm>
+          <a:prstGeom xmlns:a="http://schemas.openxmlformats.org/drawingml/2006/main" prst="rect">
+            <a:avLst/>
+          </a:prstGeom>
+          <a:noFill xmlns:a="http://schemas.openxmlformats.org/drawingml/2006/main"/>
+          <a:ln xmlns:a="http://schemas.openxmlformats.org/drawingml/2006/main" w="0">
+            <a:noFill/>
+            <a:prstDash val="solid"/>
+          </a:ln>
+        </p:spPr>
+        <p:txBody>
+          <a:bodyPr xmlns:a="http://schemas.openxmlformats.org/drawingml/2006/main"/>
+          <a:lstStyle xmlns:a="http://schemas.openxmlformats.org/drawingml/2006/main"/>
+          <a:p xmlns:a="http://schemas.openxmlformats.org/drawingml/2006/main">
+            <a:pPr algn="l">
+              <a:defRPr sz="1350" b="0">
+                <a:solidFill>
+                  <a:srgbClr val="1F2933"/>
+                </a:solidFill>
+              </a:defRPr>
+            </a:pPr>
+            <a:r>
+              <a:rPr sz="1350" b="0">
+                <a:solidFill>
+                  <a:srgbClr val="1F2933"/>
+                </a:solidFill>
+              </a:rPr>
+              <a:t>Verifikasi informasi dengan sumber tepercaya.</a:t>
             </a:r>
           </a:p>
         </p:txBody>
@@ -6582,7 +6319,250 @@
           <p:cNvPr id="20" name="">
             <a:extLst xmlns:a="http://schemas.openxmlformats.org/drawingml/2006/main">
               <a:ext uri="{FF2B5EF4-FFF2-40B4-BE49-F238E27FC236}">
-                <a16:creationId xmlns:a16="http://schemas.microsoft.com/office/drawing/2014/main" id="{56C8F5DE-6A2C-4306-9F81-303420D0DAA8}"/>
+                <a16:creationId xmlns:a16="http://schemas.microsoft.com/office/drawing/2014/main" id="{1FA0C9D1-D872-4975-9332-DE28B85CACFB}"/>
+              </a:ext>
+            </a:extLst>
+          </p:cNvPr>
+          <p:cNvSpPr>
+            <a:spLocks xmlns:a="http://schemas.openxmlformats.org/drawingml/2006/main" noGrp="1"/>
+          </p:cNvSpPr>
+          <p:nvPr/>
+        </p:nvSpPr>
+        <p:spPr>
+          <a:xfrm xmlns:a="http://schemas.openxmlformats.org/drawingml/2006/main">
+            <a:off x="6210300" y="3257550"/>
+            <a:ext cx="95250" cy="95250"/>
+          </a:xfrm>
+          <a:prstGeom xmlns:a="http://schemas.openxmlformats.org/drawingml/2006/main" prst="ellipse">
+            <a:avLst/>
+          </a:prstGeom>
+          <a:solidFill xmlns:a="http://schemas.openxmlformats.org/drawingml/2006/main">
+            <a:srgbClr val="16324F"/>
+          </a:solidFill>
+          <a:ln xmlns:a="http://schemas.openxmlformats.org/drawingml/2006/main" w="0">
+            <a:noFill/>
+            <a:prstDash val="solid"/>
+          </a:ln>
+        </p:spPr>
+      </p:sp>
+      <p:sp>
+        <p:nvSpPr>
+          <p:cNvPr id="21" name="">
+            <a:extLst xmlns:a="http://schemas.openxmlformats.org/drawingml/2006/main">
+              <a:ext uri="{FF2B5EF4-FFF2-40B4-BE49-F238E27FC236}">
+                <a16:creationId xmlns:a16="http://schemas.microsoft.com/office/drawing/2014/main" id="{38A4B551-184B-485F-AEF3-2A4AE0E1F2DA}"/>
+              </a:ext>
+            </a:extLst>
+          </p:cNvPr>
+          <p:cNvSpPr>
+            <a:spLocks xmlns:a="http://schemas.openxmlformats.org/drawingml/2006/main" noGrp="1"/>
+          </p:cNvSpPr>
+          <p:nvPr/>
+        </p:nvSpPr>
+        <p:spPr>
+          <a:xfrm xmlns:a="http://schemas.openxmlformats.org/drawingml/2006/main">
+            <a:off x="6419850" y="3181350"/>
+            <a:ext cx="4133850" cy="342900"/>
+          </a:xfrm>
+          <a:prstGeom xmlns:a="http://schemas.openxmlformats.org/drawingml/2006/main" prst="rect">
+            <a:avLst/>
+          </a:prstGeom>
+          <a:noFill xmlns:a="http://schemas.openxmlformats.org/drawingml/2006/main"/>
+          <a:ln xmlns:a="http://schemas.openxmlformats.org/drawingml/2006/main" w="0">
+            <a:noFill/>
+            <a:prstDash val="solid"/>
+          </a:ln>
+        </p:spPr>
+        <p:txBody>
+          <a:bodyPr xmlns:a="http://schemas.openxmlformats.org/drawingml/2006/main"/>
+          <a:lstStyle xmlns:a="http://schemas.openxmlformats.org/drawingml/2006/main"/>
+          <a:p xmlns:a="http://schemas.openxmlformats.org/drawingml/2006/main">
+            <a:pPr algn="l">
+              <a:defRPr sz="1350" b="0">
+                <a:solidFill>
+                  <a:srgbClr val="1F2933"/>
+                </a:solidFill>
+              </a:defRPr>
+            </a:pPr>
+            <a:r>
+              <a:rPr sz="1350" b="0">
+                <a:solidFill>
+                  <a:srgbClr val="1F2933"/>
+                </a:solidFill>
+              </a:rPr>
+              <a:t>Gunakan AI untuk belajar, bukan menggantikan usaha.</a:t>
+            </a:r>
+          </a:p>
+        </p:txBody>
+      </p:sp>
+      <p:sp>
+        <p:nvSpPr>
+          <p:cNvPr id="22" name="">
+            <a:extLst xmlns:a="http://schemas.openxmlformats.org/drawingml/2006/main">
+              <a:ext uri="{FF2B5EF4-FFF2-40B4-BE49-F238E27FC236}">
+                <a16:creationId xmlns:a16="http://schemas.microsoft.com/office/drawing/2014/main" id="{11E33099-E75C-4F31-A985-4234C8DF189F}"/>
+              </a:ext>
+            </a:extLst>
+          </p:cNvPr>
+          <p:cNvSpPr>
+            <a:spLocks xmlns:a="http://schemas.openxmlformats.org/drawingml/2006/main" noGrp="1"/>
+          </p:cNvSpPr>
+          <p:nvPr/>
+        </p:nvSpPr>
+        <p:spPr>
+          <a:xfrm xmlns:a="http://schemas.openxmlformats.org/drawingml/2006/main">
+            <a:off x="6210300" y="3676650"/>
+            <a:ext cx="95250" cy="95250"/>
+          </a:xfrm>
+          <a:prstGeom xmlns:a="http://schemas.openxmlformats.org/drawingml/2006/main" prst="ellipse">
+            <a:avLst/>
+          </a:prstGeom>
+          <a:solidFill xmlns:a="http://schemas.openxmlformats.org/drawingml/2006/main">
+            <a:srgbClr val="16324F"/>
+          </a:solidFill>
+          <a:ln xmlns:a="http://schemas.openxmlformats.org/drawingml/2006/main" w="0">
+            <a:noFill/>
+            <a:prstDash val="solid"/>
+          </a:ln>
+        </p:spPr>
+      </p:sp>
+      <p:sp>
+        <p:nvSpPr>
+          <p:cNvPr id="23" name="">
+            <a:extLst xmlns:a="http://schemas.openxmlformats.org/drawingml/2006/main">
+              <a:ext uri="{FF2B5EF4-FFF2-40B4-BE49-F238E27FC236}">
+                <a16:creationId xmlns:a16="http://schemas.microsoft.com/office/drawing/2014/main" id="{1D3DA1B2-FB80-4E3D-BF9B-62B976CBFB4E}"/>
+              </a:ext>
+            </a:extLst>
+          </p:cNvPr>
+          <p:cNvSpPr>
+            <a:spLocks xmlns:a="http://schemas.openxmlformats.org/drawingml/2006/main" noGrp="1"/>
+          </p:cNvSpPr>
+          <p:nvPr/>
+        </p:nvSpPr>
+        <p:spPr>
+          <a:xfrm xmlns:a="http://schemas.openxmlformats.org/drawingml/2006/main">
+            <a:off x="6419850" y="3600450"/>
+            <a:ext cx="4133850" cy="342900"/>
+          </a:xfrm>
+          <a:prstGeom xmlns:a="http://schemas.openxmlformats.org/drawingml/2006/main" prst="rect">
+            <a:avLst/>
+          </a:prstGeom>
+          <a:noFill xmlns:a="http://schemas.openxmlformats.org/drawingml/2006/main"/>
+          <a:ln xmlns:a="http://schemas.openxmlformats.org/drawingml/2006/main" w="0">
+            <a:noFill/>
+            <a:prstDash val="solid"/>
+          </a:ln>
+        </p:spPr>
+        <p:txBody>
+          <a:bodyPr xmlns:a="http://schemas.openxmlformats.org/drawingml/2006/main"/>
+          <a:lstStyle xmlns:a="http://schemas.openxmlformats.org/drawingml/2006/main"/>
+          <a:p xmlns:a="http://schemas.openxmlformats.org/drawingml/2006/main">
+            <a:pPr algn="l">
+              <a:defRPr sz="1350" b="0">
+                <a:solidFill>
+                  <a:srgbClr val="1F2933"/>
+                </a:solidFill>
+              </a:defRPr>
+            </a:pPr>
+            <a:r>
+              <a:rPr sz="1350" b="0">
+                <a:solidFill>
+                  <a:srgbClr val="1F2933"/>
+                </a:solidFill>
+              </a:rPr>
+              <a:t>Hormati privasi dan karya orang lain.</a:t>
+            </a:r>
+          </a:p>
+        </p:txBody>
+      </p:sp>
+      <p:sp>
+        <p:nvSpPr>
+          <p:cNvPr id="24" name="">
+            <a:extLst xmlns:a="http://schemas.openxmlformats.org/drawingml/2006/main">
+              <a:ext uri="{FF2B5EF4-FFF2-40B4-BE49-F238E27FC236}">
+                <a16:creationId xmlns:a16="http://schemas.microsoft.com/office/drawing/2014/main" id="{E60A8295-D365-4EE1-9192-2BB53A923EE8}"/>
+              </a:ext>
+            </a:extLst>
+          </p:cNvPr>
+          <p:cNvSpPr>
+            <a:spLocks xmlns:a="http://schemas.openxmlformats.org/drawingml/2006/main" noGrp="1"/>
+          </p:cNvSpPr>
+          <p:nvPr/>
+        </p:nvSpPr>
+        <p:spPr>
+          <a:xfrm xmlns:a="http://schemas.openxmlformats.org/drawingml/2006/main">
+            <a:off x="895350" y="5086350"/>
+            <a:ext cx="10306050" cy="781050"/>
+          </a:xfrm>
+          <a:prstGeom xmlns:a="http://schemas.openxmlformats.org/drawingml/2006/main" prst="rect">
+            <a:avLst/>
+          </a:prstGeom>
+          <a:solidFill xmlns:a="http://schemas.openxmlformats.org/drawingml/2006/main">
+            <a:srgbClr val="EAF3F8"/>
+          </a:solidFill>
+          <a:ln xmlns:a="http://schemas.openxmlformats.org/drawingml/2006/main" w="0">
+            <a:noFill/>
+            <a:prstDash val="solid"/>
+          </a:ln>
+        </p:spPr>
+      </p:sp>
+      <p:sp>
+        <p:nvSpPr>
+          <p:cNvPr id="25" name="">
+            <a:extLst xmlns:a="http://schemas.openxmlformats.org/drawingml/2006/main">
+              <a:ext uri="{FF2B5EF4-FFF2-40B4-BE49-F238E27FC236}">
+                <a16:creationId xmlns:a16="http://schemas.microsoft.com/office/drawing/2014/main" id="{88056A36-F03E-4B6D-9745-CD040E39AD5C}"/>
+              </a:ext>
+            </a:extLst>
+          </p:cNvPr>
+          <p:cNvSpPr>
+            <a:spLocks xmlns:a="http://schemas.openxmlformats.org/drawingml/2006/main" noGrp="1"/>
+          </p:cNvSpPr>
+          <p:nvPr/>
+        </p:nvSpPr>
+        <p:spPr>
+          <a:xfrm xmlns:a="http://schemas.openxmlformats.org/drawingml/2006/main">
+            <a:off x="1143000" y="5334000"/>
+            <a:ext cx="9791700" cy="266700"/>
+          </a:xfrm>
+          <a:prstGeom xmlns:a="http://schemas.openxmlformats.org/drawingml/2006/main" prst="rect">
+            <a:avLst/>
+          </a:prstGeom>
+          <a:noFill xmlns:a="http://schemas.openxmlformats.org/drawingml/2006/main"/>
+          <a:ln xmlns:a="http://schemas.openxmlformats.org/drawingml/2006/main" w="0">
+            <a:noFill/>
+            <a:prstDash val="solid"/>
+          </a:ln>
+        </p:spPr>
+        <p:txBody>
+          <a:bodyPr xmlns:a="http://schemas.openxmlformats.org/drawingml/2006/main"/>
+          <a:lstStyle xmlns:a="http://schemas.openxmlformats.org/drawingml/2006/main"/>
+          <a:p xmlns:a="http://schemas.openxmlformats.org/drawingml/2006/main">
+            <a:pPr algn="ctr">
+              <a:defRPr sz="1650" b="1">
+                <a:solidFill>
+                  <a:srgbClr val="16324F"/>
+                </a:solidFill>
+              </a:defRPr>
+            </a:pPr>
+            <a:r>
+              <a:rPr sz="1650" b="1">
+                <a:solidFill>
+                  <a:srgbClr val="16324F"/>
+                </a:solidFill>
+              </a:rPr>
+              <a:t>Gen-AI boleh membantu pekerjaan, tetapi karakter tetap dibentuk oleh kejujuran dan tanggung jawab manusia.</a:t>
+            </a:r>
+          </a:p>
+        </p:txBody>
+      </p:sp>
+      <p:sp>
+        <p:nvSpPr>
+          <p:cNvPr id="26" name="">
+            <a:extLst xmlns:a="http://schemas.openxmlformats.org/drawingml/2006/main">
+              <a:ext uri="{FF2B5EF4-FFF2-40B4-BE49-F238E27FC236}">
+                <a16:creationId xmlns:a16="http://schemas.microsoft.com/office/drawing/2014/main" id="{9A9E487A-A93A-42B5-B36D-ED3428434E4C}"/>
               </a:ext>
             </a:extLst>
           </p:cNvPr>
@@ -6610,10 +6590,10 @@
       </p:sp>
       <p:sp>
         <p:nvSpPr>
-          <p:cNvPr id="21" name="">
-            <a:extLst xmlns:a="http://schemas.openxmlformats.org/drawingml/2006/main">
-              <a:ext uri="{FF2B5EF4-FFF2-40B4-BE49-F238E27FC236}">
-                <a16:creationId xmlns:a16="http://schemas.microsoft.com/office/drawing/2014/main" id="{14BCB757-62CA-43C1-B3F3-0A9A4BB0A093}"/>
+          <p:cNvPr id="27" name="">
+            <a:extLst xmlns:a="http://schemas.openxmlformats.org/drawingml/2006/main">
+              <a:ext uri="{FF2B5EF4-FFF2-40B4-BE49-F238E27FC236}">
+                <a16:creationId xmlns:a16="http://schemas.microsoft.com/office/drawing/2014/main" id="{D2BE9552-EA01-4867-9AFA-8B18FEBDB1D9}"/>
               </a:ext>
             </a:extLst>
           </p:cNvPr>
@@ -6660,10 +6640,10 @@
       </p:sp>
       <p:sp>
         <p:nvSpPr>
-          <p:cNvPr id="22" name="">
-            <a:extLst xmlns:a="http://schemas.openxmlformats.org/drawingml/2006/main">
-              <a:ext uri="{FF2B5EF4-FFF2-40B4-BE49-F238E27FC236}">
-                <a16:creationId xmlns:a16="http://schemas.microsoft.com/office/drawing/2014/main" id="{3C4F141D-7473-49F8-B35D-EE2C70F298A7}"/>
+          <p:cNvPr id="28" name="">
+            <a:extLst xmlns:a="http://schemas.openxmlformats.org/drawingml/2006/main">
+              <a:ext uri="{FF2B5EF4-FFF2-40B4-BE49-F238E27FC236}">
+                <a16:creationId xmlns:a16="http://schemas.microsoft.com/office/drawing/2014/main" id="{66675231-EE8A-49E7-9879-87A399904E43}"/>
               </a:ext>
             </a:extLst>
           </p:cNvPr>
@@ -6711,7 +6691,989 @@
     </p:spTree>
     <p:extLst>
       <p:ext uri="{BB962C8B-B14F-4D97-AF65-F5344CB8AC3E}">
-        <p14:creationId xmlns:p14="http://schemas.microsoft.com/office/powerpoint/2010/main" val="1005909328"/>
+        <p14:creationId xmlns:p14="http://schemas.microsoft.com/office/powerpoint/2010/main" val="1048639439"/>
+      </p:ext>
+    </p:extLst>
+  </p:cSld>
+</p:sld>
+</file>
+
+<file path=ppt/slides/slide7.xml><?xml version="1.0" encoding="utf-8"?>
+<p:sld xmlns:p="http://schemas.openxmlformats.org/presentationml/2006/main">
+  <p:cSld>
+    <p:bg>
+      <p:bgPr>
+        <a:solidFill xmlns:a="http://schemas.openxmlformats.org/drawingml/2006/main">
+          <a:srgbClr val="FFFFFF"/>
+        </a:solidFill>
+      </p:bgPr>
+    </p:bg>
+    <p:spTree>
+      <p:nvGrpSpPr>
+        <p:cNvPr id="1" name=""/>
+        <p:cNvGrpSpPr/>
+        <p:nvPr/>
+      </p:nvGrpSpPr>
+      <p:grpSpPr>
+        <a:xfrm xmlns:a="http://schemas.openxmlformats.org/drawingml/2006/main"/>
+      </p:grpSpPr>
+      <p:pic>
+        <p:nvPicPr>
+          <p:cNvPr id="24" name=""/>
+          <p:cNvPicPr>
+            <a:picLocks xmlns:a="http://schemas.openxmlformats.org/drawingml/2006/main" noChangeAspect="1"/>
+          </p:cNvPicPr>
+          <p:nvPr/>
+        </p:nvPicPr>
+        <p:blipFill>
+          <a:blip xmlns:r="http://schemas.openxmlformats.org/officeDocument/2006/relationships" xmlns:a="http://schemas.openxmlformats.org/drawingml/2006/main" r:embed="Rb7cd4e54e1ec45b9"/>
+          <a:stretch xmlns:a="http://schemas.openxmlformats.org/drawingml/2006/main"/>
+        </p:blipFill>
+        <p:spPr>
+          <a:xfrm xmlns:a="http://schemas.openxmlformats.org/drawingml/2006/main">
+            <a:off x="10363200" y="274760"/>
+            <a:ext cx="1028700" cy="593481"/>
+          </a:xfrm>
+          <a:prstGeom xmlns:a="http://schemas.openxmlformats.org/drawingml/2006/main" prst="rect">
+            <a:avLst/>
+          </a:prstGeom>
+        </p:spPr>
+      </p:pic>
+      <p:sp>
+        <p:nvSpPr>
+          <p:cNvPr id="2" name="">
+            <a:extLst xmlns:a="http://schemas.openxmlformats.org/drawingml/2006/main">
+              <a:ext uri="{FF2B5EF4-FFF2-40B4-BE49-F238E27FC236}">
+                <a16:creationId xmlns:a16="http://schemas.microsoft.com/office/drawing/2014/main" id="{4E1F296D-C2A0-4334-A936-A85DABF37589}"/>
+              </a:ext>
+            </a:extLst>
+          </p:cNvPr>
+          <p:cNvSpPr>
+            <a:spLocks xmlns:a="http://schemas.openxmlformats.org/drawingml/2006/main" noGrp="1"/>
+          </p:cNvSpPr>
+          <p:nvPr/>
+        </p:nvSpPr>
+        <p:spPr>
+          <a:xfrm xmlns:a="http://schemas.openxmlformats.org/drawingml/2006/main">
+            <a:off x="723900" y="666750"/>
+            <a:ext cx="9334500" cy="533400"/>
+          </a:xfrm>
+          <a:prstGeom xmlns:a="http://schemas.openxmlformats.org/drawingml/2006/main" prst="rect">
+            <a:avLst/>
+          </a:prstGeom>
+          <a:solidFill xmlns:a="http://schemas.openxmlformats.org/drawingml/2006/main">
+            <a:srgbClr val="24577A"/>
+          </a:solidFill>
+          <a:ln xmlns:a="http://schemas.openxmlformats.org/drawingml/2006/main" w="0">
+            <a:noFill/>
+            <a:prstDash val="solid"/>
+          </a:ln>
+        </p:spPr>
+      </p:sp>
+      <p:sp>
+        <p:nvSpPr>
+          <p:cNvPr id="3" name="">
+            <a:extLst xmlns:a="http://schemas.openxmlformats.org/drawingml/2006/main">
+              <a:ext uri="{FF2B5EF4-FFF2-40B4-BE49-F238E27FC236}">
+                <a16:creationId xmlns:a16="http://schemas.microsoft.com/office/drawing/2014/main" id="{A4063C10-25D4-49BD-88D0-62A523EFCF3D}"/>
+              </a:ext>
+            </a:extLst>
+          </p:cNvPr>
+          <p:cNvSpPr>
+            <a:spLocks xmlns:a="http://schemas.openxmlformats.org/drawingml/2006/main" noGrp="1"/>
+          </p:cNvSpPr>
+          <p:nvPr/>
+        </p:nvSpPr>
+        <p:spPr>
+          <a:xfrm xmlns:a="http://schemas.openxmlformats.org/drawingml/2006/main">
+            <a:off x="895350" y="762000"/>
+            <a:ext cx="8191500" cy="323850"/>
+          </a:xfrm>
+          <a:prstGeom xmlns:a="http://schemas.openxmlformats.org/drawingml/2006/main" prst="rect">
+            <a:avLst/>
+          </a:prstGeom>
+          <a:noFill xmlns:a="http://schemas.openxmlformats.org/drawingml/2006/main"/>
+          <a:ln xmlns:a="http://schemas.openxmlformats.org/drawingml/2006/main" w="0">
+            <a:noFill/>
+            <a:prstDash val="solid"/>
+          </a:ln>
+        </p:spPr>
+        <p:txBody>
+          <a:bodyPr xmlns:a="http://schemas.openxmlformats.org/drawingml/2006/main"/>
+          <a:lstStyle xmlns:a="http://schemas.openxmlformats.org/drawingml/2006/main"/>
+          <a:p xmlns:a="http://schemas.openxmlformats.org/drawingml/2006/main">
+            <a:pPr algn="l">
+              <a:defRPr sz="2400" b="1">
+                <a:solidFill>
+                  <a:srgbClr val="FFFFFF"/>
+                </a:solidFill>
+              </a:defRPr>
+            </a:pPr>
+            <a:r>
+              <a:rPr sz="2400" b="1">
+                <a:solidFill>
+                  <a:srgbClr val="FFFFFF"/>
+                </a:solidFill>
+              </a:rPr>
+              <a:t>Tugas Kelompok</a:t>
+            </a:r>
+          </a:p>
+        </p:txBody>
+      </p:sp>
+      <p:sp>
+        <p:nvSpPr>
+          <p:cNvPr id="4" name="">
+            <a:extLst xmlns:a="http://schemas.openxmlformats.org/drawingml/2006/main">
+              <a:ext uri="{FF2B5EF4-FFF2-40B4-BE49-F238E27FC236}">
+                <a16:creationId xmlns:a16="http://schemas.microsoft.com/office/drawing/2014/main" id="{A456B273-31C4-4641-B026-1ACFF7C0CBEE}"/>
+              </a:ext>
+            </a:extLst>
+          </p:cNvPr>
+          <p:cNvSpPr>
+            <a:spLocks xmlns:a="http://schemas.openxmlformats.org/drawingml/2006/main" noGrp="1"/>
+          </p:cNvSpPr>
+          <p:nvPr/>
+        </p:nvSpPr>
+        <p:spPr>
+          <a:xfrm xmlns:a="http://schemas.openxmlformats.org/drawingml/2006/main">
+            <a:off x="914400" y="1543050"/>
+            <a:ext cx="10287000" cy="400050"/>
+          </a:xfrm>
+          <a:prstGeom xmlns:a="http://schemas.openxmlformats.org/drawingml/2006/main" prst="rect">
+            <a:avLst/>
+          </a:prstGeom>
+          <a:noFill xmlns:a="http://schemas.openxmlformats.org/drawingml/2006/main"/>
+          <a:ln xmlns:a="http://schemas.openxmlformats.org/drawingml/2006/main" w="0">
+            <a:noFill/>
+            <a:prstDash val="solid"/>
+          </a:ln>
+        </p:spPr>
+        <p:txBody>
+          <a:bodyPr xmlns:a="http://schemas.openxmlformats.org/drawingml/2006/main"/>
+          <a:lstStyle xmlns:a="http://schemas.openxmlformats.org/drawingml/2006/main"/>
+          <a:p xmlns:a="http://schemas.openxmlformats.org/drawingml/2006/main">
+            <a:pPr algn="l">
+              <a:defRPr sz="2250" b="1">
+                <a:solidFill>
+                  <a:srgbClr val="16324F"/>
+                </a:solidFill>
+              </a:defRPr>
+            </a:pPr>
+            <a:r>
+              <a:rPr sz="2250" b="1">
+                <a:solidFill>
+                  <a:srgbClr val="16324F"/>
+                </a:solidFill>
+              </a:rPr>
+              <a:t>Menilai Penggunaan Gen-AI yang Cerdas dan Etis</a:t>
+            </a:r>
+          </a:p>
+        </p:txBody>
+      </p:sp>
+      <p:sp>
+        <p:nvSpPr>
+          <p:cNvPr id="5" name="">
+            <a:extLst xmlns:a="http://schemas.openxmlformats.org/drawingml/2006/main">
+              <a:ext uri="{FF2B5EF4-FFF2-40B4-BE49-F238E27FC236}">
+                <a16:creationId xmlns:a16="http://schemas.microsoft.com/office/drawing/2014/main" id="{A27BA3B2-57E3-4C7A-8D4B-27E692FCBB4D}"/>
+              </a:ext>
+            </a:extLst>
+          </p:cNvPr>
+          <p:cNvSpPr>
+            <a:spLocks xmlns:a="http://schemas.openxmlformats.org/drawingml/2006/main" noGrp="1"/>
+          </p:cNvSpPr>
+          <p:nvPr/>
+        </p:nvSpPr>
+        <p:spPr>
+          <a:xfrm xmlns:a="http://schemas.openxmlformats.org/drawingml/2006/main">
+            <a:off x="990600" y="2266950"/>
+            <a:ext cx="95250" cy="95250"/>
+          </a:xfrm>
+          <a:prstGeom xmlns:a="http://schemas.openxmlformats.org/drawingml/2006/main" prst="ellipse">
+            <a:avLst/>
+          </a:prstGeom>
+          <a:solidFill xmlns:a="http://schemas.openxmlformats.org/drawingml/2006/main">
+            <a:srgbClr val="16324F"/>
+          </a:solidFill>
+          <a:ln xmlns:a="http://schemas.openxmlformats.org/drawingml/2006/main" w="0">
+            <a:noFill/>
+            <a:prstDash val="solid"/>
+          </a:ln>
+        </p:spPr>
+      </p:sp>
+      <p:sp>
+        <p:nvSpPr>
+          <p:cNvPr id="6" name="">
+            <a:extLst xmlns:a="http://schemas.openxmlformats.org/drawingml/2006/main">
+              <a:ext uri="{FF2B5EF4-FFF2-40B4-BE49-F238E27FC236}">
+                <a16:creationId xmlns:a16="http://schemas.microsoft.com/office/drawing/2014/main" id="{E848E1DE-B64C-4ADE-BC09-708DFDFDF25B}"/>
+              </a:ext>
+            </a:extLst>
+          </p:cNvPr>
+          <p:cNvSpPr>
+            <a:spLocks xmlns:a="http://schemas.openxmlformats.org/drawingml/2006/main" noGrp="1"/>
+          </p:cNvSpPr>
+          <p:nvPr/>
+        </p:nvSpPr>
+        <p:spPr>
+          <a:xfrm xmlns:a="http://schemas.openxmlformats.org/drawingml/2006/main">
+            <a:off x="1200150" y="2190750"/>
+            <a:ext cx="9601200" cy="400050"/>
+          </a:xfrm>
+          <a:prstGeom xmlns:a="http://schemas.openxmlformats.org/drawingml/2006/main" prst="rect">
+            <a:avLst/>
+          </a:prstGeom>
+          <a:noFill xmlns:a="http://schemas.openxmlformats.org/drawingml/2006/main"/>
+          <a:ln xmlns:a="http://schemas.openxmlformats.org/drawingml/2006/main" w="0">
+            <a:noFill/>
+            <a:prstDash val="solid"/>
+          </a:ln>
+        </p:spPr>
+        <p:txBody>
+          <a:bodyPr xmlns:a="http://schemas.openxmlformats.org/drawingml/2006/main"/>
+          <a:lstStyle xmlns:a="http://schemas.openxmlformats.org/drawingml/2006/main"/>
+          <a:p xmlns:a="http://schemas.openxmlformats.org/drawingml/2006/main">
+            <a:pPr algn="l">
+              <a:defRPr sz="1575" b="0">
+                <a:solidFill>
+                  <a:srgbClr val="1F2933"/>
+                </a:solidFill>
+              </a:defRPr>
+            </a:pPr>
+            <a:r>
+              <a:rPr sz="1575" b="0">
+                <a:solidFill>
+                  <a:srgbClr val="1F2933"/>
+                </a:solidFill>
+              </a:rPr>
+              <a:t>Pilih satu tool Gen-AI: ChatGPT, Gemini, atau Copilot.</a:t>
+            </a:r>
+          </a:p>
+        </p:txBody>
+      </p:sp>
+      <p:sp>
+        <p:nvSpPr>
+          <p:cNvPr id="7" name="">
+            <a:extLst xmlns:a="http://schemas.openxmlformats.org/drawingml/2006/main">
+              <a:ext uri="{FF2B5EF4-FFF2-40B4-BE49-F238E27FC236}">
+                <a16:creationId xmlns:a16="http://schemas.microsoft.com/office/drawing/2014/main" id="{35D0B349-1BB6-4E5D-A05A-1626E432FC78}"/>
+              </a:ext>
+            </a:extLst>
+          </p:cNvPr>
+          <p:cNvSpPr>
+            <a:spLocks xmlns:a="http://schemas.openxmlformats.org/drawingml/2006/main" noGrp="1"/>
+          </p:cNvSpPr>
+          <p:nvPr/>
+        </p:nvSpPr>
+        <p:spPr>
+          <a:xfrm xmlns:a="http://schemas.openxmlformats.org/drawingml/2006/main">
+            <a:off x="990600" y="2743200"/>
+            <a:ext cx="95250" cy="95250"/>
+          </a:xfrm>
+          <a:prstGeom xmlns:a="http://schemas.openxmlformats.org/drawingml/2006/main" prst="ellipse">
+            <a:avLst/>
+          </a:prstGeom>
+          <a:solidFill xmlns:a="http://schemas.openxmlformats.org/drawingml/2006/main">
+            <a:srgbClr val="16324F"/>
+          </a:solidFill>
+          <a:ln xmlns:a="http://schemas.openxmlformats.org/drawingml/2006/main" w="0">
+            <a:noFill/>
+            <a:prstDash val="solid"/>
+          </a:ln>
+        </p:spPr>
+      </p:sp>
+      <p:sp>
+        <p:nvSpPr>
+          <p:cNvPr id="8" name="">
+            <a:extLst xmlns:a="http://schemas.openxmlformats.org/drawingml/2006/main">
+              <a:ext uri="{FF2B5EF4-FFF2-40B4-BE49-F238E27FC236}">
+                <a16:creationId xmlns:a16="http://schemas.microsoft.com/office/drawing/2014/main" id="{6F26D33A-6B8E-4C2C-B4DE-8B2B72FF3311}"/>
+              </a:ext>
+            </a:extLst>
+          </p:cNvPr>
+          <p:cNvSpPr>
+            <a:spLocks xmlns:a="http://schemas.openxmlformats.org/drawingml/2006/main" noGrp="1"/>
+          </p:cNvSpPr>
+          <p:nvPr/>
+        </p:nvSpPr>
+        <p:spPr>
+          <a:xfrm xmlns:a="http://schemas.openxmlformats.org/drawingml/2006/main">
+            <a:off x="1200150" y="2667000"/>
+            <a:ext cx="9601200" cy="400050"/>
+          </a:xfrm>
+          <a:prstGeom xmlns:a="http://schemas.openxmlformats.org/drawingml/2006/main" prst="rect">
+            <a:avLst/>
+          </a:prstGeom>
+          <a:noFill xmlns:a="http://schemas.openxmlformats.org/drawingml/2006/main"/>
+          <a:ln xmlns:a="http://schemas.openxmlformats.org/drawingml/2006/main" w="0">
+            <a:noFill/>
+            <a:prstDash val="solid"/>
+          </a:ln>
+        </p:spPr>
+        <p:txBody>
+          <a:bodyPr xmlns:a="http://schemas.openxmlformats.org/drawingml/2006/main"/>
+          <a:lstStyle xmlns:a="http://schemas.openxmlformats.org/drawingml/2006/main"/>
+          <a:p xmlns:a="http://schemas.openxmlformats.org/drawingml/2006/main">
+            <a:pPr algn="l">
+              <a:defRPr sz="1575" b="0">
+                <a:solidFill>
+                  <a:srgbClr val="1F2933"/>
+                </a:solidFill>
+              </a:defRPr>
+            </a:pPr>
+            <a:r>
+              <a:rPr sz="1575" b="0">
+                <a:solidFill>
+                  <a:srgbClr val="1F2933"/>
+                </a:solidFill>
+              </a:rPr>
+              <a:t>Jelaskan fungsi sederhananya.</a:t>
+            </a:r>
+          </a:p>
+        </p:txBody>
+      </p:sp>
+      <p:sp>
+        <p:nvSpPr>
+          <p:cNvPr id="9" name="">
+            <a:extLst xmlns:a="http://schemas.openxmlformats.org/drawingml/2006/main">
+              <a:ext uri="{FF2B5EF4-FFF2-40B4-BE49-F238E27FC236}">
+                <a16:creationId xmlns:a16="http://schemas.microsoft.com/office/drawing/2014/main" id="{AB01373F-942A-49FB-B1F3-D92577FF85F5}"/>
+              </a:ext>
+            </a:extLst>
+          </p:cNvPr>
+          <p:cNvSpPr>
+            <a:spLocks xmlns:a="http://schemas.openxmlformats.org/drawingml/2006/main" noGrp="1"/>
+          </p:cNvSpPr>
+          <p:nvPr/>
+        </p:nvSpPr>
+        <p:spPr>
+          <a:xfrm xmlns:a="http://schemas.openxmlformats.org/drawingml/2006/main">
+            <a:off x="990600" y="3219450"/>
+            <a:ext cx="95250" cy="95250"/>
+          </a:xfrm>
+          <a:prstGeom xmlns:a="http://schemas.openxmlformats.org/drawingml/2006/main" prst="ellipse">
+            <a:avLst/>
+          </a:prstGeom>
+          <a:solidFill xmlns:a="http://schemas.openxmlformats.org/drawingml/2006/main">
+            <a:srgbClr val="16324F"/>
+          </a:solidFill>
+          <a:ln xmlns:a="http://schemas.openxmlformats.org/drawingml/2006/main" w="0">
+            <a:noFill/>
+            <a:prstDash val="solid"/>
+          </a:ln>
+        </p:spPr>
+      </p:sp>
+      <p:sp>
+        <p:nvSpPr>
+          <p:cNvPr id="10" name="">
+            <a:extLst xmlns:a="http://schemas.openxmlformats.org/drawingml/2006/main">
+              <a:ext uri="{FF2B5EF4-FFF2-40B4-BE49-F238E27FC236}">
+                <a16:creationId xmlns:a16="http://schemas.microsoft.com/office/drawing/2014/main" id="{1F532500-68DB-4C15-9413-54D5E12BE074}"/>
+              </a:ext>
+            </a:extLst>
+          </p:cNvPr>
+          <p:cNvSpPr>
+            <a:spLocks xmlns:a="http://schemas.openxmlformats.org/drawingml/2006/main" noGrp="1"/>
+          </p:cNvSpPr>
+          <p:nvPr/>
+        </p:nvSpPr>
+        <p:spPr>
+          <a:xfrm xmlns:a="http://schemas.openxmlformats.org/drawingml/2006/main">
+            <a:off x="1200150" y="3143250"/>
+            <a:ext cx="9601200" cy="400050"/>
+          </a:xfrm>
+          <a:prstGeom xmlns:a="http://schemas.openxmlformats.org/drawingml/2006/main" prst="rect">
+            <a:avLst/>
+          </a:prstGeom>
+          <a:noFill xmlns:a="http://schemas.openxmlformats.org/drawingml/2006/main"/>
+          <a:ln xmlns:a="http://schemas.openxmlformats.org/drawingml/2006/main" w="0">
+            <a:noFill/>
+            <a:prstDash val="solid"/>
+          </a:ln>
+        </p:spPr>
+        <p:txBody>
+          <a:bodyPr xmlns:a="http://schemas.openxmlformats.org/drawingml/2006/main"/>
+          <a:lstStyle xmlns:a="http://schemas.openxmlformats.org/drawingml/2006/main"/>
+          <a:p xmlns:a="http://schemas.openxmlformats.org/drawingml/2006/main">
+            <a:pPr algn="l">
+              <a:defRPr sz="1575" b="0">
+                <a:solidFill>
+                  <a:srgbClr val="1F2933"/>
+                </a:solidFill>
+              </a:defRPr>
+            </a:pPr>
+            <a:r>
+              <a:rPr sz="1575" b="0">
+                <a:solidFill>
+                  <a:srgbClr val="1F2933"/>
+                </a:solidFill>
+              </a:rPr>
+              <a:t>Berikan 2 contoh penggunaan yang baik untuk pelajar.</a:t>
+            </a:r>
+          </a:p>
+        </p:txBody>
+      </p:sp>
+      <p:sp>
+        <p:nvSpPr>
+          <p:cNvPr id="11" name="">
+            <a:extLst xmlns:a="http://schemas.openxmlformats.org/drawingml/2006/main">
+              <a:ext uri="{FF2B5EF4-FFF2-40B4-BE49-F238E27FC236}">
+                <a16:creationId xmlns:a16="http://schemas.microsoft.com/office/drawing/2014/main" id="{6B958D59-74E0-4947-9DEA-2B65A2120EC2}"/>
+              </a:ext>
+            </a:extLst>
+          </p:cNvPr>
+          <p:cNvSpPr>
+            <a:spLocks xmlns:a="http://schemas.openxmlformats.org/drawingml/2006/main" noGrp="1"/>
+          </p:cNvSpPr>
+          <p:nvPr/>
+        </p:nvSpPr>
+        <p:spPr>
+          <a:xfrm xmlns:a="http://schemas.openxmlformats.org/drawingml/2006/main">
+            <a:off x="990600" y="3695700"/>
+            <a:ext cx="95250" cy="95250"/>
+          </a:xfrm>
+          <a:prstGeom xmlns:a="http://schemas.openxmlformats.org/drawingml/2006/main" prst="ellipse">
+            <a:avLst/>
+          </a:prstGeom>
+          <a:solidFill xmlns:a="http://schemas.openxmlformats.org/drawingml/2006/main">
+            <a:srgbClr val="16324F"/>
+          </a:solidFill>
+          <a:ln xmlns:a="http://schemas.openxmlformats.org/drawingml/2006/main" w="0">
+            <a:noFill/>
+            <a:prstDash val="solid"/>
+          </a:ln>
+        </p:spPr>
+      </p:sp>
+      <p:sp>
+        <p:nvSpPr>
+          <p:cNvPr id="12" name="">
+            <a:extLst xmlns:a="http://schemas.openxmlformats.org/drawingml/2006/main">
+              <a:ext uri="{FF2B5EF4-FFF2-40B4-BE49-F238E27FC236}">
+                <a16:creationId xmlns:a16="http://schemas.microsoft.com/office/drawing/2014/main" id="{CB76C086-4336-449B-9AB0-46608175E624}"/>
+              </a:ext>
+            </a:extLst>
+          </p:cNvPr>
+          <p:cNvSpPr>
+            <a:spLocks xmlns:a="http://schemas.openxmlformats.org/drawingml/2006/main" noGrp="1"/>
+          </p:cNvSpPr>
+          <p:nvPr/>
+        </p:nvSpPr>
+        <p:spPr>
+          <a:xfrm xmlns:a="http://schemas.openxmlformats.org/drawingml/2006/main">
+            <a:off x="1200150" y="3619500"/>
+            <a:ext cx="9601200" cy="400050"/>
+          </a:xfrm>
+          <a:prstGeom xmlns:a="http://schemas.openxmlformats.org/drawingml/2006/main" prst="rect">
+            <a:avLst/>
+          </a:prstGeom>
+          <a:noFill xmlns:a="http://schemas.openxmlformats.org/drawingml/2006/main"/>
+          <a:ln xmlns:a="http://schemas.openxmlformats.org/drawingml/2006/main" w="0">
+            <a:noFill/>
+            <a:prstDash val="solid"/>
+          </a:ln>
+        </p:spPr>
+        <p:txBody>
+          <a:bodyPr xmlns:a="http://schemas.openxmlformats.org/drawingml/2006/main"/>
+          <a:lstStyle xmlns:a="http://schemas.openxmlformats.org/drawingml/2006/main"/>
+          <a:p xmlns:a="http://schemas.openxmlformats.org/drawingml/2006/main">
+            <a:pPr algn="l">
+              <a:defRPr sz="1575" b="0">
+                <a:solidFill>
+                  <a:srgbClr val="1F2933"/>
+                </a:solidFill>
+              </a:defRPr>
+            </a:pPr>
+            <a:r>
+              <a:rPr sz="1575" b="0">
+                <a:solidFill>
+                  <a:srgbClr val="1F2933"/>
+                </a:solidFill>
+              </a:rPr>
+              <a:t>Berikan 2 contoh penggunaan yang buruk atau tidak etis.</a:t>
+            </a:r>
+          </a:p>
+        </p:txBody>
+      </p:sp>
+      <p:sp>
+        <p:nvSpPr>
+          <p:cNvPr id="13" name="">
+            <a:extLst xmlns:a="http://schemas.openxmlformats.org/drawingml/2006/main">
+              <a:ext uri="{FF2B5EF4-FFF2-40B4-BE49-F238E27FC236}">
+                <a16:creationId xmlns:a16="http://schemas.microsoft.com/office/drawing/2014/main" id="{4ECB9EA8-4993-4CEC-921A-5D25223A3D3B}"/>
+              </a:ext>
+            </a:extLst>
+          </p:cNvPr>
+          <p:cNvSpPr>
+            <a:spLocks xmlns:a="http://schemas.openxmlformats.org/drawingml/2006/main" noGrp="1"/>
+          </p:cNvSpPr>
+          <p:nvPr/>
+        </p:nvSpPr>
+        <p:spPr>
+          <a:xfrm xmlns:a="http://schemas.openxmlformats.org/drawingml/2006/main">
+            <a:off x="990600" y="4171950"/>
+            <a:ext cx="95250" cy="95250"/>
+          </a:xfrm>
+          <a:prstGeom xmlns:a="http://schemas.openxmlformats.org/drawingml/2006/main" prst="ellipse">
+            <a:avLst/>
+          </a:prstGeom>
+          <a:solidFill xmlns:a="http://schemas.openxmlformats.org/drawingml/2006/main">
+            <a:srgbClr val="16324F"/>
+          </a:solidFill>
+          <a:ln xmlns:a="http://schemas.openxmlformats.org/drawingml/2006/main" w="0">
+            <a:noFill/>
+            <a:prstDash val="solid"/>
+          </a:ln>
+        </p:spPr>
+      </p:sp>
+      <p:sp>
+        <p:nvSpPr>
+          <p:cNvPr id="14" name="">
+            <a:extLst xmlns:a="http://schemas.openxmlformats.org/drawingml/2006/main">
+              <a:ext uri="{FF2B5EF4-FFF2-40B4-BE49-F238E27FC236}">
+                <a16:creationId xmlns:a16="http://schemas.microsoft.com/office/drawing/2014/main" id="{63B66869-0317-423D-961A-2B38333DD2DF}"/>
+              </a:ext>
+            </a:extLst>
+          </p:cNvPr>
+          <p:cNvSpPr>
+            <a:spLocks xmlns:a="http://schemas.openxmlformats.org/drawingml/2006/main" noGrp="1"/>
+          </p:cNvSpPr>
+          <p:nvPr/>
+        </p:nvSpPr>
+        <p:spPr>
+          <a:xfrm xmlns:a="http://schemas.openxmlformats.org/drawingml/2006/main">
+            <a:off x="1200150" y="4095750"/>
+            <a:ext cx="9601200" cy="400050"/>
+          </a:xfrm>
+          <a:prstGeom xmlns:a="http://schemas.openxmlformats.org/drawingml/2006/main" prst="rect">
+            <a:avLst/>
+          </a:prstGeom>
+          <a:noFill xmlns:a="http://schemas.openxmlformats.org/drawingml/2006/main"/>
+          <a:ln xmlns:a="http://schemas.openxmlformats.org/drawingml/2006/main" w="0">
+            <a:noFill/>
+            <a:prstDash val="solid"/>
+          </a:ln>
+        </p:spPr>
+        <p:txBody>
+          <a:bodyPr xmlns:a="http://schemas.openxmlformats.org/drawingml/2006/main"/>
+          <a:lstStyle xmlns:a="http://schemas.openxmlformats.org/drawingml/2006/main"/>
+          <a:p xmlns:a="http://schemas.openxmlformats.org/drawingml/2006/main">
+            <a:pPr algn="l">
+              <a:defRPr sz="1575" b="0">
+                <a:solidFill>
+                  <a:srgbClr val="1F2933"/>
+                </a:solidFill>
+              </a:defRPr>
+            </a:pPr>
+            <a:r>
+              <a:rPr sz="1575" b="0">
+                <a:solidFill>
+                  <a:srgbClr val="1F2933"/>
+                </a:solidFill>
+              </a:rPr>
+              <a:t>Tulis 1 prompt yang baik dan 1 prompt yang terlalu umum atau buruk.</a:t>
+            </a:r>
+          </a:p>
+        </p:txBody>
+      </p:sp>
+      <p:sp>
+        <p:nvSpPr>
+          <p:cNvPr id="15" name="">
+            <a:extLst xmlns:a="http://schemas.openxmlformats.org/drawingml/2006/main">
+              <a:ext uri="{FF2B5EF4-FFF2-40B4-BE49-F238E27FC236}">
+                <a16:creationId xmlns:a16="http://schemas.microsoft.com/office/drawing/2014/main" id="{7D65CFBB-DC47-40A1-AADE-D43B59BF4134}"/>
+              </a:ext>
+            </a:extLst>
+          </p:cNvPr>
+          <p:cNvSpPr>
+            <a:spLocks xmlns:a="http://schemas.openxmlformats.org/drawingml/2006/main" noGrp="1"/>
+          </p:cNvSpPr>
+          <p:nvPr/>
+        </p:nvSpPr>
+        <p:spPr>
+          <a:xfrm xmlns:a="http://schemas.openxmlformats.org/drawingml/2006/main">
+            <a:off x="990600" y="4648200"/>
+            <a:ext cx="95250" cy="95250"/>
+          </a:xfrm>
+          <a:prstGeom xmlns:a="http://schemas.openxmlformats.org/drawingml/2006/main" prst="ellipse">
+            <a:avLst/>
+          </a:prstGeom>
+          <a:solidFill xmlns:a="http://schemas.openxmlformats.org/drawingml/2006/main">
+            <a:srgbClr val="16324F"/>
+          </a:solidFill>
+          <a:ln xmlns:a="http://schemas.openxmlformats.org/drawingml/2006/main" w="0">
+            <a:noFill/>
+            <a:prstDash val="solid"/>
+          </a:ln>
+        </p:spPr>
+      </p:sp>
+      <p:sp>
+        <p:nvSpPr>
+          <p:cNvPr id="16" name="">
+            <a:extLst xmlns:a="http://schemas.openxmlformats.org/drawingml/2006/main">
+              <a:ext uri="{FF2B5EF4-FFF2-40B4-BE49-F238E27FC236}">
+                <a16:creationId xmlns:a16="http://schemas.microsoft.com/office/drawing/2014/main" id="{DC2A252A-B868-47B5-B14A-24AFE1DDF49C}"/>
+              </a:ext>
+            </a:extLst>
+          </p:cNvPr>
+          <p:cNvSpPr>
+            <a:spLocks xmlns:a="http://schemas.openxmlformats.org/drawingml/2006/main" noGrp="1"/>
+          </p:cNvSpPr>
+          <p:nvPr/>
+        </p:nvSpPr>
+        <p:spPr>
+          <a:xfrm xmlns:a="http://schemas.openxmlformats.org/drawingml/2006/main">
+            <a:off x="1200150" y="4572000"/>
+            <a:ext cx="9601200" cy="400050"/>
+          </a:xfrm>
+          <a:prstGeom xmlns:a="http://schemas.openxmlformats.org/drawingml/2006/main" prst="rect">
+            <a:avLst/>
+          </a:prstGeom>
+          <a:noFill xmlns:a="http://schemas.openxmlformats.org/drawingml/2006/main"/>
+          <a:ln xmlns:a="http://schemas.openxmlformats.org/drawingml/2006/main" w="0">
+            <a:noFill/>
+            <a:prstDash val="solid"/>
+          </a:ln>
+        </p:spPr>
+        <p:txBody>
+          <a:bodyPr xmlns:a="http://schemas.openxmlformats.org/drawingml/2006/main"/>
+          <a:lstStyle xmlns:a="http://schemas.openxmlformats.org/drawingml/2006/main"/>
+          <a:p xmlns:a="http://schemas.openxmlformats.org/drawingml/2006/main">
+            <a:pPr algn="l">
+              <a:defRPr sz="1575" b="0">
+                <a:solidFill>
+                  <a:srgbClr val="1F2933"/>
+                </a:solidFill>
+              </a:defRPr>
+            </a:pPr>
+            <a:r>
+              <a:rPr sz="1575" b="0">
+                <a:solidFill>
+                  <a:srgbClr val="1F2933"/>
+                </a:solidFill>
+              </a:rPr>
+              <a:t>Rumuskan 3 aturan etika penggunaan Gen-AI di sekolah.</a:t>
+            </a:r>
+          </a:p>
+        </p:txBody>
+      </p:sp>
+      <p:sp>
+        <p:nvSpPr>
+          <p:cNvPr id="17" name="">
+            <a:extLst xmlns:a="http://schemas.openxmlformats.org/drawingml/2006/main">
+              <a:ext uri="{FF2B5EF4-FFF2-40B4-BE49-F238E27FC236}">
+                <a16:creationId xmlns:a16="http://schemas.microsoft.com/office/drawing/2014/main" id="{7F3B3E0F-CAC4-4E19-BC8C-572748C75E23}"/>
+              </a:ext>
+            </a:extLst>
+          </p:cNvPr>
+          <p:cNvSpPr>
+            <a:spLocks xmlns:a="http://schemas.openxmlformats.org/drawingml/2006/main" noGrp="1"/>
+          </p:cNvSpPr>
+          <p:nvPr/>
+        </p:nvSpPr>
+        <p:spPr>
+          <a:xfrm xmlns:a="http://schemas.openxmlformats.org/drawingml/2006/main">
+            <a:off x="914400" y="4876800"/>
+            <a:ext cx="10287000" cy="1066800"/>
+          </a:xfrm>
+          <a:prstGeom xmlns:a="http://schemas.openxmlformats.org/drawingml/2006/main" prst="rect">
+            <a:avLst/>
+          </a:prstGeom>
+          <a:solidFill xmlns:a="http://schemas.openxmlformats.org/drawingml/2006/main">
+            <a:srgbClr val="F5FAFD"/>
+          </a:solidFill>
+          <a:ln xmlns:a="http://schemas.openxmlformats.org/drawingml/2006/main" w="9525">
+            <a:solidFill>
+              <a:srgbClr val="C8D6E2"/>
+            </a:solidFill>
+            <a:prstDash val="solid"/>
+          </a:ln>
+        </p:spPr>
+      </p:sp>
+      <p:sp>
+        <p:nvSpPr>
+          <p:cNvPr id="18" name="">
+            <a:extLst xmlns:a="http://schemas.openxmlformats.org/drawingml/2006/main">
+              <a:ext uri="{FF2B5EF4-FFF2-40B4-BE49-F238E27FC236}">
+                <a16:creationId xmlns:a16="http://schemas.microsoft.com/office/drawing/2014/main" id="{3BCA8399-D7BF-4096-9EAD-0A5D22A89D5E}"/>
+              </a:ext>
+            </a:extLst>
+          </p:cNvPr>
+          <p:cNvSpPr>
+            <a:spLocks xmlns:a="http://schemas.openxmlformats.org/drawingml/2006/main" noGrp="1"/>
+          </p:cNvSpPr>
+          <p:nvPr/>
+        </p:nvSpPr>
+        <p:spPr>
+          <a:xfrm xmlns:a="http://schemas.openxmlformats.org/drawingml/2006/main">
+            <a:off x="1162050" y="5067300"/>
+            <a:ext cx="2476500" cy="228600"/>
+          </a:xfrm>
+          <a:prstGeom xmlns:a="http://schemas.openxmlformats.org/drawingml/2006/main" prst="rect">
+            <a:avLst/>
+          </a:prstGeom>
+          <a:noFill xmlns:a="http://schemas.openxmlformats.org/drawingml/2006/main"/>
+          <a:ln xmlns:a="http://schemas.openxmlformats.org/drawingml/2006/main" w="0">
+            <a:noFill/>
+            <a:prstDash val="solid"/>
+          </a:ln>
+        </p:spPr>
+        <p:txBody>
+          <a:bodyPr xmlns:a="http://schemas.openxmlformats.org/drawingml/2006/main"/>
+          <a:lstStyle xmlns:a="http://schemas.openxmlformats.org/drawingml/2006/main"/>
+          <a:p xmlns:a="http://schemas.openxmlformats.org/drawingml/2006/main">
+            <a:pPr algn="l">
+              <a:defRPr sz="1500" b="1">
+                <a:solidFill>
+                  <a:srgbClr val="24577A"/>
+                </a:solidFill>
+              </a:defRPr>
+            </a:pPr>
+            <a:r>
+              <a:rPr sz="1500" b="1">
+                <a:solidFill>
+                  <a:srgbClr val="24577A"/>
+                </a:solidFill>
+              </a:rPr>
+              <a:t>Pengumpulan tugas</a:t>
+            </a:r>
+          </a:p>
+        </p:txBody>
+      </p:sp>
+      <p:sp>
+        <p:nvSpPr>
+          <p:cNvPr id="19" name="">
+            <a:extLst xmlns:a="http://schemas.openxmlformats.org/drawingml/2006/main">
+              <a:ext uri="{FF2B5EF4-FFF2-40B4-BE49-F238E27FC236}">
+                <a16:creationId xmlns:a16="http://schemas.microsoft.com/office/drawing/2014/main" id="{4A5B8CAC-D469-4651-A973-C978AA646577}"/>
+              </a:ext>
+            </a:extLst>
+          </p:cNvPr>
+          <p:cNvSpPr>
+            <a:spLocks xmlns:a="http://schemas.openxmlformats.org/drawingml/2006/main" noGrp="1"/>
+          </p:cNvSpPr>
+          <p:nvPr/>
+        </p:nvSpPr>
+        <p:spPr>
+          <a:xfrm xmlns:a="http://schemas.openxmlformats.org/drawingml/2006/main">
+            <a:off x="1162050" y="5334000"/>
+            <a:ext cx="4095750" cy="228600"/>
+          </a:xfrm>
+          <a:prstGeom xmlns:a="http://schemas.openxmlformats.org/drawingml/2006/main" prst="rect">
+            <a:avLst/>
+          </a:prstGeom>
+          <a:noFill xmlns:a="http://schemas.openxmlformats.org/drawingml/2006/main"/>
+          <a:ln xmlns:a="http://schemas.openxmlformats.org/drawingml/2006/main" w="0">
+            <a:noFill/>
+            <a:prstDash val="solid"/>
+          </a:ln>
+        </p:spPr>
+        <p:txBody>
+          <a:bodyPr xmlns:a="http://schemas.openxmlformats.org/drawingml/2006/main"/>
+          <a:lstStyle xmlns:a="http://schemas.openxmlformats.org/drawingml/2006/main"/>
+          <a:p xmlns:a="http://schemas.openxmlformats.org/drawingml/2006/main">
+            <a:pPr algn="l">
+              <a:defRPr sz="1350" b="1">
+                <a:solidFill>
+                  <a:srgbClr val="2563EB"/>
+                </a:solidFill>
+              </a:defRPr>
+            </a:pPr>
+            <a:r>
+              <a:rPr sz="1350" b="1">
+                <a:solidFill>
+                  <a:srgbClr val="2563EB"/>
+                </a:solidFill>
+              </a:rPr>
+              <a:t>Kirim ke: ataka.ahmad@gmail.com</a:t>
+            </a:r>
+          </a:p>
+        </p:txBody>
+      </p:sp>
+      <p:sp>
+        <p:nvSpPr>
+          <p:cNvPr id="20" name="">
+            <a:extLst xmlns:a="http://schemas.openxmlformats.org/drawingml/2006/main">
+              <a:ext uri="{FF2B5EF4-FFF2-40B4-BE49-F238E27FC236}">
+                <a16:creationId xmlns:a16="http://schemas.microsoft.com/office/drawing/2014/main" id="{8E05BC82-CECC-4FFD-8009-C4EC9C4E4F28}"/>
+              </a:ext>
+            </a:extLst>
+          </p:cNvPr>
+          <p:cNvSpPr>
+            <a:spLocks xmlns:a="http://schemas.openxmlformats.org/drawingml/2006/main" noGrp="1"/>
+          </p:cNvSpPr>
+          <p:nvPr/>
+        </p:nvSpPr>
+        <p:spPr>
+          <a:xfrm xmlns:a="http://schemas.openxmlformats.org/drawingml/2006/main">
+            <a:off x="1162050" y="5581650"/>
+            <a:ext cx="7524750" cy="209550"/>
+          </a:xfrm>
+          <a:prstGeom xmlns:a="http://schemas.openxmlformats.org/drawingml/2006/main" prst="rect">
+            <a:avLst/>
+          </a:prstGeom>
+          <a:noFill xmlns:a="http://schemas.openxmlformats.org/drawingml/2006/main"/>
+          <a:ln xmlns:a="http://schemas.openxmlformats.org/drawingml/2006/main" w="0">
+            <a:noFill/>
+            <a:prstDash val="solid"/>
+          </a:ln>
+        </p:spPr>
+        <p:txBody>
+          <a:bodyPr xmlns:a="http://schemas.openxmlformats.org/drawingml/2006/main"/>
+          <a:lstStyle xmlns:a="http://schemas.openxmlformats.org/drawingml/2006/main"/>
+          <a:p xmlns:a="http://schemas.openxmlformats.org/drawingml/2006/main">
+            <a:pPr algn="l">
+              <a:defRPr sz="1275" b="1">
+                <a:solidFill>
+                  <a:srgbClr val="1F2933"/>
+                </a:solidFill>
+              </a:defRPr>
+            </a:pPr>
+            <a:r>
+              <a:rPr sz="1275" b="1">
+                <a:solidFill>
+                  <a:srgbClr val="1F2933"/>
+                </a:solidFill>
+              </a:rPr>
+              <a:t>Subject: SMA Teladan X - Tugas Gen-AI - [Nama Kelompok]</a:t>
+            </a:r>
+          </a:p>
+        </p:txBody>
+      </p:sp>
+      <p:sp>
+        <p:nvSpPr>
+          <p:cNvPr id="21" name="">
+            <a:extLst xmlns:a="http://schemas.openxmlformats.org/drawingml/2006/main">
+              <a:ext uri="{FF2B5EF4-FFF2-40B4-BE49-F238E27FC236}">
+                <a16:creationId xmlns:a16="http://schemas.microsoft.com/office/drawing/2014/main" id="{C5BB811D-4AA3-46E8-B698-E4EFC7F2AEF4}"/>
+              </a:ext>
+            </a:extLst>
+          </p:cNvPr>
+          <p:cNvSpPr>
+            <a:spLocks xmlns:a="http://schemas.openxmlformats.org/drawingml/2006/main" noGrp="1"/>
+          </p:cNvSpPr>
+          <p:nvPr/>
+        </p:nvSpPr>
+        <p:spPr>
+          <a:xfrm xmlns:a="http://schemas.openxmlformats.org/drawingml/2006/main">
+            <a:off x="723900" y="6400800"/>
+            <a:ext cx="10744200" cy="11430"/>
+          </a:xfrm>
+          <a:prstGeom xmlns:a="http://schemas.openxmlformats.org/drawingml/2006/main" prst="rect">
+            <a:avLst/>
+          </a:prstGeom>
+          <a:solidFill xmlns:a="http://schemas.openxmlformats.org/drawingml/2006/main">
+            <a:srgbClr val="C8D6E2"/>
+          </a:solidFill>
+          <a:ln xmlns:a="http://schemas.openxmlformats.org/drawingml/2006/main" w="0">
+            <a:noFill/>
+            <a:prstDash val="solid"/>
+          </a:ln>
+        </p:spPr>
+      </p:sp>
+      <p:sp>
+        <p:nvSpPr>
+          <p:cNvPr id="22" name="">
+            <a:extLst xmlns:a="http://schemas.openxmlformats.org/drawingml/2006/main">
+              <a:ext uri="{FF2B5EF4-FFF2-40B4-BE49-F238E27FC236}">
+                <a16:creationId xmlns:a16="http://schemas.microsoft.com/office/drawing/2014/main" id="{3A916EC0-02DB-468D-80F1-2B020BF40619}"/>
+              </a:ext>
+            </a:extLst>
+          </p:cNvPr>
+          <p:cNvSpPr>
+            <a:spLocks xmlns:a="http://schemas.openxmlformats.org/drawingml/2006/main" noGrp="1"/>
+          </p:cNvSpPr>
+          <p:nvPr/>
+        </p:nvSpPr>
+        <p:spPr>
+          <a:xfrm xmlns:a="http://schemas.openxmlformats.org/drawingml/2006/main">
+            <a:off x="742950" y="6477000"/>
+            <a:ext cx="3810000" cy="171450"/>
+          </a:xfrm>
+          <a:prstGeom xmlns:a="http://schemas.openxmlformats.org/drawingml/2006/main" prst="rect">
+            <a:avLst/>
+          </a:prstGeom>
+          <a:noFill xmlns:a="http://schemas.openxmlformats.org/drawingml/2006/main"/>
+          <a:ln xmlns:a="http://schemas.openxmlformats.org/drawingml/2006/main" w="0">
+            <a:noFill/>
+            <a:prstDash val="solid"/>
+          </a:ln>
+        </p:spPr>
+        <p:txBody>
+          <a:bodyPr xmlns:a="http://schemas.openxmlformats.org/drawingml/2006/main"/>
+          <a:lstStyle xmlns:a="http://schemas.openxmlformats.org/drawingml/2006/main"/>
+          <a:p xmlns:a="http://schemas.openxmlformats.org/drawingml/2006/main">
+            <a:pPr algn="l">
+              <a:defRPr sz="900" b="0">
+                <a:solidFill>
+                  <a:srgbClr val="5B6770"/>
+                </a:solidFill>
+              </a:defRPr>
+            </a:pPr>
+            <a:r>
+              <a:rPr sz="900" b="0">
+                <a:solidFill>
+                  <a:srgbClr val="5B6770"/>
+                </a:solidFill>
+              </a:rPr>
+              <a:t>SMA Teladan Yogyakarta • Unique Value Kelas X</a:t>
+            </a:r>
+          </a:p>
+        </p:txBody>
+      </p:sp>
+      <p:sp>
+        <p:nvSpPr>
+          <p:cNvPr id="23" name="">
+            <a:extLst xmlns:a="http://schemas.openxmlformats.org/drawingml/2006/main">
+              <a:ext uri="{FF2B5EF4-FFF2-40B4-BE49-F238E27FC236}">
+                <a16:creationId xmlns:a16="http://schemas.microsoft.com/office/drawing/2014/main" id="{841EEBF3-CDB4-4B55-B6DF-2E5E820F5063}"/>
+              </a:ext>
+            </a:extLst>
+          </p:cNvPr>
+          <p:cNvSpPr>
+            <a:spLocks xmlns:a="http://schemas.openxmlformats.org/drawingml/2006/main" noGrp="1"/>
+          </p:cNvSpPr>
+          <p:nvPr/>
+        </p:nvSpPr>
+        <p:spPr>
+          <a:xfrm xmlns:a="http://schemas.openxmlformats.org/drawingml/2006/main">
+            <a:off x="10858500" y="6457950"/>
+            <a:ext cx="533400" cy="190500"/>
+          </a:xfrm>
+          <a:prstGeom xmlns:a="http://schemas.openxmlformats.org/drawingml/2006/main" prst="rect">
+            <a:avLst/>
+          </a:prstGeom>
+          <a:noFill xmlns:a="http://schemas.openxmlformats.org/drawingml/2006/main"/>
+          <a:ln xmlns:a="http://schemas.openxmlformats.org/drawingml/2006/main" w="0">
+            <a:noFill/>
+            <a:prstDash val="solid"/>
+          </a:ln>
+        </p:spPr>
+        <p:txBody>
+          <a:bodyPr xmlns:a="http://schemas.openxmlformats.org/drawingml/2006/main"/>
+          <a:lstStyle xmlns:a="http://schemas.openxmlformats.org/drawingml/2006/main"/>
+          <a:p xmlns:a="http://schemas.openxmlformats.org/drawingml/2006/main">
+            <a:pPr algn="r">
+              <a:defRPr sz="900" b="0">
+                <a:solidFill>
+                  <a:srgbClr val="5B6770"/>
+                </a:solidFill>
+              </a:defRPr>
+            </a:pPr>
+            <a:r>
+              <a:rPr sz="900" b="0">
+                <a:solidFill>
+                  <a:srgbClr val="5B6770"/>
+                </a:solidFill>
+              </a:rPr>
+              <a:t>7</a:t>
+            </a:r>
+          </a:p>
+        </p:txBody>
+      </p:sp>
+    </p:spTree>
+    <p:extLst>
+      <p:ext uri="{BB962C8B-B14F-4D97-AF65-F5344CB8AC3E}">
+        <p14:creationId xmlns:p14="http://schemas.microsoft.com/office/powerpoint/2010/main" val="825563123"/>
       </p:ext>
     </p:extLst>
   </p:cSld>
@@ -6721,7 +7683,7 @@
 <file path=ppt/theme/theme1.xml><?xml version="1.0" encoding="utf-8"?>
 <a:theme xmlns:a="http://schemas.openxmlformats.org/drawingml/2006/main" name="ChatGPT">
   <a:themeElements>
-    <a:clrScheme name="Teladan Gen AI">
+    <a:clrScheme name="ChatGPT">
       <a:dk1>
         <a:srgbClr val="000000"/>
       </a:dk1>
@@ -6729,34 +7691,34 @@
         <a:srgbClr val="FFFFFF"/>
       </a:lt1>
       <a:dk2>
-        <a:srgbClr val="16324F"/>
+        <a:srgbClr val="0E2841"/>
       </a:dk2>
       <a:lt2>
-        <a:srgbClr val="E5EEF5"/>
+        <a:srgbClr val="E8E8E8"/>
       </a:lt2>
       <a:accent1>
-        <a:srgbClr val="24577A"/>
+        <a:srgbClr val="156082"/>
       </a:accent1>
       <a:accent2>
-        <a:srgbClr val="D8A93A"/>
+        <a:srgbClr val="E97132"/>
       </a:accent2>
       <a:accent3>
-        <a:srgbClr val="5F87A2"/>
+        <a:srgbClr val="196B24"/>
       </a:accent3>
       <a:accent4>
-        <a:srgbClr val="A6C4D8"/>
+        <a:srgbClr val="0F9ED5"/>
       </a:accent4>
       <a:accent5>
-        <a:srgbClr val="345D7A"/>
+        <a:srgbClr val="A02B93"/>
       </a:accent5>
       <a:accent6>
-        <a:srgbClr val="6F8CA0"/>
+        <a:srgbClr val="4EA72E"/>
       </a:accent6>
       <a:hlink>
-        <a:srgbClr val="2563EB"/>
+        <a:srgbClr val="467886"/>
       </a:hlink>
       <a:folHlink>
-        <a:srgbClr val="7C3AED"/>
+        <a:srgbClr val="96607D"/>
       </a:folHlink>
     </a:clrScheme>
     <a:fontScheme name="Office">
@@ -6771,7 +7733,7 @@
         <a:cs typeface="Calibri"/>
       </a:minorFont>
     </a:fontScheme>
-    <a:fmtScheme name="Teladan Gen AI">
+    <a:fmtScheme name="ChatGPT">
       <a:fillStyleLst>
         <a:solidFill>
           <a:schemeClr val="phClr"/>
